--- a/meetings/30-june/presentation/progress-deck.pptx
+++ b/meetings/30-june/presentation/progress-deck.pptx
@@ -11,6 +11,7 @@
     <p:sldId id="259" r:id="rId6"/>
     <p:sldId id="260" r:id="rId7"/>
     <p:sldId id="261" r:id="rId8"/>
+    <p:sldId id="262" r:id="rId9"/>
   </p:sldIdLst>
   <p:sldSz cx="12192000" cy="6858000"/>
   <p:notesSz cx="7772400" cy="10058400"/>
@@ -18,8 +19,8 @@
 </file>
 
 <file path=ppt/slideLayouts/slideLayout1.xml><?xml version="1.0" encoding="utf-8"?>
-<p:sldLayout xmlns:a="http://schemas.openxmlformats.org/drawingml/2006/main" xmlns:p="http://schemas.openxmlformats.org/presentationml/2006/main" xmlns:r="http://schemas.openxmlformats.org/officeDocument/2006/relationships" xmlns:p14="http://schemas.microsoft.com/office/powerpoint/2010/main" xmlns:p15="http://schemas.microsoft.com/office/powerpoint/2012/main" xmlns:mc="http://schemas.openxmlformats.org/markup-compatibility/2006" type="title" preserve="1">
-  <p:cSld name="Title Slide">
+<p:sldLayout xmlns:a="http://schemas.openxmlformats.org/drawingml/2006/main" xmlns:p="http://schemas.openxmlformats.org/presentationml/2006/main" xmlns:r="http://schemas.openxmlformats.org/officeDocument/2006/relationships" xmlns:p14="http://schemas.microsoft.com/office/powerpoint/2010/main" xmlns:p15="http://schemas.microsoft.com/office/powerpoint/2012/main" xmlns:mc="http://schemas.openxmlformats.org/markup-compatibility/2006" type="blank" preserve="1">
+  <p:cSld name="Blank">
     <p:bg>
       <p:bgPr>
         <a:solidFill>
@@ -48,69 +49,13 @@
             <a:spLocks noGrp="1"/>
           </p:cNvSpPr>
           <p:nvPr>
-            <p:ph type="title"/>
-          </p:nvPr>
-        </p:nvSpPr>
-        <p:spPr>
-          <a:xfrm>
-            <a:off x="685800" y="2130480"/>
-            <a:ext cx="7772040" cy="1469520"/>
-          </a:xfrm>
-          <a:prstGeom prst="rect">
-            <a:avLst/>
-          </a:prstGeom>
-          <a:noFill/>
-          <a:ln w="0">
-            <a:noFill/>
-          </a:ln>
-        </p:spPr>
-        <p:txBody>
-          <a:bodyPr lIns="91440" rIns="91440" tIns="45720" bIns="45720" anchor="ctr">
-            <a:noAutofit/>
-          </a:bodyPr>
-          <a:p>
-            <a:pPr indent="0" algn="ctr" defTabSz="457200">
-              <a:lnSpc>
-                <a:spcPct val="100000"/>
-              </a:lnSpc>
-              <a:buNone/>
-            </a:pPr>
-            <a:r>
-              <a:rPr lang="en-US" sz="4400" b="0" u="none" strike="noStrike">
-                <a:solidFill>
-                  <a:schemeClr val="dk1"/>
-                </a:solidFill>
-                <a:effectLst/>
-                <a:uFillTx/>
-                <a:latin typeface="Calibri"/>
-              </a:rPr>
-              <a:t>Click to edit Master title style</a:t>
-            </a:r>
-            <a:endParaRPr lang="en-US" sz="4400" b="0" u="none" strike="noStrike">
-              <a:solidFill>
-                <a:schemeClr val="dk1"/>
-              </a:solidFill>
-              <a:effectLst/>
-              <a:uFillTx/>
-              <a:latin typeface="Calibri"/>
-            </a:endParaRPr>
-          </a:p>
-        </p:txBody>
-      </p:sp>
-      <p:sp>
-        <p:nvSpPr>
-          <p:cNvPr id="3" name="PlaceHolder 2"/>
-          <p:cNvSpPr>
-            <a:spLocks noGrp="1"/>
-          </p:cNvSpPr>
-          <p:nvPr>
             <p:ph type="dt" idx="1"/>
           </p:nvPr>
         </p:nvSpPr>
         <p:spPr>
           <a:xfrm>
             <a:off x="457200" y="6356520"/>
-            <a:ext cx="2133360" cy="364680"/>
+            <a:ext cx="2133000" cy="364320"/>
           </a:xfrm>
           <a:prstGeom prst="rect">
             <a:avLst/>
@@ -130,6 +75,9 @@
                 <a:spcPct val="100000"/>
               </a:lnSpc>
               <a:buNone/>
+              <a:tabLst>
+                <a:tab algn="l" pos="0"/>
+              </a:tabLst>
               <a:defRPr lang="en-US" sz="1200" b="0" u="none" strike="noStrike">
                 <a:solidFill>
                   <a:schemeClr val="dk1">
@@ -148,6 +96,9 @@
                 <a:spcPct val="100000"/>
               </a:lnSpc>
               <a:buNone/>
+              <a:tabLst>
+                <a:tab algn="l" pos="0"/>
+              </a:tabLst>
             </a:pPr>
             <a:r>
               <a:rPr lang="en-US" sz="1200" b="0" u="none" strike="noStrike">
@@ -175,7 +126,7 @@
       </p:sp>
       <p:sp>
         <p:nvSpPr>
-          <p:cNvPr id="4" name="PlaceHolder 3"/>
+          <p:cNvPr id="3" name="PlaceHolder 2"/>
           <p:cNvSpPr>
             <a:spLocks noGrp="1"/>
           </p:cNvSpPr>
@@ -186,7 +137,7 @@
         <p:spPr>
           <a:xfrm>
             <a:off x="3124080" y="6356520"/>
-            <a:ext cx="2895120" cy="364680"/>
+            <a:ext cx="2894760" cy="364320"/>
           </a:xfrm>
           <a:prstGeom prst="rect">
             <a:avLst/>
@@ -202,7 +153,13 @@
           </a:bodyPr>
           <a:lstStyle>
             <a:lvl1pPr indent="0" algn="ctr">
+              <a:lnSpc>
+                <a:spcPct val="100000"/>
+              </a:lnSpc>
               <a:buNone/>
+              <a:tabLst>
+                <a:tab algn="l" pos="0"/>
+              </a:tabLst>
               <a:defRPr lang="en-US" sz="1400" b="0" u="none" strike="noStrike">
                 <a:solidFill>
                   <a:srgbClr val="000000"/>
@@ -215,7 +172,13 @@
           </a:lstStyle>
           <a:p>
             <a:pPr indent="0" algn="ctr">
+              <a:lnSpc>
+                <a:spcPct val="100000"/>
+              </a:lnSpc>
               <a:buNone/>
+              <a:tabLst>
+                <a:tab algn="l" pos="0"/>
+              </a:tabLst>
             </a:pPr>
             <a:r>
               <a:rPr lang="en-US" sz="1400" b="0" u="none" strike="noStrike">
@@ -241,7 +204,7 @@
       </p:sp>
       <p:sp>
         <p:nvSpPr>
-          <p:cNvPr id="5" name="PlaceHolder 4"/>
+          <p:cNvPr id="4" name="PlaceHolder 3"/>
           <p:cNvSpPr>
             <a:spLocks noGrp="1"/>
           </p:cNvSpPr>
@@ -252,7 +215,7 @@
         <p:spPr>
           <a:xfrm>
             <a:off x="6553080" y="6356520"/>
-            <a:ext cx="2133360" cy="364680"/>
+            <a:ext cx="2133000" cy="364320"/>
           </a:xfrm>
           <a:prstGeom prst="rect">
             <a:avLst/>
@@ -272,6 +235,9 @@
                 <a:spcPct val="100000"/>
               </a:lnSpc>
               <a:buNone/>
+              <a:tabLst>
+                <a:tab algn="l" pos="0"/>
+              </a:tabLst>
               <a:defRPr lang="en-US" sz="1200" b="0" u="none" strike="noStrike">
                 <a:solidFill>
                   <a:schemeClr val="dk1">
@@ -290,8 +256,11 @@
                 <a:spcPct val="100000"/>
               </a:lnSpc>
               <a:buNone/>
-            </a:pPr>
-            <a:fld id="{89409E39-FDCA-464E-8D7B-B9C9BB3C13F4}" type="slidenum">
+              <a:tabLst>
+                <a:tab algn="l" pos="0"/>
+              </a:tabLst>
+            </a:pPr>
+            <a:fld id="{D12EB865-C251-4FD9-BC72-108A219591AD}" type="slidenum">
               <a:rPr lang="en-US" sz="1200" b="0" u="none" strike="noStrike">
                 <a:solidFill>
                   <a:schemeClr val="dk1">
@@ -311,6 +280,339 @@
               <a:effectLst/>
               <a:uFillTx/>
               <a:latin typeface="Times New Roman"/>
+            </a:endParaRPr>
+          </a:p>
+        </p:txBody>
+      </p:sp>
+      <p:sp>
+        <p:nvSpPr>
+          <p:cNvPr id="5" name="PlaceHolder 4"/>
+          <p:cNvSpPr>
+            <a:spLocks noGrp="1"/>
+          </p:cNvSpPr>
+          <p:nvPr>
+            <p:ph type="title"/>
+          </p:nvPr>
+        </p:nvSpPr>
+        <p:spPr>
+          <a:xfrm>
+            <a:off x="609480" y="273600"/>
+            <a:ext cx="10971720" cy="1144440"/>
+          </a:xfrm>
+          <a:prstGeom prst="rect">
+            <a:avLst/>
+          </a:prstGeom>
+          <a:noFill/>
+          <a:ln w="0">
+            <a:noFill/>
+          </a:ln>
+        </p:spPr>
+        <p:txBody>
+          <a:bodyPr lIns="0" rIns="0" tIns="0" bIns="0" anchor="ctr">
+            <a:noAutofit/>
+          </a:bodyPr>
+          <a:p>
+            <a:pPr indent="0">
+              <a:lnSpc>
+                <a:spcPct val="100000"/>
+              </a:lnSpc>
+              <a:buNone/>
+              <a:tabLst>
+                <a:tab algn="l" pos="0"/>
+              </a:tabLst>
+            </a:pPr>
+            <a:r>
+              <a:rPr lang="en-US" sz="1800" b="0" u="none" strike="noStrike">
+                <a:solidFill>
+                  <a:schemeClr val="dk1"/>
+                </a:solidFill>
+                <a:effectLst/>
+                <a:uFillTx/>
+                <a:latin typeface="Calibri"/>
+              </a:rPr>
+              <a:t>Click to edit the title text format</a:t>
+            </a:r>
+            <a:endParaRPr lang="en-US" sz="1800" b="0" u="none" strike="noStrike">
+              <a:solidFill>
+                <a:srgbClr val="000000"/>
+              </a:solidFill>
+              <a:effectLst/>
+              <a:uFillTx/>
+              <a:latin typeface="Arial"/>
+            </a:endParaRPr>
+          </a:p>
+        </p:txBody>
+      </p:sp>
+      <p:sp>
+        <p:nvSpPr>
+          <p:cNvPr id="6" name="PlaceHolder 5"/>
+          <p:cNvSpPr>
+            <a:spLocks noGrp="1"/>
+          </p:cNvSpPr>
+          <p:nvPr>
+            <p:ph type="body"/>
+          </p:nvPr>
+        </p:nvSpPr>
+        <p:spPr>
+          <a:xfrm>
+            <a:off x="609480" y="1604520"/>
+            <a:ext cx="10971720" cy="3976920"/>
+          </a:xfrm>
+          <a:prstGeom prst="rect">
+            <a:avLst/>
+          </a:prstGeom>
+          <a:noFill/>
+          <a:ln w="0">
+            <a:noFill/>
+          </a:ln>
+        </p:spPr>
+        <p:txBody>
+          <a:bodyPr lIns="0" rIns="0" tIns="0" bIns="0" anchor="t">
+            <a:normAutofit/>
+          </a:bodyPr>
+          <a:p>
+            <a:pPr marL="432000" indent="-324000">
+              <a:lnSpc>
+                <a:spcPct val="100000"/>
+              </a:lnSpc>
+              <a:spcBef>
+                <a:spcPts val="1417"/>
+              </a:spcBef>
+              <a:buClr>
+                <a:srgbClr val="000000"/>
+              </a:buClr>
+              <a:buSzPct val="45000"/>
+              <a:buFont typeface="Wingdings" charset="2"/>
+              <a:buChar char=""/>
+            </a:pPr>
+            <a:r>
+              <a:rPr lang="en-US" sz="3200" b="0" u="none" strike="noStrike">
+                <a:solidFill>
+                  <a:schemeClr val="dk1"/>
+                </a:solidFill>
+                <a:effectLst/>
+                <a:uFillTx/>
+                <a:latin typeface="Calibri"/>
+              </a:rPr>
+              <a:t>Click to edit the outline text format</a:t>
+            </a:r>
+            <a:endParaRPr lang="en-US" sz="3200" b="0" u="none" strike="noStrike">
+              <a:solidFill>
+                <a:srgbClr val="000000"/>
+              </a:solidFill>
+              <a:effectLst/>
+              <a:uFillTx/>
+              <a:latin typeface="Arial"/>
+            </a:endParaRPr>
+          </a:p>
+          <a:p>
+            <a:pPr marL="864000" lvl="1" indent="-324000">
+              <a:lnSpc>
+                <a:spcPct val="100000"/>
+              </a:lnSpc>
+              <a:spcBef>
+                <a:spcPts val="1134"/>
+              </a:spcBef>
+              <a:buClr>
+                <a:srgbClr val="000000"/>
+              </a:buClr>
+              <a:buSzPct val="75000"/>
+              <a:buFont typeface="Symbol" charset="2"/>
+              <a:buChar char=""/>
+            </a:pPr>
+            <a:r>
+              <a:rPr lang="en-US" sz="2400" b="0" u="none" strike="noStrike">
+                <a:solidFill>
+                  <a:schemeClr val="dk1"/>
+                </a:solidFill>
+                <a:effectLst/>
+                <a:uFillTx/>
+                <a:latin typeface="Calibri"/>
+              </a:rPr>
+              <a:t>Second Outline Level</a:t>
+            </a:r>
+            <a:endParaRPr lang="en-US" sz="2400" b="0" u="none" strike="noStrike">
+              <a:solidFill>
+                <a:srgbClr val="000000"/>
+              </a:solidFill>
+              <a:effectLst/>
+              <a:uFillTx/>
+              <a:latin typeface="Arial"/>
+            </a:endParaRPr>
+          </a:p>
+          <a:p>
+            <a:pPr marL="1296000" lvl="2" indent="-288000">
+              <a:lnSpc>
+                <a:spcPct val="100000"/>
+              </a:lnSpc>
+              <a:spcBef>
+                <a:spcPts val="850"/>
+              </a:spcBef>
+              <a:buClr>
+                <a:srgbClr val="000000"/>
+              </a:buClr>
+              <a:buSzPct val="45000"/>
+              <a:buFont typeface="Wingdings" charset="2"/>
+              <a:buChar char=""/>
+            </a:pPr>
+            <a:r>
+              <a:rPr lang="en-US" sz="2000" b="0" u="none" strike="noStrike">
+                <a:solidFill>
+                  <a:schemeClr val="dk1"/>
+                </a:solidFill>
+                <a:effectLst/>
+                <a:uFillTx/>
+                <a:latin typeface="Calibri"/>
+              </a:rPr>
+              <a:t>Third Outline Level</a:t>
+            </a:r>
+            <a:endParaRPr lang="en-US" sz="2000" b="0" u="none" strike="noStrike">
+              <a:solidFill>
+                <a:srgbClr val="000000"/>
+              </a:solidFill>
+              <a:effectLst/>
+              <a:uFillTx/>
+              <a:latin typeface="Arial"/>
+            </a:endParaRPr>
+          </a:p>
+          <a:p>
+            <a:pPr marL="1728000" lvl="3" indent="-216000">
+              <a:lnSpc>
+                <a:spcPct val="100000"/>
+              </a:lnSpc>
+              <a:spcBef>
+                <a:spcPts val="567"/>
+              </a:spcBef>
+              <a:buClr>
+                <a:srgbClr val="000000"/>
+              </a:buClr>
+              <a:buSzPct val="75000"/>
+              <a:buFont typeface="Symbol" charset="2"/>
+              <a:buChar char=""/>
+            </a:pPr>
+            <a:r>
+              <a:rPr lang="en-US" sz="2000" b="0" u="none" strike="noStrike">
+                <a:solidFill>
+                  <a:schemeClr val="dk1"/>
+                </a:solidFill>
+                <a:effectLst/>
+                <a:uFillTx/>
+                <a:latin typeface="Calibri"/>
+              </a:rPr>
+              <a:t>Fourth Outline Level</a:t>
+            </a:r>
+            <a:endParaRPr lang="en-US" sz="2000" b="0" u="none" strike="noStrike">
+              <a:solidFill>
+                <a:srgbClr val="000000"/>
+              </a:solidFill>
+              <a:effectLst/>
+              <a:uFillTx/>
+              <a:latin typeface="Arial"/>
+            </a:endParaRPr>
+          </a:p>
+          <a:p>
+            <a:pPr marL="2160000" lvl="4" indent="-216000">
+              <a:lnSpc>
+                <a:spcPct val="100000"/>
+              </a:lnSpc>
+              <a:spcBef>
+                <a:spcPts val="283"/>
+              </a:spcBef>
+              <a:buClr>
+                <a:srgbClr val="000000"/>
+              </a:buClr>
+              <a:buSzPct val="45000"/>
+              <a:buFont typeface="Wingdings" charset="2"/>
+              <a:buChar char=""/>
+            </a:pPr>
+            <a:r>
+              <a:rPr lang="en-US" sz="2000" b="0" u="none" strike="noStrike">
+                <a:solidFill>
+                  <a:schemeClr val="dk1"/>
+                </a:solidFill>
+                <a:effectLst/>
+                <a:uFillTx/>
+                <a:latin typeface="Calibri"/>
+              </a:rPr>
+              <a:t>Fifth Outline Level</a:t>
+            </a:r>
+            <a:endParaRPr lang="en-US" sz="2000" b="0" u="none" strike="noStrike">
+              <a:solidFill>
+                <a:srgbClr val="000000"/>
+              </a:solidFill>
+              <a:effectLst/>
+              <a:uFillTx/>
+              <a:latin typeface="Arial"/>
+            </a:endParaRPr>
+          </a:p>
+          <a:p>
+            <a:pPr marL="2592000" lvl="5" indent="-216000">
+              <a:lnSpc>
+                <a:spcPct val="100000"/>
+              </a:lnSpc>
+              <a:spcBef>
+                <a:spcPts val="283"/>
+              </a:spcBef>
+              <a:buClr>
+                <a:srgbClr val="000000"/>
+              </a:buClr>
+              <a:buSzPct val="45000"/>
+              <a:buFont typeface="Wingdings" charset="2"/>
+              <a:buChar char=""/>
+            </a:pPr>
+            <a:r>
+              <a:rPr lang="en-US" sz="2000" b="0" u="none" strike="noStrike">
+                <a:solidFill>
+                  <a:schemeClr val="dk1"/>
+                </a:solidFill>
+                <a:effectLst/>
+                <a:uFillTx/>
+                <a:latin typeface="Calibri"/>
+              </a:rPr>
+              <a:t>Sixth Outline Level</a:t>
+            </a:r>
+            <a:endParaRPr lang="en-US" sz="2000" b="0" u="none" strike="noStrike">
+              <a:solidFill>
+                <a:srgbClr val="000000"/>
+              </a:solidFill>
+              <a:effectLst/>
+              <a:uFillTx/>
+              <a:latin typeface="Arial"/>
+            </a:endParaRPr>
+          </a:p>
+          <a:p>
+            <a:pPr marL="3024000" lvl="6" indent="-216000">
+              <a:lnSpc>
+                <a:spcPct val="100000"/>
+              </a:lnSpc>
+              <a:spcBef>
+                <a:spcPts val="283"/>
+              </a:spcBef>
+              <a:buClr>
+                <a:srgbClr val="000000"/>
+              </a:buClr>
+              <a:buSzPct val="45000"/>
+              <a:buFont typeface="Wingdings" charset="2"/>
+              <a:buChar char=""/>
+            </a:pPr>
+            <a:r>
+              <a:rPr lang="en-US" sz="2000" b="0" u="none" strike="noStrike">
+                <a:solidFill>
+                  <a:schemeClr val="dk1"/>
+                </a:solidFill>
+                <a:effectLst/>
+                <a:uFillTx/>
+                <a:latin typeface="Calibri"/>
+              </a:rPr>
+              <a:t>Seventh Outline Level</a:t>
+            </a:r>
+            <a:endParaRPr lang="en-US" sz="2000" b="0" u="none" strike="noStrike">
+              <a:solidFill>
+                <a:srgbClr val="000000"/>
+              </a:solidFill>
+              <a:effectLst/>
+              <a:uFillTx/>
+              <a:latin typeface="Arial"/>
             </a:endParaRPr>
           </a:p>
         </p:txBody>
@@ -322,7 +624,7 @@
 
 <file path=ppt/slideLayouts/slideLayout10.xml><?xml version="1.0" encoding="utf-8"?>
 <p:sldLayout xmlns:a="http://schemas.openxmlformats.org/drawingml/2006/main" xmlns:p="http://schemas.openxmlformats.org/presentationml/2006/main" xmlns:r="http://schemas.openxmlformats.org/officeDocument/2006/relationships" xmlns:p14="http://schemas.microsoft.com/office/powerpoint/2010/main" xmlns:p15="http://schemas.microsoft.com/office/powerpoint/2012/main" xmlns:mc="http://schemas.openxmlformats.org/markup-compatibility/2006" type="blank" preserve="1">
-  <p:cSld name="Content with Caption">
+  <p:cSld name="Comparison">
     <p:bg>
       <p:bgPr>
         <a:solidFill>
@@ -356,8 +658,8 @@
         </p:nvSpPr>
         <p:spPr>
           <a:xfrm>
-            <a:off x="457200" y="272880"/>
-            <a:ext cx="3007800" cy="1161720"/>
+            <a:off x="457200" y="274680"/>
+            <a:ext cx="8228880" cy="1142280"/>
           </a:xfrm>
           <a:prstGeom prst="rect">
             <a:avLst/>
@@ -368,18 +670,21 @@
           </a:ln>
         </p:spPr>
         <p:txBody>
-          <a:bodyPr lIns="91440" rIns="91440" tIns="45720" bIns="45720" anchor="b">
+          <a:bodyPr lIns="91440" rIns="91440" tIns="45720" bIns="45720" anchor="ctr">
             <a:noAutofit/>
           </a:bodyPr>
           <a:p>
-            <a:pPr indent="0" defTabSz="457200">
+            <a:pPr indent="0" algn="ctr" defTabSz="457200">
               <a:lnSpc>
                 <a:spcPct val="100000"/>
               </a:lnSpc>
               <a:buNone/>
-            </a:pPr>
-            <a:r>
-              <a:rPr lang="en-US" sz="2000" b="1" u="none" strike="noStrike">
+              <a:tabLst>
+                <a:tab algn="l" pos="0"/>
+              </a:tabLst>
+            </a:pPr>
+            <a:r>
+              <a:rPr lang="en-US" sz="4400" b="0" u="none" strike="noStrike">
                 <a:solidFill>
                   <a:schemeClr val="dk1"/>
                 </a:solidFill>
@@ -389,13 +694,13 @@
               </a:rPr>
               <a:t>Click to edit Master title style</a:t>
             </a:r>
-            <a:endParaRPr lang="en-US" sz="2000" b="0" u="none" strike="noStrike">
-              <a:solidFill>
-                <a:schemeClr val="dk1"/>
-              </a:solidFill>
-              <a:effectLst/>
-              <a:uFillTx/>
-              <a:latin typeface="Calibri"/>
+            <a:endParaRPr lang="en-US" sz="4400" b="0" u="none" strike="noStrike">
+              <a:solidFill>
+                <a:srgbClr val="000000"/>
+              </a:solidFill>
+              <a:effectLst/>
+              <a:uFillTx/>
+              <a:latin typeface="Arial"/>
             </a:endParaRPr>
           </a:p>
         </p:txBody>
@@ -412,8 +717,8 @@
         </p:nvSpPr>
         <p:spPr>
           <a:xfrm>
-            <a:off x="3575160" y="272880"/>
-            <a:ext cx="5111280" cy="5852880"/>
+            <a:off x="457200" y="1535040"/>
+            <a:ext cx="4039560" cy="639000"/>
           </a:xfrm>
           <a:prstGeom prst="rect">
             <a:avLst/>
@@ -424,93 +729,24 @@
           </a:ln>
         </p:spPr>
         <p:txBody>
-          <a:bodyPr lIns="91440" rIns="91440" tIns="45720" bIns="45720" anchor="t">
+          <a:bodyPr lIns="91440" rIns="91440" tIns="45720" bIns="45720" anchor="b">
             <a:noAutofit/>
           </a:bodyPr>
           <a:p>
-            <a:pPr marL="343080" indent="-343080" defTabSz="457200">
-              <a:lnSpc>
-                <a:spcPct val="100000"/>
-              </a:lnSpc>
-              <a:spcBef>
-                <a:spcPts val="641"/>
-              </a:spcBef>
-              <a:buClr>
-                <a:srgbClr val="000000"/>
-              </a:buClr>
-              <a:buFont typeface="Arial"/>
-              <a:buChar char="•"/>
-            </a:pPr>
-            <a:r>
-              <a:rPr lang="en-US" sz="3200" b="0" u="none" strike="noStrike">
-                <a:solidFill>
-                  <a:schemeClr val="dk1"/>
-                </a:solidFill>
-                <a:effectLst/>
-                <a:uFillTx/>
-                <a:latin typeface="Calibri"/>
-              </a:rPr>
-              <a:t>Click to edit Master text styles</a:t>
-            </a:r>
-            <a:endParaRPr lang="en-US" sz="3200" b="0" u="none" strike="noStrike">
-              <a:solidFill>
-                <a:schemeClr val="dk1"/>
-              </a:solidFill>
-              <a:effectLst/>
-              <a:uFillTx/>
-              <a:latin typeface="Calibri"/>
-            </a:endParaRPr>
-          </a:p>
-          <a:p>
-            <a:pPr marL="743040" lvl="1" indent="-285840" defTabSz="457200">
-              <a:lnSpc>
-                <a:spcPct val="100000"/>
-              </a:lnSpc>
-              <a:spcBef>
-                <a:spcPts val="561"/>
-              </a:spcBef>
-              <a:buClr>
-                <a:srgbClr val="000000"/>
-              </a:buClr>
-              <a:buFont typeface="Arial"/>
-              <a:buChar char="–"/>
-            </a:pPr>
-            <a:r>
-              <a:rPr lang="en-US" sz="2800" b="0" u="none" strike="noStrike">
-                <a:solidFill>
-                  <a:schemeClr val="dk1"/>
-                </a:solidFill>
-                <a:effectLst/>
-                <a:uFillTx/>
-                <a:latin typeface="Calibri"/>
-              </a:rPr>
-              <a:t>Second level</a:t>
-            </a:r>
-            <a:endParaRPr lang="en-US" sz="2800" b="0" u="none" strike="noStrike">
-              <a:solidFill>
-                <a:schemeClr val="dk1"/>
-              </a:solidFill>
-              <a:effectLst/>
-              <a:uFillTx/>
-              <a:latin typeface="Calibri"/>
-            </a:endParaRPr>
-          </a:p>
-          <a:p>
-            <a:pPr marL="1143000" lvl="2" indent="-228600" defTabSz="457200">
+            <a:pPr indent="0" defTabSz="457200">
               <a:lnSpc>
                 <a:spcPct val="100000"/>
               </a:lnSpc>
               <a:spcBef>
                 <a:spcPts val="479"/>
               </a:spcBef>
-              <a:buClr>
-                <a:srgbClr val="000000"/>
-              </a:buClr>
-              <a:buFont typeface="Arial"/>
-              <a:buChar char="•"/>
-            </a:pPr>
-            <a:r>
-              <a:rPr lang="en-US" sz="2400" b="0" u="none" strike="noStrike">
+              <a:buNone/>
+              <a:tabLst>
+                <a:tab algn="l" pos="0"/>
+              </a:tabLst>
+            </a:pPr>
+            <a:r>
+              <a:rPr lang="en-US" sz="2400" b="1" u="none" strike="noStrike">
                 <a:solidFill>
                   <a:schemeClr val="dk1"/>
                 </a:solidFill>
@@ -518,83 +754,15 @@
                 <a:uFillTx/>
                 <a:latin typeface="Calibri"/>
               </a:rPr>
-              <a:t>Third level</a:t>
+              <a:t>Click to edit Master text styles</a:t>
             </a:r>
             <a:endParaRPr lang="en-US" sz="2400" b="0" u="none" strike="noStrike">
               <a:solidFill>
-                <a:schemeClr val="dk1"/>
-              </a:solidFill>
-              <a:effectLst/>
-              <a:uFillTx/>
-              <a:latin typeface="Calibri"/>
-            </a:endParaRPr>
-          </a:p>
-          <a:p>
-            <a:pPr marL="1600200" lvl="3" indent="-228600" defTabSz="457200">
-              <a:lnSpc>
-                <a:spcPct val="100000"/>
-              </a:lnSpc>
-              <a:spcBef>
-                <a:spcPts val="400"/>
-              </a:spcBef>
-              <a:buClr>
-                <a:srgbClr val="000000"/>
-              </a:buClr>
-              <a:buFont typeface="Arial"/>
-              <a:buChar char="–"/>
-            </a:pPr>
-            <a:r>
-              <a:rPr lang="en-US" sz="2000" b="0" u="none" strike="noStrike">
-                <a:solidFill>
-                  <a:schemeClr val="dk1"/>
-                </a:solidFill>
-                <a:effectLst/>
-                <a:uFillTx/>
-                <a:latin typeface="Calibri"/>
-              </a:rPr>
-              <a:t>Fourth level</a:t>
-            </a:r>
-            <a:endParaRPr lang="en-US" sz="2000" b="0" u="none" strike="noStrike">
-              <a:solidFill>
-                <a:schemeClr val="dk1"/>
-              </a:solidFill>
-              <a:effectLst/>
-              <a:uFillTx/>
-              <a:latin typeface="Calibri"/>
-            </a:endParaRPr>
-          </a:p>
-          <a:p>
-            <a:pPr marL="2057400" lvl="4" indent="-228600" defTabSz="457200">
-              <a:lnSpc>
-                <a:spcPct val="100000"/>
-              </a:lnSpc>
-              <a:spcBef>
-                <a:spcPts val="400"/>
-              </a:spcBef>
-              <a:buClr>
-                <a:srgbClr val="000000"/>
-              </a:buClr>
-              <a:buFont typeface="Arial"/>
-              <a:buChar char="»"/>
-            </a:pPr>
-            <a:r>
-              <a:rPr lang="en-US" sz="2000" b="0" u="none" strike="noStrike">
-                <a:solidFill>
-                  <a:schemeClr val="dk1"/>
-                </a:solidFill>
-                <a:effectLst/>
-                <a:uFillTx/>
-                <a:latin typeface="Calibri"/>
-              </a:rPr>
-              <a:t>Fifth level</a:t>
-            </a:r>
-            <a:endParaRPr lang="en-US" sz="2000" b="0" u="none" strike="noStrike">
-              <a:solidFill>
-                <a:schemeClr val="dk1"/>
-              </a:solidFill>
-              <a:effectLst/>
-              <a:uFillTx/>
-              <a:latin typeface="Calibri"/>
+                <a:srgbClr val="000000"/>
+              </a:solidFill>
+              <a:effectLst/>
+              <a:uFillTx/>
+              <a:latin typeface="Arial"/>
             </a:endParaRPr>
           </a:p>
         </p:txBody>
@@ -611,8 +779,8 @@
         </p:nvSpPr>
         <p:spPr>
           <a:xfrm>
-            <a:off x="457200" y="1434960"/>
-            <a:ext cx="3007800" cy="4690800"/>
+            <a:off x="457200" y="2174760"/>
+            <a:ext cx="4039560" cy="3950640"/>
           </a:xfrm>
           <a:prstGeom prst="rect">
             <a:avLst/>
@@ -627,12 +795,211 @@
             <a:noAutofit/>
           </a:bodyPr>
           <a:p>
+            <a:pPr marL="343080" indent="-343080" defTabSz="457200">
+              <a:lnSpc>
+                <a:spcPct val="100000"/>
+              </a:lnSpc>
+              <a:spcBef>
+                <a:spcPts val="479"/>
+              </a:spcBef>
+              <a:buClr>
+                <a:srgbClr val="000000"/>
+              </a:buClr>
+              <a:buFont typeface="Arial"/>
+              <a:buChar char="•"/>
+            </a:pPr>
+            <a:r>
+              <a:rPr lang="en-US" sz="2400" b="0" u="none" strike="noStrike">
+                <a:solidFill>
+                  <a:schemeClr val="dk1"/>
+                </a:solidFill>
+                <a:effectLst/>
+                <a:uFillTx/>
+                <a:latin typeface="Calibri"/>
+              </a:rPr>
+              <a:t>Click to edit Master text styles</a:t>
+            </a:r>
+            <a:endParaRPr lang="en-US" sz="2400" b="0" u="none" strike="noStrike">
+              <a:solidFill>
+                <a:srgbClr val="000000"/>
+              </a:solidFill>
+              <a:effectLst/>
+              <a:uFillTx/>
+              <a:latin typeface="Arial"/>
+            </a:endParaRPr>
+          </a:p>
+          <a:p>
+            <a:pPr marL="743040" lvl="1" indent="-285840" defTabSz="457200">
+              <a:lnSpc>
+                <a:spcPct val="100000"/>
+              </a:lnSpc>
+              <a:spcBef>
+                <a:spcPts val="400"/>
+              </a:spcBef>
+              <a:buClr>
+                <a:srgbClr val="000000"/>
+              </a:buClr>
+              <a:buFont typeface="Arial"/>
+              <a:buChar char="–"/>
+            </a:pPr>
+            <a:r>
+              <a:rPr lang="en-US" sz="2000" b="0" u="none" strike="noStrike">
+                <a:solidFill>
+                  <a:schemeClr val="dk1"/>
+                </a:solidFill>
+                <a:effectLst/>
+                <a:uFillTx/>
+                <a:latin typeface="Calibri"/>
+              </a:rPr>
+              <a:t>Second level</a:t>
+            </a:r>
+            <a:endParaRPr lang="en-US" sz="2000" b="0" u="none" strike="noStrike">
+              <a:solidFill>
+                <a:srgbClr val="000000"/>
+              </a:solidFill>
+              <a:effectLst/>
+              <a:uFillTx/>
+              <a:latin typeface="Arial"/>
+            </a:endParaRPr>
+          </a:p>
+          <a:p>
+            <a:pPr marL="1143000" lvl="2" indent="-228600" defTabSz="457200">
+              <a:lnSpc>
+                <a:spcPct val="100000"/>
+              </a:lnSpc>
+              <a:spcBef>
+                <a:spcPts val="360"/>
+              </a:spcBef>
+              <a:buClr>
+                <a:srgbClr val="000000"/>
+              </a:buClr>
+              <a:buFont typeface="Arial"/>
+              <a:buChar char="•"/>
+            </a:pPr>
+            <a:r>
+              <a:rPr lang="en-US" sz="1800" b="0" u="none" strike="noStrike">
+                <a:solidFill>
+                  <a:schemeClr val="dk1"/>
+                </a:solidFill>
+                <a:effectLst/>
+                <a:uFillTx/>
+                <a:latin typeface="Calibri"/>
+              </a:rPr>
+              <a:t>Third level</a:t>
+            </a:r>
+            <a:endParaRPr lang="en-US" sz="1800" b="0" u="none" strike="noStrike">
+              <a:solidFill>
+                <a:srgbClr val="000000"/>
+              </a:solidFill>
+              <a:effectLst/>
+              <a:uFillTx/>
+              <a:latin typeface="Arial"/>
+            </a:endParaRPr>
+          </a:p>
+          <a:p>
+            <a:pPr marL="1600200" lvl="3" indent="-228600" defTabSz="457200">
+              <a:lnSpc>
+                <a:spcPct val="100000"/>
+              </a:lnSpc>
+              <a:spcBef>
+                <a:spcPts val="320"/>
+              </a:spcBef>
+              <a:buClr>
+                <a:srgbClr val="000000"/>
+              </a:buClr>
+              <a:buFont typeface="Arial"/>
+              <a:buChar char="–"/>
+            </a:pPr>
+            <a:r>
+              <a:rPr lang="en-US" sz="1600" b="0" u="none" strike="noStrike">
+                <a:solidFill>
+                  <a:schemeClr val="dk1"/>
+                </a:solidFill>
+                <a:effectLst/>
+                <a:uFillTx/>
+                <a:latin typeface="Calibri"/>
+              </a:rPr>
+              <a:t>Fourth level</a:t>
+            </a:r>
+            <a:endParaRPr lang="en-US" sz="1600" b="0" u="none" strike="noStrike">
+              <a:solidFill>
+                <a:srgbClr val="000000"/>
+              </a:solidFill>
+              <a:effectLst/>
+              <a:uFillTx/>
+              <a:latin typeface="Arial"/>
+            </a:endParaRPr>
+          </a:p>
+          <a:p>
+            <a:pPr marL="2057400" lvl="4" indent="-228600" defTabSz="457200">
+              <a:lnSpc>
+                <a:spcPct val="100000"/>
+              </a:lnSpc>
+              <a:spcBef>
+                <a:spcPts val="320"/>
+              </a:spcBef>
+              <a:buClr>
+                <a:srgbClr val="000000"/>
+              </a:buClr>
+              <a:buFont typeface="Arial"/>
+              <a:buChar char="»"/>
+            </a:pPr>
+            <a:r>
+              <a:rPr lang="en-US" sz="1600" b="0" u="none" strike="noStrike">
+                <a:solidFill>
+                  <a:schemeClr val="dk1"/>
+                </a:solidFill>
+                <a:effectLst/>
+                <a:uFillTx/>
+                <a:latin typeface="Calibri"/>
+              </a:rPr>
+              <a:t>Fifth level</a:t>
+            </a:r>
+            <a:endParaRPr lang="en-US" sz="1600" b="0" u="none" strike="noStrike">
+              <a:solidFill>
+                <a:srgbClr val="000000"/>
+              </a:solidFill>
+              <a:effectLst/>
+              <a:uFillTx/>
+              <a:latin typeface="Arial"/>
+            </a:endParaRPr>
+          </a:p>
+        </p:txBody>
+      </p:sp>
+      <p:sp>
+        <p:nvSpPr>
+          <p:cNvPr id="52" name="PlaceHolder 4"/>
+          <p:cNvSpPr>
+            <a:spLocks noGrp="1"/>
+          </p:cNvSpPr>
+          <p:nvPr>
+            <p:ph type="body"/>
+          </p:nvPr>
+        </p:nvSpPr>
+        <p:spPr>
+          <a:xfrm>
+            <a:off x="4645080" y="1535040"/>
+            <a:ext cx="4041000" cy="639000"/>
+          </a:xfrm>
+          <a:prstGeom prst="rect">
+            <a:avLst/>
+          </a:prstGeom>
+          <a:noFill/>
+          <a:ln w="0">
+            <a:noFill/>
+          </a:ln>
+        </p:spPr>
+        <p:txBody>
+          <a:bodyPr lIns="91440" rIns="91440" tIns="45720" bIns="45720" anchor="b">
+            <a:noAutofit/>
+          </a:bodyPr>
+          <a:p>
             <a:pPr indent="0" defTabSz="457200">
               <a:lnSpc>
                 <a:spcPct val="100000"/>
               </a:lnSpc>
               <a:spcBef>
-                <a:spcPts val="281"/>
+                <a:spcPts val="479"/>
               </a:spcBef>
               <a:buNone/>
               <a:tabLst>
@@ -640,7 +1007,7 @@
               </a:tabLst>
             </a:pPr>
             <a:r>
-              <a:rPr lang="en-US" sz="1400" b="0" u="none" strike="noStrike">
+              <a:rPr lang="en-US" sz="2400" b="1" u="none" strike="noStrike">
                 <a:solidFill>
                   <a:schemeClr val="dk1"/>
                 </a:solidFill>
@@ -650,20 +1017,219 @@
               </a:rPr>
               <a:t>Click to edit Master text styles</a:t>
             </a:r>
-            <a:endParaRPr lang="en-US" sz="1400" b="0" u="none" strike="noStrike">
-              <a:solidFill>
-                <a:schemeClr val="dk1"/>
-              </a:solidFill>
-              <a:effectLst/>
-              <a:uFillTx/>
-              <a:latin typeface="Calibri"/>
+            <a:endParaRPr lang="en-US" sz="2400" b="0" u="none" strike="noStrike">
+              <a:solidFill>
+                <a:srgbClr val="000000"/>
+              </a:solidFill>
+              <a:effectLst/>
+              <a:uFillTx/>
+              <a:latin typeface="Arial"/>
             </a:endParaRPr>
           </a:p>
         </p:txBody>
       </p:sp>
       <p:sp>
         <p:nvSpPr>
-          <p:cNvPr id="52" name="PlaceHolder 4"/>
+          <p:cNvPr id="53" name="PlaceHolder 5"/>
+          <p:cNvSpPr>
+            <a:spLocks noGrp="1"/>
+          </p:cNvSpPr>
+          <p:nvPr>
+            <p:ph type="body"/>
+          </p:nvPr>
+        </p:nvSpPr>
+        <p:spPr>
+          <a:xfrm>
+            <a:off x="4645080" y="2174760"/>
+            <a:ext cx="4041000" cy="3950640"/>
+          </a:xfrm>
+          <a:prstGeom prst="rect">
+            <a:avLst/>
+          </a:prstGeom>
+          <a:noFill/>
+          <a:ln w="0">
+            <a:noFill/>
+          </a:ln>
+        </p:spPr>
+        <p:txBody>
+          <a:bodyPr lIns="91440" rIns="91440" tIns="45720" bIns="45720" anchor="t">
+            <a:noAutofit/>
+          </a:bodyPr>
+          <a:p>
+            <a:pPr marL="343080" indent="-343080" defTabSz="457200">
+              <a:lnSpc>
+                <a:spcPct val="100000"/>
+              </a:lnSpc>
+              <a:spcBef>
+                <a:spcPts val="479"/>
+              </a:spcBef>
+              <a:buClr>
+                <a:srgbClr val="000000"/>
+              </a:buClr>
+              <a:buFont typeface="Arial"/>
+              <a:buChar char="•"/>
+            </a:pPr>
+            <a:r>
+              <a:rPr lang="en-US" sz="2400" b="0" u="none" strike="noStrike">
+                <a:solidFill>
+                  <a:schemeClr val="dk1"/>
+                </a:solidFill>
+                <a:effectLst/>
+                <a:uFillTx/>
+                <a:latin typeface="Calibri"/>
+              </a:rPr>
+              <a:t>Click to edit Master text styles</a:t>
+            </a:r>
+            <a:endParaRPr lang="en-US" sz="2400" b="0" u="none" strike="noStrike">
+              <a:solidFill>
+                <a:srgbClr val="000000"/>
+              </a:solidFill>
+              <a:effectLst/>
+              <a:uFillTx/>
+              <a:latin typeface="Arial"/>
+            </a:endParaRPr>
+          </a:p>
+          <a:p>
+            <a:pPr marL="743040" lvl="1" indent="-285840" defTabSz="457200">
+              <a:lnSpc>
+                <a:spcPct val="100000"/>
+              </a:lnSpc>
+              <a:spcBef>
+                <a:spcPts val="400"/>
+              </a:spcBef>
+              <a:buClr>
+                <a:srgbClr val="000000"/>
+              </a:buClr>
+              <a:buFont typeface="Arial"/>
+              <a:buChar char="–"/>
+            </a:pPr>
+            <a:r>
+              <a:rPr lang="en-US" sz="2000" b="0" u="none" strike="noStrike">
+                <a:solidFill>
+                  <a:schemeClr val="dk1"/>
+                </a:solidFill>
+                <a:effectLst/>
+                <a:uFillTx/>
+                <a:latin typeface="Calibri"/>
+              </a:rPr>
+              <a:t>Second level</a:t>
+            </a:r>
+            <a:endParaRPr lang="en-US" sz="2000" b="0" u="none" strike="noStrike">
+              <a:solidFill>
+                <a:srgbClr val="000000"/>
+              </a:solidFill>
+              <a:effectLst/>
+              <a:uFillTx/>
+              <a:latin typeface="Arial"/>
+            </a:endParaRPr>
+          </a:p>
+          <a:p>
+            <a:pPr marL="1143000" lvl="2" indent="-228600" defTabSz="457200">
+              <a:lnSpc>
+                <a:spcPct val="100000"/>
+              </a:lnSpc>
+              <a:spcBef>
+                <a:spcPts val="360"/>
+              </a:spcBef>
+              <a:buClr>
+                <a:srgbClr val="000000"/>
+              </a:buClr>
+              <a:buFont typeface="Arial"/>
+              <a:buChar char="•"/>
+            </a:pPr>
+            <a:r>
+              <a:rPr lang="en-US" sz="1800" b="0" u="none" strike="noStrike">
+                <a:solidFill>
+                  <a:schemeClr val="dk1"/>
+                </a:solidFill>
+                <a:effectLst/>
+                <a:uFillTx/>
+                <a:latin typeface="Calibri"/>
+              </a:rPr>
+              <a:t>Third level</a:t>
+            </a:r>
+            <a:endParaRPr lang="en-US" sz="1800" b="0" u="none" strike="noStrike">
+              <a:solidFill>
+                <a:srgbClr val="000000"/>
+              </a:solidFill>
+              <a:effectLst/>
+              <a:uFillTx/>
+              <a:latin typeface="Arial"/>
+            </a:endParaRPr>
+          </a:p>
+          <a:p>
+            <a:pPr marL="1600200" lvl="3" indent="-228600" defTabSz="457200">
+              <a:lnSpc>
+                <a:spcPct val="100000"/>
+              </a:lnSpc>
+              <a:spcBef>
+                <a:spcPts val="320"/>
+              </a:spcBef>
+              <a:buClr>
+                <a:srgbClr val="000000"/>
+              </a:buClr>
+              <a:buFont typeface="Arial"/>
+              <a:buChar char="–"/>
+            </a:pPr>
+            <a:r>
+              <a:rPr lang="en-US" sz="1600" b="0" u="none" strike="noStrike">
+                <a:solidFill>
+                  <a:schemeClr val="dk1"/>
+                </a:solidFill>
+                <a:effectLst/>
+                <a:uFillTx/>
+                <a:latin typeface="Calibri"/>
+              </a:rPr>
+              <a:t>Fourth level</a:t>
+            </a:r>
+            <a:endParaRPr lang="en-US" sz="1600" b="0" u="none" strike="noStrike">
+              <a:solidFill>
+                <a:srgbClr val="000000"/>
+              </a:solidFill>
+              <a:effectLst/>
+              <a:uFillTx/>
+              <a:latin typeface="Arial"/>
+            </a:endParaRPr>
+          </a:p>
+          <a:p>
+            <a:pPr marL="2057400" lvl="4" indent="-228600" defTabSz="457200">
+              <a:lnSpc>
+                <a:spcPct val="100000"/>
+              </a:lnSpc>
+              <a:spcBef>
+                <a:spcPts val="320"/>
+              </a:spcBef>
+              <a:buClr>
+                <a:srgbClr val="000000"/>
+              </a:buClr>
+              <a:buFont typeface="Arial"/>
+              <a:buChar char="»"/>
+            </a:pPr>
+            <a:r>
+              <a:rPr lang="en-US" sz="1600" b="0" u="none" strike="noStrike">
+                <a:solidFill>
+                  <a:schemeClr val="dk1"/>
+                </a:solidFill>
+                <a:effectLst/>
+                <a:uFillTx/>
+                <a:latin typeface="Calibri"/>
+              </a:rPr>
+              <a:t>Fifth level</a:t>
+            </a:r>
+            <a:endParaRPr lang="en-US" sz="1600" b="0" u="none" strike="noStrike">
+              <a:solidFill>
+                <a:srgbClr val="000000"/>
+              </a:solidFill>
+              <a:effectLst/>
+              <a:uFillTx/>
+              <a:latin typeface="Arial"/>
+            </a:endParaRPr>
+          </a:p>
+        </p:txBody>
+      </p:sp>
+      <p:sp>
+        <p:nvSpPr>
+          <p:cNvPr id="54" name="PlaceHolder 6"/>
           <p:cNvSpPr>
             <a:spLocks noGrp="1"/>
           </p:cNvSpPr>
@@ -674,7 +1240,7 @@
         <p:spPr>
           <a:xfrm>
             <a:off x="457200" y="6356520"/>
-            <a:ext cx="2133360" cy="364680"/>
+            <a:ext cx="2133000" cy="364320"/>
           </a:xfrm>
           <a:prstGeom prst="rect">
             <a:avLst/>
@@ -694,6 +1260,9 @@
                 <a:spcPct val="100000"/>
               </a:lnSpc>
               <a:buNone/>
+              <a:tabLst>
+                <a:tab algn="l" pos="0"/>
+              </a:tabLst>
               <a:defRPr lang="en-US" sz="1200" b="0" u="none" strike="noStrike">
                 <a:solidFill>
                   <a:schemeClr val="dk1">
@@ -712,6 +1281,9 @@
                 <a:spcPct val="100000"/>
               </a:lnSpc>
               <a:buNone/>
+              <a:tabLst>
+                <a:tab algn="l" pos="0"/>
+              </a:tabLst>
             </a:pPr>
             <a:r>
               <a:rPr lang="en-US" sz="1200" b="0" u="none" strike="noStrike">
@@ -739,7 +1311,7 @@
       </p:sp>
       <p:sp>
         <p:nvSpPr>
-          <p:cNvPr id="53" name="PlaceHolder 5"/>
+          <p:cNvPr id="55" name="PlaceHolder 7"/>
           <p:cNvSpPr>
             <a:spLocks noGrp="1"/>
           </p:cNvSpPr>
@@ -750,7 +1322,7 @@
         <p:spPr>
           <a:xfrm>
             <a:off x="3124080" y="6356520"/>
-            <a:ext cx="2895120" cy="364680"/>
+            <a:ext cx="2894760" cy="364320"/>
           </a:xfrm>
           <a:prstGeom prst="rect">
             <a:avLst/>
@@ -766,7 +1338,13 @@
           </a:bodyPr>
           <a:lstStyle>
             <a:lvl1pPr indent="0" algn="ctr">
+              <a:lnSpc>
+                <a:spcPct val="100000"/>
+              </a:lnSpc>
               <a:buNone/>
+              <a:tabLst>
+                <a:tab algn="l" pos="0"/>
+              </a:tabLst>
               <a:defRPr lang="en-US" sz="1400" b="0" u="none" strike="noStrike">
                 <a:solidFill>
                   <a:srgbClr val="000000"/>
@@ -779,7 +1357,13 @@
           </a:lstStyle>
           <a:p>
             <a:pPr indent="0" algn="ctr">
+              <a:lnSpc>
+                <a:spcPct val="100000"/>
+              </a:lnSpc>
               <a:buNone/>
+              <a:tabLst>
+                <a:tab algn="l" pos="0"/>
+              </a:tabLst>
             </a:pPr>
             <a:r>
               <a:rPr lang="en-US" sz="1400" b="0" u="none" strike="noStrike">
@@ -805,7 +1389,7 @@
       </p:sp>
       <p:sp>
         <p:nvSpPr>
-          <p:cNvPr id="54" name="PlaceHolder 6"/>
+          <p:cNvPr id="56" name="PlaceHolder 8"/>
           <p:cNvSpPr>
             <a:spLocks noGrp="1"/>
           </p:cNvSpPr>
@@ -816,7 +1400,7 @@
         <p:spPr>
           <a:xfrm>
             <a:off x="6553080" y="6356520"/>
-            <a:ext cx="2133360" cy="364680"/>
+            <a:ext cx="2133000" cy="364320"/>
           </a:xfrm>
           <a:prstGeom prst="rect">
             <a:avLst/>
@@ -836,6 +1420,9 @@
                 <a:spcPct val="100000"/>
               </a:lnSpc>
               <a:buNone/>
+              <a:tabLst>
+                <a:tab algn="l" pos="0"/>
+              </a:tabLst>
               <a:defRPr lang="en-US" sz="1200" b="0" u="none" strike="noStrike">
                 <a:solidFill>
                   <a:schemeClr val="dk1">
@@ -854,8 +1441,11 @@
                 <a:spcPct val="100000"/>
               </a:lnSpc>
               <a:buNone/>
-            </a:pPr>
-            <a:fld id="{DB1753EC-634C-4786-8ABC-C7DCB3B46781}" type="slidenum">
+              <a:tabLst>
+                <a:tab algn="l" pos="0"/>
+              </a:tabLst>
+            </a:pPr>
+            <a:fld id="{0E6B075F-A2CE-4F7E-9292-0BC88C0C9569}" type="slidenum">
               <a:rPr lang="en-US" sz="1200" b="0" u="none" strike="noStrike">
                 <a:solidFill>
                   <a:schemeClr val="dk1">
@@ -885,6 +1475,927 @@
 </file>
 
 <file path=ppt/slideLayouts/slideLayout11.xml><?xml version="1.0" encoding="utf-8"?>
+<p:sldLayout xmlns:a="http://schemas.openxmlformats.org/drawingml/2006/main" xmlns:p="http://schemas.openxmlformats.org/presentationml/2006/main" xmlns:r="http://schemas.openxmlformats.org/officeDocument/2006/relationships" xmlns:p14="http://schemas.microsoft.com/office/powerpoint/2010/main" xmlns:p15="http://schemas.microsoft.com/office/powerpoint/2012/main" xmlns:mc="http://schemas.openxmlformats.org/markup-compatibility/2006" type="titleOnly" preserve="1">
+  <p:cSld name="Title Only">
+    <p:bg>
+      <p:bgPr>
+        <a:solidFill>
+          <a:srgbClr val="ffffff"/>
+        </a:solidFill>
+      </p:bgPr>
+    </p:bg>
+    <p:spTree>
+      <p:nvGrpSpPr>
+        <p:cNvPr id="1" name=""/>
+        <p:cNvGrpSpPr/>
+        <p:nvPr/>
+      </p:nvGrpSpPr>
+      <p:grpSpPr>
+        <a:xfrm>
+          <a:off x="0" y="0"/>
+          <a:ext cx="0" cy="0"/>
+          <a:chOff x="0" y="0"/>
+          <a:chExt cx="0" cy="0"/>
+        </a:xfrm>
+      </p:grpSpPr>
+      <p:sp>
+        <p:nvSpPr>
+          <p:cNvPr id="57" name="PlaceHolder 1"/>
+          <p:cNvSpPr>
+            <a:spLocks noGrp="1"/>
+          </p:cNvSpPr>
+          <p:nvPr>
+            <p:ph type="title"/>
+          </p:nvPr>
+        </p:nvSpPr>
+        <p:spPr>
+          <a:xfrm>
+            <a:off x="457200" y="274680"/>
+            <a:ext cx="8228880" cy="1142280"/>
+          </a:xfrm>
+          <a:prstGeom prst="rect">
+            <a:avLst/>
+          </a:prstGeom>
+          <a:noFill/>
+          <a:ln w="0">
+            <a:noFill/>
+          </a:ln>
+        </p:spPr>
+        <p:txBody>
+          <a:bodyPr lIns="91440" rIns="91440" tIns="45720" bIns="45720" anchor="ctr">
+            <a:noAutofit/>
+          </a:bodyPr>
+          <a:p>
+            <a:pPr indent="0" algn="ctr" defTabSz="457200">
+              <a:lnSpc>
+                <a:spcPct val="100000"/>
+              </a:lnSpc>
+              <a:buNone/>
+              <a:tabLst>
+                <a:tab algn="l" pos="0"/>
+              </a:tabLst>
+            </a:pPr>
+            <a:r>
+              <a:rPr lang="en-US" sz="4400" b="0" u="none" strike="noStrike">
+                <a:solidFill>
+                  <a:schemeClr val="dk1"/>
+                </a:solidFill>
+                <a:effectLst/>
+                <a:uFillTx/>
+                <a:latin typeface="Calibri"/>
+              </a:rPr>
+              <a:t>Click to edit Master title style</a:t>
+            </a:r>
+            <a:endParaRPr lang="en-US" sz="4400" b="0" u="none" strike="noStrike">
+              <a:solidFill>
+                <a:srgbClr val="000000"/>
+              </a:solidFill>
+              <a:effectLst/>
+              <a:uFillTx/>
+              <a:latin typeface="Arial"/>
+            </a:endParaRPr>
+          </a:p>
+        </p:txBody>
+      </p:sp>
+      <p:sp>
+        <p:nvSpPr>
+          <p:cNvPr id="58" name="PlaceHolder 2"/>
+          <p:cNvSpPr>
+            <a:spLocks noGrp="1"/>
+          </p:cNvSpPr>
+          <p:nvPr>
+            <p:ph type="dt" idx="31"/>
+          </p:nvPr>
+        </p:nvSpPr>
+        <p:spPr>
+          <a:xfrm>
+            <a:off x="457200" y="6356520"/>
+            <a:ext cx="2133000" cy="364320"/>
+          </a:xfrm>
+          <a:prstGeom prst="rect">
+            <a:avLst/>
+          </a:prstGeom>
+          <a:noFill/>
+          <a:ln w="0">
+            <a:noFill/>
+          </a:ln>
+        </p:spPr>
+        <p:txBody>
+          <a:bodyPr lIns="91440" rIns="91440" tIns="45720" bIns="45720" anchor="ctr">
+            <a:noAutofit/>
+          </a:bodyPr>
+          <a:lstStyle>
+            <a:lvl1pPr indent="0" defTabSz="457200">
+              <a:lnSpc>
+                <a:spcPct val="100000"/>
+              </a:lnSpc>
+              <a:buNone/>
+              <a:tabLst>
+                <a:tab algn="l" pos="0"/>
+              </a:tabLst>
+              <a:defRPr lang="en-US" sz="1200" b="0" u="none" strike="noStrike">
+                <a:solidFill>
+                  <a:schemeClr val="dk1">
+                    <a:tint val="75000"/>
+                  </a:schemeClr>
+                </a:solidFill>
+                <a:effectLst/>
+                <a:uFillTx/>
+                <a:latin typeface="Calibri"/>
+              </a:defRPr>
+            </a:lvl1pPr>
+          </a:lstStyle>
+          <a:p>
+            <a:pPr indent="0" defTabSz="457200">
+              <a:lnSpc>
+                <a:spcPct val="100000"/>
+              </a:lnSpc>
+              <a:buNone/>
+              <a:tabLst>
+                <a:tab algn="l" pos="0"/>
+              </a:tabLst>
+            </a:pPr>
+            <a:r>
+              <a:rPr lang="en-US" sz="1200" b="0" u="none" strike="noStrike">
+                <a:solidFill>
+                  <a:schemeClr val="dk1">
+                    <a:tint val="75000"/>
+                  </a:schemeClr>
+                </a:solidFill>
+                <a:effectLst/>
+                <a:uFillTx/>
+                <a:latin typeface="Calibri"/>
+              </a:rPr>
+              <a:t>&lt;date/time&gt;</a:t>
+            </a:r>
+            <a:endParaRPr lang="en-US" sz="1200" b="0" u="none" strike="noStrike">
+              <a:solidFill>
+                <a:srgbClr val="000000"/>
+              </a:solidFill>
+              <a:effectLst/>
+              <a:uFillTx/>
+              <a:latin typeface="Times New Roman"/>
+            </a:endParaRPr>
+          </a:p>
+        </p:txBody>
+      </p:sp>
+      <p:sp>
+        <p:nvSpPr>
+          <p:cNvPr id="59" name="PlaceHolder 3"/>
+          <p:cNvSpPr>
+            <a:spLocks noGrp="1"/>
+          </p:cNvSpPr>
+          <p:nvPr>
+            <p:ph type="ftr" idx="32"/>
+          </p:nvPr>
+        </p:nvSpPr>
+        <p:spPr>
+          <a:xfrm>
+            <a:off x="3124080" y="6356520"/>
+            <a:ext cx="2894760" cy="364320"/>
+          </a:xfrm>
+          <a:prstGeom prst="rect">
+            <a:avLst/>
+          </a:prstGeom>
+          <a:noFill/>
+          <a:ln w="0">
+            <a:noFill/>
+          </a:ln>
+        </p:spPr>
+        <p:txBody>
+          <a:bodyPr lIns="91440" rIns="91440" tIns="45720" bIns="45720" anchor="ctr">
+            <a:noAutofit/>
+          </a:bodyPr>
+          <a:lstStyle>
+            <a:lvl1pPr indent="0" algn="ctr">
+              <a:lnSpc>
+                <a:spcPct val="100000"/>
+              </a:lnSpc>
+              <a:buNone/>
+              <a:tabLst>
+                <a:tab algn="l" pos="0"/>
+              </a:tabLst>
+              <a:defRPr lang="en-US" sz="1400" b="0" u="none" strike="noStrike">
+                <a:solidFill>
+                  <a:srgbClr val="000000"/>
+                </a:solidFill>
+                <a:effectLst/>
+                <a:uFillTx/>
+                <a:latin typeface="Times New Roman"/>
+              </a:defRPr>
+            </a:lvl1pPr>
+          </a:lstStyle>
+          <a:p>
+            <a:pPr indent="0" algn="ctr">
+              <a:lnSpc>
+                <a:spcPct val="100000"/>
+              </a:lnSpc>
+              <a:buNone/>
+              <a:tabLst>
+                <a:tab algn="l" pos="0"/>
+              </a:tabLst>
+            </a:pPr>
+            <a:r>
+              <a:rPr lang="en-US" sz="1400" b="0" u="none" strike="noStrike">
+                <a:solidFill>
+                  <a:srgbClr val="000000"/>
+                </a:solidFill>
+                <a:effectLst/>
+                <a:uFillTx/>
+                <a:latin typeface="Times New Roman"/>
+              </a:rPr>
+              <a:t>&lt;footer&gt;</a:t>
+            </a:r>
+            <a:endParaRPr lang="en-US" sz="1400" b="0" u="none" strike="noStrike">
+              <a:solidFill>
+                <a:srgbClr val="000000"/>
+              </a:solidFill>
+              <a:effectLst/>
+              <a:uFillTx/>
+              <a:latin typeface="Times New Roman"/>
+            </a:endParaRPr>
+          </a:p>
+        </p:txBody>
+      </p:sp>
+      <p:sp>
+        <p:nvSpPr>
+          <p:cNvPr id="60" name="PlaceHolder 4"/>
+          <p:cNvSpPr>
+            <a:spLocks noGrp="1"/>
+          </p:cNvSpPr>
+          <p:nvPr>
+            <p:ph type="sldNum" idx="33"/>
+          </p:nvPr>
+        </p:nvSpPr>
+        <p:spPr>
+          <a:xfrm>
+            <a:off x="6553080" y="6356520"/>
+            <a:ext cx="2133000" cy="364320"/>
+          </a:xfrm>
+          <a:prstGeom prst="rect">
+            <a:avLst/>
+          </a:prstGeom>
+          <a:noFill/>
+          <a:ln w="0">
+            <a:noFill/>
+          </a:ln>
+        </p:spPr>
+        <p:txBody>
+          <a:bodyPr lIns="91440" rIns="91440" tIns="45720" bIns="45720" anchor="ctr">
+            <a:noAutofit/>
+          </a:bodyPr>
+          <a:lstStyle>
+            <a:lvl1pPr indent="0" algn="r" defTabSz="457200">
+              <a:lnSpc>
+                <a:spcPct val="100000"/>
+              </a:lnSpc>
+              <a:buNone/>
+              <a:tabLst>
+                <a:tab algn="l" pos="0"/>
+              </a:tabLst>
+              <a:defRPr lang="en-US" sz="1200" b="0" u="none" strike="noStrike">
+                <a:solidFill>
+                  <a:schemeClr val="dk1">
+                    <a:tint val="75000"/>
+                  </a:schemeClr>
+                </a:solidFill>
+                <a:effectLst/>
+                <a:uFillTx/>
+                <a:latin typeface="Calibri"/>
+              </a:defRPr>
+            </a:lvl1pPr>
+          </a:lstStyle>
+          <a:p>
+            <a:pPr indent="0" algn="r" defTabSz="457200">
+              <a:lnSpc>
+                <a:spcPct val="100000"/>
+              </a:lnSpc>
+              <a:buNone/>
+              <a:tabLst>
+                <a:tab algn="l" pos="0"/>
+              </a:tabLst>
+            </a:pPr>
+            <a:fld id="{73985885-F9C5-40C4-B930-CF7D4B7F4C3F}" type="slidenum">
+              <a:rPr lang="en-US" sz="1200" b="0" u="none" strike="noStrike">
+                <a:solidFill>
+                  <a:schemeClr val="dk1">
+                    <a:tint val="75000"/>
+                  </a:schemeClr>
+                </a:solidFill>
+                <a:effectLst/>
+                <a:uFillTx/>
+                <a:latin typeface="Calibri"/>
+              </a:rPr>
+              <a:t>&lt;number&gt;</a:t>
+            </a:fld>
+            <a:endParaRPr lang="en-US" sz="1200" b="0" u="none" strike="noStrike">
+              <a:solidFill>
+                <a:srgbClr val="000000"/>
+              </a:solidFill>
+              <a:effectLst/>
+              <a:uFillTx/>
+              <a:latin typeface="Times New Roman"/>
+            </a:endParaRPr>
+          </a:p>
+        </p:txBody>
+      </p:sp>
+    </p:spTree>
+  </p:cSld>
+</p:sldLayout>
+</file>
+
+<file path=ppt/slideLayouts/slideLayout2.xml><?xml version="1.0" encoding="utf-8"?>
+<p:sldLayout xmlns:a="http://schemas.openxmlformats.org/drawingml/2006/main" xmlns:p="http://schemas.openxmlformats.org/presentationml/2006/main" xmlns:r="http://schemas.openxmlformats.org/officeDocument/2006/relationships" xmlns:p14="http://schemas.microsoft.com/office/powerpoint/2010/main" xmlns:p15="http://schemas.microsoft.com/office/powerpoint/2012/main" xmlns:mc="http://schemas.openxmlformats.org/markup-compatibility/2006" type="blank" preserve="1">
+  <p:cSld name="Content with Caption">
+    <p:bg>
+      <p:bgPr>
+        <a:solidFill>
+          <a:srgbClr val="ffffff"/>
+        </a:solidFill>
+      </p:bgPr>
+    </p:bg>
+    <p:spTree>
+      <p:nvGrpSpPr>
+        <p:cNvPr id="1" name=""/>
+        <p:cNvGrpSpPr/>
+        <p:nvPr/>
+      </p:nvGrpSpPr>
+      <p:grpSpPr>
+        <a:xfrm>
+          <a:off x="0" y="0"/>
+          <a:ext cx="0" cy="0"/>
+          <a:chOff x="0" y="0"/>
+          <a:chExt cx="0" cy="0"/>
+        </a:xfrm>
+      </p:grpSpPr>
+      <p:sp>
+        <p:nvSpPr>
+          <p:cNvPr id="7" name="PlaceHolder 1"/>
+          <p:cNvSpPr>
+            <a:spLocks noGrp="1"/>
+          </p:cNvSpPr>
+          <p:nvPr>
+            <p:ph type="title"/>
+          </p:nvPr>
+        </p:nvSpPr>
+        <p:spPr>
+          <a:xfrm>
+            <a:off x="457200" y="272880"/>
+            <a:ext cx="3007440" cy="1161360"/>
+          </a:xfrm>
+          <a:prstGeom prst="rect">
+            <a:avLst/>
+          </a:prstGeom>
+          <a:noFill/>
+          <a:ln w="0">
+            <a:noFill/>
+          </a:ln>
+        </p:spPr>
+        <p:txBody>
+          <a:bodyPr lIns="91440" rIns="91440" tIns="45720" bIns="45720" anchor="b">
+            <a:noAutofit/>
+          </a:bodyPr>
+          <a:p>
+            <a:pPr indent="0" defTabSz="457200">
+              <a:lnSpc>
+                <a:spcPct val="100000"/>
+              </a:lnSpc>
+              <a:buNone/>
+              <a:tabLst>
+                <a:tab algn="l" pos="0"/>
+              </a:tabLst>
+            </a:pPr>
+            <a:r>
+              <a:rPr lang="en-US" sz="2000" b="1" u="none" strike="noStrike">
+                <a:solidFill>
+                  <a:schemeClr val="dk1"/>
+                </a:solidFill>
+                <a:effectLst/>
+                <a:uFillTx/>
+                <a:latin typeface="Calibri"/>
+              </a:rPr>
+              <a:t>Click to edit Master title style</a:t>
+            </a:r>
+            <a:endParaRPr lang="en-US" sz="2000" b="0" u="none" strike="noStrike">
+              <a:solidFill>
+                <a:srgbClr val="000000"/>
+              </a:solidFill>
+              <a:effectLst/>
+              <a:uFillTx/>
+              <a:latin typeface="Arial"/>
+            </a:endParaRPr>
+          </a:p>
+        </p:txBody>
+      </p:sp>
+      <p:sp>
+        <p:nvSpPr>
+          <p:cNvPr id="8" name="PlaceHolder 2"/>
+          <p:cNvSpPr>
+            <a:spLocks noGrp="1"/>
+          </p:cNvSpPr>
+          <p:nvPr>
+            <p:ph type="body"/>
+          </p:nvPr>
+        </p:nvSpPr>
+        <p:spPr>
+          <a:xfrm>
+            <a:off x="3575160" y="272880"/>
+            <a:ext cx="5110920" cy="5852520"/>
+          </a:xfrm>
+          <a:prstGeom prst="rect">
+            <a:avLst/>
+          </a:prstGeom>
+          <a:noFill/>
+          <a:ln w="0">
+            <a:noFill/>
+          </a:ln>
+        </p:spPr>
+        <p:txBody>
+          <a:bodyPr lIns="91440" rIns="91440" tIns="45720" bIns="45720" anchor="t">
+            <a:noAutofit/>
+          </a:bodyPr>
+          <a:p>
+            <a:pPr marL="343080" indent="-343080" defTabSz="457200">
+              <a:lnSpc>
+                <a:spcPct val="100000"/>
+              </a:lnSpc>
+              <a:spcBef>
+                <a:spcPts val="641"/>
+              </a:spcBef>
+              <a:buClr>
+                <a:srgbClr val="000000"/>
+              </a:buClr>
+              <a:buFont typeface="Arial"/>
+              <a:buChar char="•"/>
+            </a:pPr>
+            <a:r>
+              <a:rPr lang="en-US" sz="3200" b="0" u="none" strike="noStrike">
+                <a:solidFill>
+                  <a:schemeClr val="dk1"/>
+                </a:solidFill>
+                <a:effectLst/>
+                <a:uFillTx/>
+                <a:latin typeface="Calibri"/>
+              </a:rPr>
+              <a:t>Click to edit Master text styles</a:t>
+            </a:r>
+            <a:endParaRPr lang="en-US" sz="3200" b="0" u="none" strike="noStrike">
+              <a:solidFill>
+                <a:srgbClr val="000000"/>
+              </a:solidFill>
+              <a:effectLst/>
+              <a:uFillTx/>
+              <a:latin typeface="Arial"/>
+            </a:endParaRPr>
+          </a:p>
+          <a:p>
+            <a:pPr marL="743040" lvl="1" indent="-285840" defTabSz="457200">
+              <a:lnSpc>
+                <a:spcPct val="100000"/>
+              </a:lnSpc>
+              <a:spcBef>
+                <a:spcPts val="561"/>
+              </a:spcBef>
+              <a:buClr>
+                <a:srgbClr val="000000"/>
+              </a:buClr>
+              <a:buFont typeface="Arial"/>
+              <a:buChar char="–"/>
+            </a:pPr>
+            <a:r>
+              <a:rPr lang="en-US" sz="2800" b="0" u="none" strike="noStrike">
+                <a:solidFill>
+                  <a:schemeClr val="dk1"/>
+                </a:solidFill>
+                <a:effectLst/>
+                <a:uFillTx/>
+                <a:latin typeface="Calibri"/>
+              </a:rPr>
+              <a:t>Second level</a:t>
+            </a:r>
+            <a:endParaRPr lang="en-US" sz="2800" b="0" u="none" strike="noStrike">
+              <a:solidFill>
+                <a:srgbClr val="000000"/>
+              </a:solidFill>
+              <a:effectLst/>
+              <a:uFillTx/>
+              <a:latin typeface="Arial"/>
+            </a:endParaRPr>
+          </a:p>
+          <a:p>
+            <a:pPr marL="1143000" lvl="2" indent="-228600" defTabSz="457200">
+              <a:lnSpc>
+                <a:spcPct val="100000"/>
+              </a:lnSpc>
+              <a:spcBef>
+                <a:spcPts val="479"/>
+              </a:spcBef>
+              <a:buClr>
+                <a:srgbClr val="000000"/>
+              </a:buClr>
+              <a:buFont typeface="Arial"/>
+              <a:buChar char="•"/>
+            </a:pPr>
+            <a:r>
+              <a:rPr lang="en-US" sz="2400" b="0" u="none" strike="noStrike">
+                <a:solidFill>
+                  <a:schemeClr val="dk1"/>
+                </a:solidFill>
+                <a:effectLst/>
+                <a:uFillTx/>
+                <a:latin typeface="Calibri"/>
+              </a:rPr>
+              <a:t>Third level</a:t>
+            </a:r>
+            <a:endParaRPr lang="en-US" sz="2400" b="0" u="none" strike="noStrike">
+              <a:solidFill>
+                <a:srgbClr val="000000"/>
+              </a:solidFill>
+              <a:effectLst/>
+              <a:uFillTx/>
+              <a:latin typeface="Arial"/>
+            </a:endParaRPr>
+          </a:p>
+          <a:p>
+            <a:pPr marL="1600200" lvl="3" indent="-228600" defTabSz="457200">
+              <a:lnSpc>
+                <a:spcPct val="100000"/>
+              </a:lnSpc>
+              <a:spcBef>
+                <a:spcPts val="400"/>
+              </a:spcBef>
+              <a:buClr>
+                <a:srgbClr val="000000"/>
+              </a:buClr>
+              <a:buFont typeface="Arial"/>
+              <a:buChar char="–"/>
+            </a:pPr>
+            <a:r>
+              <a:rPr lang="en-US" sz="2000" b="0" u="none" strike="noStrike">
+                <a:solidFill>
+                  <a:schemeClr val="dk1"/>
+                </a:solidFill>
+                <a:effectLst/>
+                <a:uFillTx/>
+                <a:latin typeface="Calibri"/>
+              </a:rPr>
+              <a:t>Fourth level</a:t>
+            </a:r>
+            <a:endParaRPr lang="en-US" sz="2000" b="0" u="none" strike="noStrike">
+              <a:solidFill>
+                <a:srgbClr val="000000"/>
+              </a:solidFill>
+              <a:effectLst/>
+              <a:uFillTx/>
+              <a:latin typeface="Arial"/>
+            </a:endParaRPr>
+          </a:p>
+          <a:p>
+            <a:pPr marL="2057400" lvl="4" indent="-228600" defTabSz="457200">
+              <a:lnSpc>
+                <a:spcPct val="100000"/>
+              </a:lnSpc>
+              <a:spcBef>
+                <a:spcPts val="400"/>
+              </a:spcBef>
+              <a:buClr>
+                <a:srgbClr val="000000"/>
+              </a:buClr>
+              <a:buFont typeface="Arial"/>
+              <a:buChar char="»"/>
+            </a:pPr>
+            <a:r>
+              <a:rPr lang="en-US" sz="2000" b="0" u="none" strike="noStrike">
+                <a:solidFill>
+                  <a:schemeClr val="dk1"/>
+                </a:solidFill>
+                <a:effectLst/>
+                <a:uFillTx/>
+                <a:latin typeface="Calibri"/>
+              </a:rPr>
+              <a:t>Fifth level</a:t>
+            </a:r>
+            <a:endParaRPr lang="en-US" sz="2000" b="0" u="none" strike="noStrike">
+              <a:solidFill>
+                <a:srgbClr val="000000"/>
+              </a:solidFill>
+              <a:effectLst/>
+              <a:uFillTx/>
+              <a:latin typeface="Arial"/>
+            </a:endParaRPr>
+          </a:p>
+        </p:txBody>
+      </p:sp>
+      <p:sp>
+        <p:nvSpPr>
+          <p:cNvPr id="9" name="PlaceHolder 3"/>
+          <p:cNvSpPr>
+            <a:spLocks noGrp="1"/>
+          </p:cNvSpPr>
+          <p:nvPr>
+            <p:ph type="body"/>
+          </p:nvPr>
+        </p:nvSpPr>
+        <p:spPr>
+          <a:xfrm>
+            <a:off x="457200" y="1434960"/>
+            <a:ext cx="3007440" cy="4690440"/>
+          </a:xfrm>
+          <a:prstGeom prst="rect">
+            <a:avLst/>
+          </a:prstGeom>
+          <a:noFill/>
+          <a:ln w="0">
+            <a:noFill/>
+          </a:ln>
+        </p:spPr>
+        <p:txBody>
+          <a:bodyPr lIns="91440" rIns="91440" tIns="45720" bIns="45720" anchor="t">
+            <a:noAutofit/>
+          </a:bodyPr>
+          <a:p>
+            <a:pPr indent="0" defTabSz="457200">
+              <a:lnSpc>
+                <a:spcPct val="100000"/>
+              </a:lnSpc>
+              <a:spcBef>
+                <a:spcPts val="281"/>
+              </a:spcBef>
+              <a:buNone/>
+              <a:tabLst>
+                <a:tab algn="l" pos="0"/>
+              </a:tabLst>
+            </a:pPr>
+            <a:r>
+              <a:rPr lang="en-US" sz="1400" b="0" u="none" strike="noStrike">
+                <a:solidFill>
+                  <a:schemeClr val="dk1"/>
+                </a:solidFill>
+                <a:effectLst/>
+                <a:uFillTx/>
+                <a:latin typeface="Calibri"/>
+              </a:rPr>
+              <a:t>Click to edit Master text styles</a:t>
+            </a:r>
+            <a:endParaRPr lang="en-US" sz="1400" b="0" u="none" strike="noStrike">
+              <a:solidFill>
+                <a:srgbClr val="000000"/>
+              </a:solidFill>
+              <a:effectLst/>
+              <a:uFillTx/>
+              <a:latin typeface="Arial"/>
+            </a:endParaRPr>
+          </a:p>
+        </p:txBody>
+      </p:sp>
+      <p:sp>
+        <p:nvSpPr>
+          <p:cNvPr id="10" name="PlaceHolder 4"/>
+          <p:cNvSpPr>
+            <a:spLocks noGrp="1"/>
+          </p:cNvSpPr>
+          <p:nvPr>
+            <p:ph type="dt" idx="4"/>
+          </p:nvPr>
+        </p:nvSpPr>
+        <p:spPr>
+          <a:xfrm>
+            <a:off x="457200" y="6356520"/>
+            <a:ext cx="2133000" cy="364320"/>
+          </a:xfrm>
+          <a:prstGeom prst="rect">
+            <a:avLst/>
+          </a:prstGeom>
+          <a:noFill/>
+          <a:ln w="0">
+            <a:noFill/>
+          </a:ln>
+        </p:spPr>
+        <p:txBody>
+          <a:bodyPr lIns="91440" rIns="91440" tIns="45720" bIns="45720" anchor="ctr">
+            <a:noAutofit/>
+          </a:bodyPr>
+          <a:lstStyle>
+            <a:lvl1pPr indent="0" defTabSz="457200">
+              <a:lnSpc>
+                <a:spcPct val="100000"/>
+              </a:lnSpc>
+              <a:buNone/>
+              <a:tabLst>
+                <a:tab algn="l" pos="0"/>
+              </a:tabLst>
+              <a:defRPr lang="en-US" sz="1200" b="0" u="none" strike="noStrike">
+                <a:solidFill>
+                  <a:schemeClr val="dk1">
+                    <a:tint val="75000"/>
+                  </a:schemeClr>
+                </a:solidFill>
+                <a:effectLst/>
+                <a:uFillTx/>
+                <a:latin typeface="Calibri"/>
+              </a:defRPr>
+            </a:lvl1pPr>
+          </a:lstStyle>
+          <a:p>
+            <a:pPr indent="0" defTabSz="457200">
+              <a:lnSpc>
+                <a:spcPct val="100000"/>
+              </a:lnSpc>
+              <a:buNone/>
+              <a:tabLst>
+                <a:tab algn="l" pos="0"/>
+              </a:tabLst>
+            </a:pPr>
+            <a:r>
+              <a:rPr lang="en-US" sz="1200" b="0" u="none" strike="noStrike">
+                <a:solidFill>
+                  <a:schemeClr val="dk1">
+                    <a:tint val="75000"/>
+                  </a:schemeClr>
+                </a:solidFill>
+                <a:effectLst/>
+                <a:uFillTx/>
+                <a:latin typeface="Calibri"/>
+              </a:rPr>
+              <a:t>&lt;date/time&gt;</a:t>
+            </a:r>
+            <a:endParaRPr lang="en-US" sz="1200" b="0" u="none" strike="noStrike">
+              <a:solidFill>
+                <a:srgbClr val="000000"/>
+              </a:solidFill>
+              <a:effectLst/>
+              <a:uFillTx/>
+              <a:latin typeface="Times New Roman"/>
+            </a:endParaRPr>
+          </a:p>
+        </p:txBody>
+      </p:sp>
+      <p:sp>
+        <p:nvSpPr>
+          <p:cNvPr id="11" name="PlaceHolder 5"/>
+          <p:cNvSpPr>
+            <a:spLocks noGrp="1"/>
+          </p:cNvSpPr>
+          <p:nvPr>
+            <p:ph type="ftr" idx="5"/>
+          </p:nvPr>
+        </p:nvSpPr>
+        <p:spPr>
+          <a:xfrm>
+            <a:off x="3124080" y="6356520"/>
+            <a:ext cx="2894760" cy="364320"/>
+          </a:xfrm>
+          <a:prstGeom prst="rect">
+            <a:avLst/>
+          </a:prstGeom>
+          <a:noFill/>
+          <a:ln w="0">
+            <a:noFill/>
+          </a:ln>
+        </p:spPr>
+        <p:txBody>
+          <a:bodyPr lIns="91440" rIns="91440" tIns="45720" bIns="45720" anchor="ctr">
+            <a:noAutofit/>
+          </a:bodyPr>
+          <a:lstStyle>
+            <a:lvl1pPr indent="0" algn="ctr">
+              <a:lnSpc>
+                <a:spcPct val="100000"/>
+              </a:lnSpc>
+              <a:buNone/>
+              <a:tabLst>
+                <a:tab algn="l" pos="0"/>
+              </a:tabLst>
+              <a:defRPr lang="en-US" sz="1400" b="0" u="none" strike="noStrike">
+                <a:solidFill>
+                  <a:srgbClr val="000000"/>
+                </a:solidFill>
+                <a:effectLst/>
+                <a:uFillTx/>
+                <a:latin typeface="Times New Roman"/>
+              </a:defRPr>
+            </a:lvl1pPr>
+          </a:lstStyle>
+          <a:p>
+            <a:pPr indent="0" algn="ctr">
+              <a:lnSpc>
+                <a:spcPct val="100000"/>
+              </a:lnSpc>
+              <a:buNone/>
+              <a:tabLst>
+                <a:tab algn="l" pos="0"/>
+              </a:tabLst>
+            </a:pPr>
+            <a:r>
+              <a:rPr lang="en-US" sz="1400" b="0" u="none" strike="noStrike">
+                <a:solidFill>
+                  <a:srgbClr val="000000"/>
+                </a:solidFill>
+                <a:effectLst/>
+                <a:uFillTx/>
+                <a:latin typeface="Times New Roman"/>
+              </a:rPr>
+              <a:t>&lt;footer&gt;</a:t>
+            </a:r>
+            <a:endParaRPr lang="en-US" sz="1400" b="0" u="none" strike="noStrike">
+              <a:solidFill>
+                <a:srgbClr val="000000"/>
+              </a:solidFill>
+              <a:effectLst/>
+              <a:uFillTx/>
+              <a:latin typeface="Times New Roman"/>
+            </a:endParaRPr>
+          </a:p>
+        </p:txBody>
+      </p:sp>
+      <p:sp>
+        <p:nvSpPr>
+          <p:cNvPr id="12" name="PlaceHolder 6"/>
+          <p:cNvSpPr>
+            <a:spLocks noGrp="1"/>
+          </p:cNvSpPr>
+          <p:nvPr>
+            <p:ph type="sldNum" idx="6"/>
+          </p:nvPr>
+        </p:nvSpPr>
+        <p:spPr>
+          <a:xfrm>
+            <a:off x="6553080" y="6356520"/>
+            <a:ext cx="2133000" cy="364320"/>
+          </a:xfrm>
+          <a:prstGeom prst="rect">
+            <a:avLst/>
+          </a:prstGeom>
+          <a:noFill/>
+          <a:ln w="0">
+            <a:noFill/>
+          </a:ln>
+        </p:spPr>
+        <p:txBody>
+          <a:bodyPr lIns="91440" rIns="91440" tIns="45720" bIns="45720" anchor="ctr">
+            <a:noAutofit/>
+          </a:bodyPr>
+          <a:lstStyle>
+            <a:lvl1pPr indent="0" algn="r" defTabSz="457200">
+              <a:lnSpc>
+                <a:spcPct val="100000"/>
+              </a:lnSpc>
+              <a:buNone/>
+              <a:tabLst>
+                <a:tab algn="l" pos="0"/>
+              </a:tabLst>
+              <a:defRPr lang="en-US" sz="1200" b="0" u="none" strike="noStrike">
+                <a:solidFill>
+                  <a:schemeClr val="dk1">
+                    <a:tint val="75000"/>
+                  </a:schemeClr>
+                </a:solidFill>
+                <a:effectLst/>
+                <a:uFillTx/>
+                <a:latin typeface="Calibri"/>
+              </a:defRPr>
+            </a:lvl1pPr>
+          </a:lstStyle>
+          <a:p>
+            <a:pPr indent="0" algn="r" defTabSz="457200">
+              <a:lnSpc>
+                <a:spcPct val="100000"/>
+              </a:lnSpc>
+              <a:buNone/>
+              <a:tabLst>
+                <a:tab algn="l" pos="0"/>
+              </a:tabLst>
+            </a:pPr>
+            <a:fld id="{F7DB2FCC-1B2F-4B8D-90A2-50A9525B12BB}" type="slidenum">
+              <a:rPr lang="en-US" sz="1200" b="0" u="none" strike="noStrike">
+                <a:solidFill>
+                  <a:schemeClr val="dk1">
+                    <a:tint val="75000"/>
+                  </a:schemeClr>
+                </a:solidFill>
+                <a:effectLst/>
+                <a:uFillTx/>
+                <a:latin typeface="Calibri"/>
+              </a:rPr>
+              <a:t>&lt;number&gt;</a:t>
+            </a:fld>
+            <a:endParaRPr lang="en-US" sz="1200" b="0" u="none" strike="noStrike">
+              <a:solidFill>
+                <a:srgbClr val="000000"/>
+              </a:solidFill>
+              <a:effectLst/>
+              <a:uFillTx/>
+              <a:latin typeface="Times New Roman"/>
+            </a:endParaRPr>
+          </a:p>
+        </p:txBody>
+      </p:sp>
+    </p:spTree>
+  </p:cSld>
+</p:sldLayout>
+</file>
+
+<file path=ppt/slideLayouts/slideLayout3.xml><?xml version="1.0" encoding="utf-8"?>
 <p:sldLayout xmlns:a="http://schemas.openxmlformats.org/drawingml/2006/main" xmlns:p="http://schemas.openxmlformats.org/presentationml/2006/main" xmlns:r="http://schemas.openxmlformats.org/officeDocument/2006/relationships" xmlns:p14="http://schemas.microsoft.com/office/powerpoint/2010/main" xmlns:p15="http://schemas.microsoft.com/office/powerpoint/2012/main" xmlns:mc="http://schemas.openxmlformats.org/markup-compatibility/2006" type="blank" preserve="1">
   <p:cSld name="Picture with Caption">
     <p:bg>
@@ -910,7 +2421,7 @@
       </p:grpSpPr>
       <p:sp>
         <p:nvSpPr>
-          <p:cNvPr id="55" name="PlaceHolder 1"/>
+          <p:cNvPr id="13" name="PlaceHolder 1"/>
           <p:cNvSpPr>
             <a:spLocks noGrp="1"/>
           </p:cNvSpPr>
@@ -921,7 +2432,7 @@
         <p:spPr>
           <a:xfrm>
             <a:off x="1792440" y="4800600"/>
-            <a:ext cx="5486040" cy="566280"/>
+            <a:ext cx="5485680" cy="565920"/>
           </a:xfrm>
           <a:prstGeom prst="rect">
             <a:avLst/>
@@ -941,6 +2452,9 @@
                 <a:spcPct val="100000"/>
               </a:lnSpc>
               <a:buNone/>
+              <a:tabLst>
+                <a:tab algn="l" pos="0"/>
+              </a:tabLst>
             </a:pPr>
             <a:r>
               <a:rPr lang="en-US" sz="2000" b="1" u="none" strike="noStrike">
@@ -955,18 +2469,18 @@
             </a:r>
             <a:endParaRPr lang="en-US" sz="2000" b="0" u="none" strike="noStrike">
               <a:solidFill>
-                <a:schemeClr val="dk1"/>
-              </a:solidFill>
-              <a:effectLst/>
-              <a:uFillTx/>
-              <a:latin typeface="Calibri"/>
+                <a:srgbClr val="000000"/>
+              </a:solidFill>
+              <a:effectLst/>
+              <a:uFillTx/>
+              <a:latin typeface="Arial"/>
             </a:endParaRPr>
           </a:p>
         </p:txBody>
       </p:sp>
       <p:sp>
         <p:nvSpPr>
-          <p:cNvPr id="56" name="PlaceHolder 2"/>
+          <p:cNvPr id="14" name="PlaceHolder 2"/>
           <p:cNvSpPr>
             <a:spLocks noGrp="1"/>
           </p:cNvSpPr>
@@ -977,7 +2491,7 @@
         <p:spPr>
           <a:xfrm>
             <a:off x="1792440" y="612720"/>
-            <a:ext cx="5486040" cy="4114440"/>
+            <a:ext cx="5485680" cy="4114080"/>
           </a:xfrm>
           <a:prstGeom prst="rect">
             <a:avLst/>
@@ -993,6 +2507,9 @@
           </a:bodyPr>
           <a:p>
             <a:pPr marL="432000" indent="-324000">
+              <a:lnSpc>
+                <a:spcPct val="100000"/>
+              </a:lnSpc>
               <a:spcBef>
                 <a:spcPts val="1417"/>
               </a:spcBef>
@@ -1016,15 +2533,18 @@
             </a:r>
             <a:endParaRPr lang="en-US" sz="3200" b="0" u="none" strike="noStrike">
               <a:solidFill>
-                <a:schemeClr val="dk1"/>
-              </a:solidFill>
-              <a:effectLst/>
-              <a:uFillTx/>
-              <a:latin typeface="Calibri"/>
+                <a:srgbClr val="000000"/>
+              </a:solidFill>
+              <a:effectLst/>
+              <a:uFillTx/>
+              <a:latin typeface="Arial"/>
             </a:endParaRPr>
           </a:p>
           <a:p>
             <a:pPr marL="864000" lvl="1" indent="-324000">
+              <a:lnSpc>
+                <a:spcPct val="100000"/>
+              </a:lnSpc>
               <a:spcBef>
                 <a:spcPts val="1134"/>
               </a:spcBef>
@@ -1048,15 +2568,18 @@
             </a:r>
             <a:endParaRPr lang="en-US" sz="3200" b="0" u="none" strike="noStrike">
               <a:solidFill>
-                <a:schemeClr val="dk1"/>
-              </a:solidFill>
-              <a:effectLst/>
-              <a:uFillTx/>
-              <a:latin typeface="Calibri"/>
+                <a:srgbClr val="000000"/>
+              </a:solidFill>
+              <a:effectLst/>
+              <a:uFillTx/>
+              <a:latin typeface="Arial"/>
             </a:endParaRPr>
           </a:p>
           <a:p>
             <a:pPr marL="1296000" lvl="2" indent="-288000">
+              <a:lnSpc>
+                <a:spcPct val="100000"/>
+              </a:lnSpc>
               <a:spcBef>
                 <a:spcPts val="850"/>
               </a:spcBef>
@@ -1080,15 +2603,18 @@
             </a:r>
             <a:endParaRPr lang="en-US" sz="3200" b="0" u="none" strike="noStrike">
               <a:solidFill>
-                <a:schemeClr val="dk1"/>
-              </a:solidFill>
-              <a:effectLst/>
-              <a:uFillTx/>
-              <a:latin typeface="Calibri"/>
+                <a:srgbClr val="000000"/>
+              </a:solidFill>
+              <a:effectLst/>
+              <a:uFillTx/>
+              <a:latin typeface="Arial"/>
             </a:endParaRPr>
           </a:p>
           <a:p>
             <a:pPr marL="1728000" lvl="3" indent="-216000">
+              <a:lnSpc>
+                <a:spcPct val="100000"/>
+              </a:lnSpc>
               <a:spcBef>
                 <a:spcPts val="567"/>
               </a:spcBef>
@@ -1112,15 +2638,18 @@
             </a:r>
             <a:endParaRPr lang="en-US" sz="3200" b="0" u="none" strike="noStrike">
               <a:solidFill>
-                <a:schemeClr val="dk1"/>
-              </a:solidFill>
-              <a:effectLst/>
-              <a:uFillTx/>
-              <a:latin typeface="Calibri"/>
+                <a:srgbClr val="000000"/>
+              </a:solidFill>
+              <a:effectLst/>
+              <a:uFillTx/>
+              <a:latin typeface="Arial"/>
             </a:endParaRPr>
           </a:p>
           <a:p>
             <a:pPr marL="2160000" lvl="4" indent="-216000">
+              <a:lnSpc>
+                <a:spcPct val="100000"/>
+              </a:lnSpc>
               <a:spcBef>
                 <a:spcPts val="283"/>
               </a:spcBef>
@@ -1144,15 +2673,18 @@
             </a:r>
             <a:endParaRPr lang="en-US" sz="3200" b="0" u="none" strike="noStrike">
               <a:solidFill>
-                <a:schemeClr val="dk1"/>
-              </a:solidFill>
-              <a:effectLst/>
-              <a:uFillTx/>
-              <a:latin typeface="Calibri"/>
+                <a:srgbClr val="000000"/>
+              </a:solidFill>
+              <a:effectLst/>
+              <a:uFillTx/>
+              <a:latin typeface="Arial"/>
             </a:endParaRPr>
           </a:p>
           <a:p>
             <a:pPr marL="2592000" lvl="5" indent="-216000">
+              <a:lnSpc>
+                <a:spcPct val="100000"/>
+              </a:lnSpc>
               <a:spcBef>
                 <a:spcPts val="283"/>
               </a:spcBef>
@@ -1176,15 +2708,18 @@
             </a:r>
             <a:endParaRPr lang="en-US" sz="3200" b="0" u="none" strike="noStrike">
               <a:solidFill>
-                <a:schemeClr val="dk1"/>
-              </a:solidFill>
-              <a:effectLst/>
-              <a:uFillTx/>
-              <a:latin typeface="Calibri"/>
+                <a:srgbClr val="000000"/>
+              </a:solidFill>
+              <a:effectLst/>
+              <a:uFillTx/>
+              <a:latin typeface="Arial"/>
             </a:endParaRPr>
           </a:p>
           <a:p>
             <a:pPr marL="3024000" lvl="6" indent="-216000">
+              <a:lnSpc>
+                <a:spcPct val="100000"/>
+              </a:lnSpc>
               <a:spcBef>
                 <a:spcPts val="283"/>
               </a:spcBef>
@@ -1208,18 +2743,18 @@
             </a:r>
             <a:endParaRPr lang="en-US" sz="3200" b="0" u="none" strike="noStrike">
               <a:solidFill>
-                <a:schemeClr val="dk1"/>
-              </a:solidFill>
-              <a:effectLst/>
-              <a:uFillTx/>
-              <a:latin typeface="Calibri"/>
+                <a:srgbClr val="000000"/>
+              </a:solidFill>
+              <a:effectLst/>
+              <a:uFillTx/>
+              <a:latin typeface="Arial"/>
             </a:endParaRPr>
           </a:p>
         </p:txBody>
       </p:sp>
       <p:sp>
         <p:nvSpPr>
-          <p:cNvPr id="57" name="PlaceHolder 3"/>
+          <p:cNvPr id="15" name="PlaceHolder 3"/>
           <p:cNvSpPr>
             <a:spLocks noGrp="1"/>
           </p:cNvSpPr>
@@ -1230,7 +2765,7 @@
         <p:spPr>
           <a:xfrm>
             <a:off x="1792440" y="5367240"/>
-            <a:ext cx="5486040" cy="804600"/>
+            <a:ext cx="5485680" cy="804240"/>
           </a:xfrm>
           <a:prstGeom prst="rect">
             <a:avLst/>
@@ -1270,29 +2805,29 @@
             </a:r>
             <a:endParaRPr lang="en-US" sz="1400" b="0" u="none" strike="noStrike">
               <a:solidFill>
-                <a:schemeClr val="dk1"/>
-              </a:solidFill>
-              <a:effectLst/>
-              <a:uFillTx/>
-              <a:latin typeface="Calibri"/>
+                <a:srgbClr val="000000"/>
+              </a:solidFill>
+              <a:effectLst/>
+              <a:uFillTx/>
+              <a:latin typeface="Arial"/>
             </a:endParaRPr>
           </a:p>
         </p:txBody>
       </p:sp>
       <p:sp>
         <p:nvSpPr>
-          <p:cNvPr id="58" name="PlaceHolder 4"/>
+          <p:cNvPr id="16" name="PlaceHolder 4"/>
           <p:cNvSpPr>
             <a:spLocks noGrp="1"/>
           </p:cNvSpPr>
           <p:nvPr>
-            <p:ph type="dt" idx="31"/>
+            <p:ph type="dt" idx="7"/>
           </p:nvPr>
         </p:nvSpPr>
         <p:spPr>
           <a:xfrm>
             <a:off x="457200" y="6356520"/>
-            <a:ext cx="2133360" cy="364680"/>
+            <a:ext cx="2133000" cy="364320"/>
           </a:xfrm>
           <a:prstGeom prst="rect">
             <a:avLst/>
@@ -1312,6 +2847,9 @@
                 <a:spcPct val="100000"/>
               </a:lnSpc>
               <a:buNone/>
+              <a:tabLst>
+                <a:tab algn="l" pos="0"/>
+              </a:tabLst>
               <a:defRPr lang="en-US" sz="1200" b="0" u="none" strike="noStrike">
                 <a:solidFill>
                   <a:schemeClr val="dk1">
@@ -1330,6 +2868,9 @@
                 <a:spcPct val="100000"/>
               </a:lnSpc>
               <a:buNone/>
+              <a:tabLst>
+                <a:tab algn="l" pos="0"/>
+              </a:tabLst>
             </a:pPr>
             <a:r>
               <a:rPr lang="en-US" sz="1200" b="0" u="none" strike="noStrike">
@@ -1357,18 +2898,18 @@
       </p:sp>
       <p:sp>
         <p:nvSpPr>
-          <p:cNvPr id="59" name="PlaceHolder 5"/>
+          <p:cNvPr id="17" name="PlaceHolder 5"/>
           <p:cNvSpPr>
             <a:spLocks noGrp="1"/>
           </p:cNvSpPr>
           <p:nvPr>
-            <p:ph type="ftr" idx="32"/>
+            <p:ph type="ftr" idx="8"/>
           </p:nvPr>
         </p:nvSpPr>
         <p:spPr>
           <a:xfrm>
             <a:off x="3124080" y="6356520"/>
-            <a:ext cx="2895120" cy="364680"/>
+            <a:ext cx="2894760" cy="364320"/>
           </a:xfrm>
           <a:prstGeom prst="rect">
             <a:avLst/>
@@ -1384,7 +2925,13 @@
           </a:bodyPr>
           <a:lstStyle>
             <a:lvl1pPr indent="0" algn="ctr">
+              <a:lnSpc>
+                <a:spcPct val="100000"/>
+              </a:lnSpc>
               <a:buNone/>
+              <a:tabLst>
+                <a:tab algn="l" pos="0"/>
+              </a:tabLst>
               <a:defRPr lang="en-US" sz="1400" b="0" u="none" strike="noStrike">
                 <a:solidFill>
                   <a:srgbClr val="000000"/>
@@ -1397,7 +2944,13 @@
           </a:lstStyle>
           <a:p>
             <a:pPr indent="0" algn="ctr">
+              <a:lnSpc>
+                <a:spcPct val="100000"/>
+              </a:lnSpc>
               <a:buNone/>
+              <a:tabLst>
+                <a:tab algn="l" pos="0"/>
+              </a:tabLst>
             </a:pPr>
             <a:r>
               <a:rPr lang="en-US" sz="1400" b="0" u="none" strike="noStrike">
@@ -1423,18 +2976,18 @@
       </p:sp>
       <p:sp>
         <p:nvSpPr>
-          <p:cNvPr id="60" name="PlaceHolder 6"/>
+          <p:cNvPr id="18" name="PlaceHolder 6"/>
           <p:cNvSpPr>
             <a:spLocks noGrp="1"/>
           </p:cNvSpPr>
           <p:nvPr>
-            <p:ph type="sldNum" idx="33"/>
+            <p:ph type="sldNum" idx="9"/>
           </p:nvPr>
         </p:nvSpPr>
         <p:spPr>
           <a:xfrm>
             <a:off x="6553080" y="6356520"/>
-            <a:ext cx="2133360" cy="364680"/>
+            <a:ext cx="2133000" cy="364320"/>
           </a:xfrm>
           <a:prstGeom prst="rect">
             <a:avLst/>
@@ -1454,6 +3007,9 @@
                 <a:spcPct val="100000"/>
               </a:lnSpc>
               <a:buNone/>
+              <a:tabLst>
+                <a:tab algn="l" pos="0"/>
+              </a:tabLst>
               <a:defRPr lang="en-US" sz="1200" b="0" u="none" strike="noStrike">
                 <a:solidFill>
                   <a:schemeClr val="dk1">
@@ -1472,8 +3028,11 @@
                 <a:spcPct val="100000"/>
               </a:lnSpc>
               <a:buNone/>
-            </a:pPr>
-            <a:fld id="{3943C331-D63A-4C46-92D5-1FA674025B7F}" type="slidenum">
+              <a:tabLst>
+                <a:tab algn="l" pos="0"/>
+              </a:tabLst>
+            </a:pPr>
+            <a:fld id="{7010FF6E-5CA8-4F4B-846B-A4B9E46B88D3}" type="slidenum">
               <a:rPr lang="en-US" sz="1200" b="0" u="none" strike="noStrike">
                 <a:solidFill>
                   <a:schemeClr val="dk1">
@@ -1502,7 +3061,337 @@
 </p:sldLayout>
 </file>
 
-<file path=ppt/slideLayouts/slideLayout2.xml><?xml version="1.0" encoding="utf-8"?>
+<file path=ppt/slideLayouts/slideLayout4.xml><?xml version="1.0" encoding="utf-8"?>
+<p:sldLayout xmlns:a="http://schemas.openxmlformats.org/drawingml/2006/main" xmlns:p="http://schemas.openxmlformats.org/presentationml/2006/main" xmlns:r="http://schemas.openxmlformats.org/officeDocument/2006/relationships" xmlns:p14="http://schemas.microsoft.com/office/powerpoint/2010/main" xmlns:p15="http://schemas.microsoft.com/office/powerpoint/2012/main" xmlns:mc="http://schemas.openxmlformats.org/markup-compatibility/2006" type="title" preserve="1">
+  <p:cSld name="Title Slide">
+    <p:bg>
+      <p:bgPr>
+        <a:solidFill>
+          <a:srgbClr val="ffffff"/>
+        </a:solidFill>
+      </p:bgPr>
+    </p:bg>
+    <p:spTree>
+      <p:nvGrpSpPr>
+        <p:cNvPr id="1" name=""/>
+        <p:cNvGrpSpPr/>
+        <p:nvPr/>
+      </p:nvGrpSpPr>
+      <p:grpSpPr>
+        <a:xfrm>
+          <a:off x="0" y="0"/>
+          <a:ext cx="0" cy="0"/>
+          <a:chOff x="0" y="0"/>
+          <a:chExt cx="0" cy="0"/>
+        </a:xfrm>
+      </p:grpSpPr>
+      <p:sp>
+        <p:nvSpPr>
+          <p:cNvPr id="19" name="PlaceHolder 1"/>
+          <p:cNvSpPr>
+            <a:spLocks noGrp="1"/>
+          </p:cNvSpPr>
+          <p:nvPr>
+            <p:ph type="title"/>
+          </p:nvPr>
+        </p:nvSpPr>
+        <p:spPr>
+          <a:xfrm>
+            <a:off x="685800" y="2130480"/>
+            <a:ext cx="7771680" cy="1469160"/>
+          </a:xfrm>
+          <a:prstGeom prst="rect">
+            <a:avLst/>
+          </a:prstGeom>
+          <a:noFill/>
+          <a:ln w="0">
+            <a:noFill/>
+          </a:ln>
+        </p:spPr>
+        <p:txBody>
+          <a:bodyPr lIns="91440" rIns="91440" tIns="45720" bIns="45720" anchor="ctr">
+            <a:noAutofit/>
+          </a:bodyPr>
+          <a:p>
+            <a:pPr indent="0" algn="ctr" defTabSz="457200">
+              <a:lnSpc>
+                <a:spcPct val="100000"/>
+              </a:lnSpc>
+              <a:buNone/>
+              <a:tabLst>
+                <a:tab algn="l" pos="0"/>
+              </a:tabLst>
+            </a:pPr>
+            <a:r>
+              <a:rPr lang="en-US" sz="4400" b="0" u="none" strike="noStrike">
+                <a:solidFill>
+                  <a:schemeClr val="dk1"/>
+                </a:solidFill>
+                <a:effectLst/>
+                <a:uFillTx/>
+                <a:latin typeface="Calibri"/>
+              </a:rPr>
+              <a:t>Click to edit Master title style</a:t>
+            </a:r>
+            <a:endParaRPr lang="en-US" sz="4400" b="0" u="none" strike="noStrike">
+              <a:solidFill>
+                <a:srgbClr val="000000"/>
+              </a:solidFill>
+              <a:effectLst/>
+              <a:uFillTx/>
+              <a:latin typeface="Arial"/>
+            </a:endParaRPr>
+          </a:p>
+        </p:txBody>
+      </p:sp>
+      <p:sp>
+        <p:nvSpPr>
+          <p:cNvPr id="20" name="PlaceHolder 2"/>
+          <p:cNvSpPr>
+            <a:spLocks noGrp="1"/>
+          </p:cNvSpPr>
+          <p:nvPr>
+            <p:ph type="dt" idx="10"/>
+          </p:nvPr>
+        </p:nvSpPr>
+        <p:spPr>
+          <a:xfrm>
+            <a:off x="457200" y="6356520"/>
+            <a:ext cx="2133000" cy="364320"/>
+          </a:xfrm>
+          <a:prstGeom prst="rect">
+            <a:avLst/>
+          </a:prstGeom>
+          <a:noFill/>
+          <a:ln w="0">
+            <a:noFill/>
+          </a:ln>
+        </p:spPr>
+        <p:txBody>
+          <a:bodyPr lIns="91440" rIns="91440" tIns="45720" bIns="45720" anchor="ctr">
+            <a:noAutofit/>
+          </a:bodyPr>
+          <a:lstStyle>
+            <a:lvl1pPr indent="0" defTabSz="457200">
+              <a:lnSpc>
+                <a:spcPct val="100000"/>
+              </a:lnSpc>
+              <a:buNone/>
+              <a:tabLst>
+                <a:tab algn="l" pos="0"/>
+              </a:tabLst>
+              <a:defRPr lang="en-US" sz="1200" b="0" u="none" strike="noStrike">
+                <a:solidFill>
+                  <a:schemeClr val="dk1">
+                    <a:tint val="75000"/>
+                  </a:schemeClr>
+                </a:solidFill>
+                <a:effectLst/>
+                <a:uFillTx/>
+                <a:latin typeface="Calibri"/>
+              </a:defRPr>
+            </a:lvl1pPr>
+          </a:lstStyle>
+          <a:p>
+            <a:pPr indent="0" defTabSz="457200">
+              <a:lnSpc>
+                <a:spcPct val="100000"/>
+              </a:lnSpc>
+              <a:buNone/>
+              <a:tabLst>
+                <a:tab algn="l" pos="0"/>
+              </a:tabLst>
+            </a:pPr>
+            <a:r>
+              <a:rPr lang="en-US" sz="1200" b="0" u="none" strike="noStrike">
+                <a:solidFill>
+                  <a:schemeClr val="dk1">
+                    <a:tint val="75000"/>
+                  </a:schemeClr>
+                </a:solidFill>
+                <a:effectLst/>
+                <a:uFillTx/>
+                <a:latin typeface="Calibri"/>
+              </a:rPr>
+              <a:t>&lt;date/time&gt;</a:t>
+            </a:r>
+            <a:endParaRPr lang="en-US" sz="1200" b="0" u="none" strike="noStrike">
+              <a:solidFill>
+                <a:srgbClr val="000000"/>
+              </a:solidFill>
+              <a:effectLst/>
+              <a:uFillTx/>
+              <a:latin typeface="Times New Roman"/>
+            </a:endParaRPr>
+          </a:p>
+        </p:txBody>
+      </p:sp>
+      <p:sp>
+        <p:nvSpPr>
+          <p:cNvPr id="21" name="PlaceHolder 3"/>
+          <p:cNvSpPr>
+            <a:spLocks noGrp="1"/>
+          </p:cNvSpPr>
+          <p:nvPr>
+            <p:ph type="ftr" idx="11"/>
+          </p:nvPr>
+        </p:nvSpPr>
+        <p:spPr>
+          <a:xfrm>
+            <a:off x="3124080" y="6356520"/>
+            <a:ext cx="2894760" cy="364320"/>
+          </a:xfrm>
+          <a:prstGeom prst="rect">
+            <a:avLst/>
+          </a:prstGeom>
+          <a:noFill/>
+          <a:ln w="0">
+            <a:noFill/>
+          </a:ln>
+        </p:spPr>
+        <p:txBody>
+          <a:bodyPr lIns="91440" rIns="91440" tIns="45720" bIns="45720" anchor="ctr">
+            <a:noAutofit/>
+          </a:bodyPr>
+          <a:lstStyle>
+            <a:lvl1pPr indent="0" algn="ctr">
+              <a:lnSpc>
+                <a:spcPct val="100000"/>
+              </a:lnSpc>
+              <a:buNone/>
+              <a:tabLst>
+                <a:tab algn="l" pos="0"/>
+              </a:tabLst>
+              <a:defRPr lang="en-US" sz="1400" b="0" u="none" strike="noStrike">
+                <a:solidFill>
+                  <a:srgbClr val="000000"/>
+                </a:solidFill>
+                <a:effectLst/>
+                <a:uFillTx/>
+                <a:latin typeface="Times New Roman"/>
+              </a:defRPr>
+            </a:lvl1pPr>
+          </a:lstStyle>
+          <a:p>
+            <a:pPr indent="0" algn="ctr">
+              <a:lnSpc>
+                <a:spcPct val="100000"/>
+              </a:lnSpc>
+              <a:buNone/>
+              <a:tabLst>
+                <a:tab algn="l" pos="0"/>
+              </a:tabLst>
+            </a:pPr>
+            <a:r>
+              <a:rPr lang="en-US" sz="1400" b="0" u="none" strike="noStrike">
+                <a:solidFill>
+                  <a:srgbClr val="000000"/>
+                </a:solidFill>
+                <a:effectLst/>
+                <a:uFillTx/>
+                <a:latin typeface="Times New Roman"/>
+              </a:rPr>
+              <a:t>&lt;footer&gt;</a:t>
+            </a:r>
+            <a:endParaRPr lang="en-US" sz="1400" b="0" u="none" strike="noStrike">
+              <a:solidFill>
+                <a:srgbClr val="000000"/>
+              </a:solidFill>
+              <a:effectLst/>
+              <a:uFillTx/>
+              <a:latin typeface="Times New Roman"/>
+            </a:endParaRPr>
+          </a:p>
+        </p:txBody>
+      </p:sp>
+      <p:sp>
+        <p:nvSpPr>
+          <p:cNvPr id="22" name="PlaceHolder 4"/>
+          <p:cNvSpPr>
+            <a:spLocks noGrp="1"/>
+          </p:cNvSpPr>
+          <p:nvPr>
+            <p:ph type="sldNum" idx="12"/>
+          </p:nvPr>
+        </p:nvSpPr>
+        <p:spPr>
+          <a:xfrm>
+            <a:off x="6553080" y="6356520"/>
+            <a:ext cx="2133000" cy="364320"/>
+          </a:xfrm>
+          <a:prstGeom prst="rect">
+            <a:avLst/>
+          </a:prstGeom>
+          <a:noFill/>
+          <a:ln w="0">
+            <a:noFill/>
+          </a:ln>
+        </p:spPr>
+        <p:txBody>
+          <a:bodyPr lIns="91440" rIns="91440" tIns="45720" bIns="45720" anchor="ctr">
+            <a:noAutofit/>
+          </a:bodyPr>
+          <a:lstStyle>
+            <a:lvl1pPr indent="0" algn="r" defTabSz="457200">
+              <a:lnSpc>
+                <a:spcPct val="100000"/>
+              </a:lnSpc>
+              <a:buNone/>
+              <a:tabLst>
+                <a:tab algn="l" pos="0"/>
+              </a:tabLst>
+              <a:defRPr lang="en-US" sz="1200" b="0" u="none" strike="noStrike">
+                <a:solidFill>
+                  <a:schemeClr val="dk1">
+                    <a:tint val="75000"/>
+                  </a:schemeClr>
+                </a:solidFill>
+                <a:effectLst/>
+                <a:uFillTx/>
+                <a:latin typeface="Calibri"/>
+              </a:defRPr>
+            </a:lvl1pPr>
+          </a:lstStyle>
+          <a:p>
+            <a:pPr indent="0" algn="r" defTabSz="457200">
+              <a:lnSpc>
+                <a:spcPct val="100000"/>
+              </a:lnSpc>
+              <a:buNone/>
+              <a:tabLst>
+                <a:tab algn="l" pos="0"/>
+              </a:tabLst>
+            </a:pPr>
+            <a:fld id="{82130DC3-9816-44D9-A768-0EB6B33095D3}" type="slidenum">
+              <a:rPr lang="en-US" sz="1200" b="0" u="none" strike="noStrike">
+                <a:solidFill>
+                  <a:schemeClr val="dk1">
+                    <a:tint val="75000"/>
+                  </a:schemeClr>
+                </a:solidFill>
+                <a:effectLst/>
+                <a:uFillTx/>
+                <a:latin typeface="Calibri"/>
+              </a:rPr>
+              <a:t>&lt;number&gt;</a:t>
+            </a:fld>
+            <a:endParaRPr lang="en-US" sz="1200" b="0" u="none" strike="noStrike">
+              <a:solidFill>
+                <a:srgbClr val="000000"/>
+              </a:solidFill>
+              <a:effectLst/>
+              <a:uFillTx/>
+              <a:latin typeface="Times New Roman"/>
+            </a:endParaRPr>
+          </a:p>
+        </p:txBody>
+      </p:sp>
+    </p:spTree>
+  </p:cSld>
+</p:sldLayout>
+</file>
+
+<file path=ppt/slideLayouts/slideLayout5.xml><?xml version="1.0" encoding="utf-8"?>
 <p:sldLayout xmlns:a="http://schemas.openxmlformats.org/drawingml/2006/main" xmlns:p="http://schemas.openxmlformats.org/presentationml/2006/main" xmlns:r="http://schemas.openxmlformats.org/officeDocument/2006/relationships" xmlns:p14="http://schemas.microsoft.com/office/powerpoint/2010/main" xmlns:p15="http://schemas.microsoft.com/office/powerpoint/2012/main" xmlns:mc="http://schemas.openxmlformats.org/markup-compatibility/2006" type="vertTx" preserve="1">
   <p:cSld name="Title and Vertical Text">
     <p:bg>
@@ -1528,7 +3417,7 @@
       </p:grpSpPr>
       <p:sp>
         <p:nvSpPr>
-          <p:cNvPr id="6" name="PlaceHolder 1"/>
+          <p:cNvPr id="23" name="PlaceHolder 1"/>
           <p:cNvSpPr>
             <a:spLocks noGrp="1"/>
           </p:cNvSpPr>
@@ -1539,7 +3428,7 @@
         <p:spPr>
           <a:xfrm>
             <a:off x="457200" y="274680"/>
-            <a:ext cx="8229240" cy="1142640"/>
+            <a:ext cx="8228880" cy="1142280"/>
           </a:xfrm>
           <a:prstGeom prst="rect">
             <a:avLst/>
@@ -1559,6 +3448,9 @@
                 <a:spcPct val="100000"/>
               </a:lnSpc>
               <a:buNone/>
+              <a:tabLst>
+                <a:tab algn="l" pos="0"/>
+              </a:tabLst>
             </a:pPr>
             <a:r>
               <a:rPr lang="en-US" sz="4400" b="0" u="none" strike="noStrike">
@@ -1573,18 +3465,18 @@
             </a:r>
             <a:endParaRPr lang="en-US" sz="4400" b="0" u="none" strike="noStrike">
               <a:solidFill>
-                <a:schemeClr val="dk1"/>
-              </a:solidFill>
-              <a:effectLst/>
-              <a:uFillTx/>
-              <a:latin typeface="Calibri"/>
+                <a:srgbClr val="000000"/>
+              </a:solidFill>
+              <a:effectLst/>
+              <a:uFillTx/>
+              <a:latin typeface="Arial"/>
             </a:endParaRPr>
           </a:p>
         </p:txBody>
       </p:sp>
       <p:sp>
         <p:nvSpPr>
-          <p:cNvPr id="7" name="PlaceHolder 2"/>
+          <p:cNvPr id="24" name="PlaceHolder 2"/>
           <p:cNvSpPr>
             <a:spLocks noGrp="1"/>
           </p:cNvSpPr>
@@ -1595,7 +3487,7 @@
         <p:spPr>
           <a:xfrm>
             <a:off x="457200" y="1600200"/>
-            <a:ext cx="8229240" cy="4525560"/>
+            <a:ext cx="8228880" cy="4525200"/>
           </a:xfrm>
           <a:prstGeom prst="rect">
             <a:avLst/>
@@ -1636,11 +3528,11 @@
             </a:r>
             <a:endParaRPr lang="en-US" sz="3200" b="0" u="none" strike="noStrike">
               <a:solidFill>
-                <a:schemeClr val="dk1"/>
-              </a:solidFill>
-              <a:effectLst/>
-              <a:uFillTx/>
-              <a:latin typeface="Calibri"/>
+                <a:srgbClr val="000000"/>
+              </a:solidFill>
+              <a:effectLst/>
+              <a:uFillTx/>
+              <a:latin typeface="Arial"/>
             </a:endParaRPr>
           </a:p>
           <a:p>
@@ -1670,11 +3562,11 @@
             </a:r>
             <a:endParaRPr lang="en-US" sz="2800" b="0" u="none" strike="noStrike">
               <a:solidFill>
-                <a:schemeClr val="dk1"/>
-              </a:solidFill>
-              <a:effectLst/>
-              <a:uFillTx/>
-              <a:latin typeface="Calibri"/>
+                <a:srgbClr val="000000"/>
+              </a:solidFill>
+              <a:effectLst/>
+              <a:uFillTx/>
+              <a:latin typeface="Arial"/>
             </a:endParaRPr>
           </a:p>
           <a:p>
@@ -1704,11 +3596,11 @@
             </a:r>
             <a:endParaRPr lang="en-US" sz="2400" b="0" u="none" strike="noStrike">
               <a:solidFill>
-                <a:schemeClr val="dk1"/>
-              </a:solidFill>
-              <a:effectLst/>
-              <a:uFillTx/>
-              <a:latin typeface="Calibri"/>
+                <a:srgbClr val="000000"/>
+              </a:solidFill>
+              <a:effectLst/>
+              <a:uFillTx/>
+              <a:latin typeface="Arial"/>
             </a:endParaRPr>
           </a:p>
           <a:p>
@@ -1738,11 +3630,11 @@
             </a:r>
             <a:endParaRPr lang="en-US" sz="2000" b="0" u="none" strike="noStrike">
               <a:solidFill>
-                <a:schemeClr val="dk1"/>
-              </a:solidFill>
-              <a:effectLst/>
-              <a:uFillTx/>
-              <a:latin typeface="Calibri"/>
+                <a:srgbClr val="000000"/>
+              </a:solidFill>
+              <a:effectLst/>
+              <a:uFillTx/>
+              <a:latin typeface="Arial"/>
             </a:endParaRPr>
           </a:p>
           <a:p>
@@ -1772,29 +3664,29 @@
             </a:r>
             <a:endParaRPr lang="en-US" sz="2000" b="0" u="none" strike="noStrike">
               <a:solidFill>
-                <a:schemeClr val="dk1"/>
-              </a:solidFill>
-              <a:effectLst/>
-              <a:uFillTx/>
-              <a:latin typeface="Calibri"/>
+                <a:srgbClr val="000000"/>
+              </a:solidFill>
+              <a:effectLst/>
+              <a:uFillTx/>
+              <a:latin typeface="Arial"/>
             </a:endParaRPr>
           </a:p>
         </p:txBody>
       </p:sp>
       <p:sp>
         <p:nvSpPr>
-          <p:cNvPr id="8" name="PlaceHolder 3"/>
+          <p:cNvPr id="25" name="PlaceHolder 3"/>
           <p:cNvSpPr>
             <a:spLocks noGrp="1"/>
           </p:cNvSpPr>
           <p:nvPr>
-            <p:ph type="dt" idx="4"/>
+            <p:ph type="dt" idx="13"/>
           </p:nvPr>
         </p:nvSpPr>
         <p:spPr>
           <a:xfrm>
             <a:off x="457200" y="6356520"/>
-            <a:ext cx="2133360" cy="364680"/>
+            <a:ext cx="2133000" cy="364320"/>
           </a:xfrm>
           <a:prstGeom prst="rect">
             <a:avLst/>
@@ -1814,6 +3706,9 @@
                 <a:spcPct val="100000"/>
               </a:lnSpc>
               <a:buNone/>
+              <a:tabLst>
+                <a:tab algn="l" pos="0"/>
+              </a:tabLst>
               <a:defRPr lang="en-US" sz="1200" b="0" u="none" strike="noStrike">
                 <a:solidFill>
                   <a:schemeClr val="dk1">
@@ -1832,6 +3727,9 @@
                 <a:spcPct val="100000"/>
               </a:lnSpc>
               <a:buNone/>
+              <a:tabLst>
+                <a:tab algn="l" pos="0"/>
+              </a:tabLst>
             </a:pPr>
             <a:r>
               <a:rPr lang="en-US" sz="1200" b="0" u="none" strike="noStrike">
@@ -1859,18 +3757,18 @@
       </p:sp>
       <p:sp>
         <p:nvSpPr>
-          <p:cNvPr id="9" name="PlaceHolder 4"/>
+          <p:cNvPr id="26" name="PlaceHolder 4"/>
           <p:cNvSpPr>
             <a:spLocks noGrp="1"/>
           </p:cNvSpPr>
           <p:nvPr>
-            <p:ph type="ftr" idx="5"/>
+            <p:ph type="ftr" idx="14"/>
           </p:nvPr>
         </p:nvSpPr>
         <p:spPr>
           <a:xfrm>
             <a:off x="3124080" y="6356520"/>
-            <a:ext cx="2895120" cy="364680"/>
+            <a:ext cx="2894760" cy="364320"/>
           </a:xfrm>
           <a:prstGeom prst="rect">
             <a:avLst/>
@@ -1886,7 +3784,13 @@
           </a:bodyPr>
           <a:lstStyle>
             <a:lvl1pPr indent="0" algn="ctr">
+              <a:lnSpc>
+                <a:spcPct val="100000"/>
+              </a:lnSpc>
               <a:buNone/>
+              <a:tabLst>
+                <a:tab algn="l" pos="0"/>
+              </a:tabLst>
               <a:defRPr lang="en-US" sz="1400" b="0" u="none" strike="noStrike">
                 <a:solidFill>
                   <a:srgbClr val="000000"/>
@@ -1899,7 +3803,13 @@
           </a:lstStyle>
           <a:p>
             <a:pPr indent="0" algn="ctr">
+              <a:lnSpc>
+                <a:spcPct val="100000"/>
+              </a:lnSpc>
               <a:buNone/>
+              <a:tabLst>
+                <a:tab algn="l" pos="0"/>
+              </a:tabLst>
             </a:pPr>
             <a:r>
               <a:rPr lang="en-US" sz="1400" b="0" u="none" strike="noStrike">
@@ -1925,18 +3835,18 @@
       </p:sp>
       <p:sp>
         <p:nvSpPr>
-          <p:cNvPr id="10" name="PlaceHolder 5"/>
+          <p:cNvPr id="27" name="PlaceHolder 5"/>
           <p:cNvSpPr>
             <a:spLocks noGrp="1"/>
           </p:cNvSpPr>
           <p:nvPr>
-            <p:ph type="sldNum" idx="6"/>
+            <p:ph type="sldNum" idx="15"/>
           </p:nvPr>
         </p:nvSpPr>
         <p:spPr>
           <a:xfrm>
             <a:off x="6553080" y="6356520"/>
-            <a:ext cx="2133360" cy="364680"/>
+            <a:ext cx="2133000" cy="364320"/>
           </a:xfrm>
           <a:prstGeom prst="rect">
             <a:avLst/>
@@ -1956,6 +3866,9 @@
                 <a:spcPct val="100000"/>
               </a:lnSpc>
               <a:buNone/>
+              <a:tabLst>
+                <a:tab algn="l" pos="0"/>
+              </a:tabLst>
               <a:defRPr lang="en-US" sz="1200" b="0" u="none" strike="noStrike">
                 <a:solidFill>
                   <a:schemeClr val="dk1">
@@ -1974,8 +3887,11 @@
                 <a:spcPct val="100000"/>
               </a:lnSpc>
               <a:buNone/>
-            </a:pPr>
-            <a:fld id="{C5EA5A1E-A26F-4648-9325-ADA03ADBB1A1}" type="slidenum">
+              <a:tabLst>
+                <a:tab algn="l" pos="0"/>
+              </a:tabLst>
+            </a:pPr>
+            <a:fld id="{33A6C4FC-39ED-4636-92DD-328255CA6B82}" type="slidenum">
               <a:rPr lang="en-US" sz="1200" b="0" u="none" strike="noStrike">
                 <a:solidFill>
                   <a:schemeClr val="dk1">
@@ -2004,7 +3920,7 @@
 </p:sldLayout>
 </file>
 
-<file path=ppt/slideLayouts/slideLayout3.xml><?xml version="1.0" encoding="utf-8"?>
+<file path=ppt/slideLayouts/slideLayout6.xml><?xml version="1.0" encoding="utf-8"?>
 <p:sldLayout xmlns:a="http://schemas.openxmlformats.org/drawingml/2006/main" xmlns:p="http://schemas.openxmlformats.org/presentationml/2006/main" xmlns:r="http://schemas.openxmlformats.org/officeDocument/2006/relationships" xmlns:p14="http://schemas.microsoft.com/office/powerpoint/2010/main" xmlns:p15="http://schemas.microsoft.com/office/powerpoint/2012/main" xmlns:mc="http://schemas.openxmlformats.org/markup-compatibility/2006" type="vertTitleAndTx" preserve="1">
   <p:cSld name="Vertical Title and Text">
     <p:bg>
@@ -2030,7 +3946,7 @@
       </p:grpSpPr>
       <p:sp>
         <p:nvSpPr>
-          <p:cNvPr id="11" name="PlaceHolder 1"/>
+          <p:cNvPr id="28" name="PlaceHolder 1"/>
           <p:cNvSpPr>
             <a:spLocks noGrp="1"/>
           </p:cNvSpPr>
@@ -2041,7 +3957,7 @@
         <p:spPr>
           <a:xfrm>
             <a:off x="6629400" y="274680"/>
-            <a:ext cx="2057040" cy="5851080"/>
+            <a:ext cx="2056680" cy="5850720"/>
           </a:xfrm>
           <a:prstGeom prst="rect">
             <a:avLst/>
@@ -2061,6 +3977,9 @@
                 <a:spcPct val="100000"/>
               </a:lnSpc>
               <a:buNone/>
+              <a:tabLst>
+                <a:tab algn="l" pos="0"/>
+              </a:tabLst>
             </a:pPr>
             <a:r>
               <a:rPr lang="en-US" sz="4400" b="0" u="none" strike="noStrike">
@@ -2075,18 +3994,18 @@
             </a:r>
             <a:endParaRPr lang="en-US" sz="4400" b="0" u="none" strike="noStrike">
               <a:solidFill>
-                <a:schemeClr val="dk1"/>
-              </a:solidFill>
-              <a:effectLst/>
-              <a:uFillTx/>
-              <a:latin typeface="Calibri"/>
+                <a:srgbClr val="000000"/>
+              </a:solidFill>
+              <a:effectLst/>
+              <a:uFillTx/>
+              <a:latin typeface="Arial"/>
             </a:endParaRPr>
           </a:p>
         </p:txBody>
       </p:sp>
       <p:sp>
         <p:nvSpPr>
-          <p:cNvPr id="12" name="PlaceHolder 2"/>
+          <p:cNvPr id="29" name="PlaceHolder 2"/>
           <p:cNvSpPr>
             <a:spLocks noGrp="1"/>
           </p:cNvSpPr>
@@ -2097,7 +4016,7 @@
         <p:spPr>
           <a:xfrm>
             <a:off x="457200" y="274680"/>
-            <a:ext cx="6019560" cy="5851080"/>
+            <a:ext cx="6019200" cy="5850720"/>
           </a:xfrm>
           <a:prstGeom prst="rect">
             <a:avLst/>
@@ -2138,11 +4057,11 @@
             </a:r>
             <a:endParaRPr lang="en-US" sz="3200" b="0" u="none" strike="noStrike">
               <a:solidFill>
-                <a:schemeClr val="dk1"/>
-              </a:solidFill>
-              <a:effectLst/>
-              <a:uFillTx/>
-              <a:latin typeface="Calibri"/>
+                <a:srgbClr val="000000"/>
+              </a:solidFill>
+              <a:effectLst/>
+              <a:uFillTx/>
+              <a:latin typeface="Arial"/>
             </a:endParaRPr>
           </a:p>
           <a:p>
@@ -2172,11 +4091,11 @@
             </a:r>
             <a:endParaRPr lang="en-US" sz="2800" b="0" u="none" strike="noStrike">
               <a:solidFill>
-                <a:schemeClr val="dk1"/>
-              </a:solidFill>
-              <a:effectLst/>
-              <a:uFillTx/>
-              <a:latin typeface="Calibri"/>
+                <a:srgbClr val="000000"/>
+              </a:solidFill>
+              <a:effectLst/>
+              <a:uFillTx/>
+              <a:latin typeface="Arial"/>
             </a:endParaRPr>
           </a:p>
           <a:p>
@@ -2206,11 +4125,11 @@
             </a:r>
             <a:endParaRPr lang="en-US" sz="2400" b="0" u="none" strike="noStrike">
               <a:solidFill>
-                <a:schemeClr val="dk1"/>
-              </a:solidFill>
-              <a:effectLst/>
-              <a:uFillTx/>
-              <a:latin typeface="Calibri"/>
+                <a:srgbClr val="000000"/>
+              </a:solidFill>
+              <a:effectLst/>
+              <a:uFillTx/>
+              <a:latin typeface="Arial"/>
             </a:endParaRPr>
           </a:p>
           <a:p>
@@ -2240,11 +4159,11 @@
             </a:r>
             <a:endParaRPr lang="en-US" sz="2000" b="0" u="none" strike="noStrike">
               <a:solidFill>
-                <a:schemeClr val="dk1"/>
-              </a:solidFill>
-              <a:effectLst/>
-              <a:uFillTx/>
-              <a:latin typeface="Calibri"/>
+                <a:srgbClr val="000000"/>
+              </a:solidFill>
+              <a:effectLst/>
+              <a:uFillTx/>
+              <a:latin typeface="Arial"/>
             </a:endParaRPr>
           </a:p>
           <a:p>
@@ -2274,29 +4193,29 @@
             </a:r>
             <a:endParaRPr lang="en-US" sz="2000" b="0" u="none" strike="noStrike">
               <a:solidFill>
-                <a:schemeClr val="dk1"/>
-              </a:solidFill>
-              <a:effectLst/>
-              <a:uFillTx/>
-              <a:latin typeface="Calibri"/>
+                <a:srgbClr val="000000"/>
+              </a:solidFill>
+              <a:effectLst/>
+              <a:uFillTx/>
+              <a:latin typeface="Arial"/>
             </a:endParaRPr>
           </a:p>
         </p:txBody>
       </p:sp>
       <p:sp>
         <p:nvSpPr>
-          <p:cNvPr id="13" name="PlaceHolder 3"/>
+          <p:cNvPr id="30" name="PlaceHolder 3"/>
           <p:cNvSpPr>
             <a:spLocks noGrp="1"/>
           </p:cNvSpPr>
           <p:nvPr>
-            <p:ph type="dt" idx="7"/>
+            <p:ph type="dt" idx="16"/>
           </p:nvPr>
         </p:nvSpPr>
         <p:spPr>
           <a:xfrm>
             <a:off x="457200" y="6356520"/>
-            <a:ext cx="2133360" cy="364680"/>
+            <a:ext cx="2133000" cy="364320"/>
           </a:xfrm>
           <a:prstGeom prst="rect">
             <a:avLst/>
@@ -2316,6 +4235,9 @@
                 <a:spcPct val="100000"/>
               </a:lnSpc>
               <a:buNone/>
+              <a:tabLst>
+                <a:tab algn="l" pos="0"/>
+              </a:tabLst>
               <a:defRPr lang="en-US" sz="1200" b="0" u="none" strike="noStrike">
                 <a:solidFill>
                   <a:schemeClr val="dk1">
@@ -2334,6 +4256,9 @@
                 <a:spcPct val="100000"/>
               </a:lnSpc>
               <a:buNone/>
+              <a:tabLst>
+                <a:tab algn="l" pos="0"/>
+              </a:tabLst>
             </a:pPr>
             <a:r>
               <a:rPr lang="en-US" sz="1200" b="0" u="none" strike="noStrike">
@@ -2361,18 +4286,18 @@
       </p:sp>
       <p:sp>
         <p:nvSpPr>
-          <p:cNvPr id="14" name="PlaceHolder 4"/>
+          <p:cNvPr id="31" name="PlaceHolder 4"/>
           <p:cNvSpPr>
             <a:spLocks noGrp="1"/>
           </p:cNvSpPr>
           <p:nvPr>
-            <p:ph type="ftr" idx="8"/>
+            <p:ph type="ftr" idx="17"/>
           </p:nvPr>
         </p:nvSpPr>
         <p:spPr>
           <a:xfrm>
             <a:off x="3124080" y="6356520"/>
-            <a:ext cx="2895120" cy="364680"/>
+            <a:ext cx="2894760" cy="364320"/>
           </a:xfrm>
           <a:prstGeom prst="rect">
             <a:avLst/>
@@ -2388,7 +4313,13 @@
           </a:bodyPr>
           <a:lstStyle>
             <a:lvl1pPr indent="0" algn="ctr">
+              <a:lnSpc>
+                <a:spcPct val="100000"/>
+              </a:lnSpc>
               <a:buNone/>
+              <a:tabLst>
+                <a:tab algn="l" pos="0"/>
+              </a:tabLst>
               <a:defRPr lang="en-US" sz="1400" b="0" u="none" strike="noStrike">
                 <a:solidFill>
                   <a:srgbClr val="000000"/>
@@ -2401,7 +4332,13 @@
           </a:lstStyle>
           <a:p>
             <a:pPr indent="0" algn="ctr">
+              <a:lnSpc>
+                <a:spcPct val="100000"/>
+              </a:lnSpc>
               <a:buNone/>
+              <a:tabLst>
+                <a:tab algn="l" pos="0"/>
+              </a:tabLst>
             </a:pPr>
             <a:r>
               <a:rPr lang="en-US" sz="1400" b="0" u="none" strike="noStrike">
@@ -2427,18 +4364,18 @@
       </p:sp>
       <p:sp>
         <p:nvSpPr>
-          <p:cNvPr id="15" name="PlaceHolder 5"/>
+          <p:cNvPr id="32" name="PlaceHolder 5"/>
           <p:cNvSpPr>
             <a:spLocks noGrp="1"/>
           </p:cNvSpPr>
           <p:nvPr>
-            <p:ph type="sldNum" idx="9"/>
+            <p:ph type="sldNum" idx="18"/>
           </p:nvPr>
         </p:nvSpPr>
         <p:spPr>
           <a:xfrm>
             <a:off x="6553080" y="6356520"/>
-            <a:ext cx="2133360" cy="364680"/>
+            <a:ext cx="2133000" cy="364320"/>
           </a:xfrm>
           <a:prstGeom prst="rect">
             <a:avLst/>
@@ -2458,6 +4395,9 @@
                 <a:spcPct val="100000"/>
               </a:lnSpc>
               <a:buNone/>
+              <a:tabLst>
+                <a:tab algn="l" pos="0"/>
+              </a:tabLst>
               <a:defRPr lang="en-US" sz="1200" b="0" u="none" strike="noStrike">
                 <a:solidFill>
                   <a:schemeClr val="dk1">
@@ -2476,8 +4416,11 @@
                 <a:spcPct val="100000"/>
               </a:lnSpc>
               <a:buNone/>
-            </a:pPr>
-            <a:fld id="{A567595E-7ED2-4B1B-BFC8-9C33254E75EC}" type="slidenum">
+              <a:tabLst>
+                <a:tab algn="l" pos="0"/>
+              </a:tabLst>
+            </a:pPr>
+            <a:fld id="{8159DEFF-58D6-4E3F-AA0A-F94BE20541D7}" type="slidenum">
               <a:rPr lang="en-US" sz="1200" b="0" u="none" strike="noStrike">
                 <a:solidFill>
                   <a:schemeClr val="dk1">
@@ -2506,7 +4449,7 @@
 </p:sldLayout>
 </file>
 
-<file path=ppt/slideLayouts/slideLayout4.xml><?xml version="1.0" encoding="utf-8"?>
+<file path=ppt/slideLayouts/slideLayout7.xml><?xml version="1.0" encoding="utf-8"?>
 <p:sldLayout xmlns:a="http://schemas.openxmlformats.org/drawingml/2006/main" xmlns:p="http://schemas.openxmlformats.org/presentationml/2006/main" xmlns:r="http://schemas.openxmlformats.org/officeDocument/2006/relationships" xmlns:p14="http://schemas.microsoft.com/office/powerpoint/2010/main" xmlns:p15="http://schemas.microsoft.com/office/powerpoint/2012/main" xmlns:mc="http://schemas.openxmlformats.org/markup-compatibility/2006" type="obj" preserve="1">
   <p:cSld name="Title and Content">
     <p:bg>
@@ -2532,7 +4475,7 @@
       </p:grpSpPr>
       <p:sp>
         <p:nvSpPr>
-          <p:cNvPr id="16" name="PlaceHolder 1"/>
+          <p:cNvPr id="33" name="PlaceHolder 1"/>
           <p:cNvSpPr>
             <a:spLocks noGrp="1"/>
           </p:cNvSpPr>
@@ -2543,7 +4486,7 @@
         <p:spPr>
           <a:xfrm>
             <a:off x="457200" y="274680"/>
-            <a:ext cx="8229240" cy="1142640"/>
+            <a:ext cx="8228880" cy="1142280"/>
           </a:xfrm>
           <a:prstGeom prst="rect">
             <a:avLst/>
@@ -2563,6 +4506,9 @@
                 <a:spcPct val="100000"/>
               </a:lnSpc>
               <a:buNone/>
+              <a:tabLst>
+                <a:tab algn="l" pos="0"/>
+              </a:tabLst>
             </a:pPr>
             <a:r>
               <a:rPr lang="en-US" sz="4400" b="0" u="none" strike="noStrike">
@@ -2577,18 +4523,18 @@
             </a:r>
             <a:endParaRPr lang="en-US" sz="4400" b="0" u="none" strike="noStrike">
               <a:solidFill>
-                <a:schemeClr val="dk1"/>
-              </a:solidFill>
-              <a:effectLst/>
-              <a:uFillTx/>
-              <a:latin typeface="Calibri"/>
+                <a:srgbClr val="000000"/>
+              </a:solidFill>
+              <a:effectLst/>
+              <a:uFillTx/>
+              <a:latin typeface="Arial"/>
             </a:endParaRPr>
           </a:p>
         </p:txBody>
       </p:sp>
       <p:sp>
         <p:nvSpPr>
-          <p:cNvPr id="17" name="PlaceHolder 2"/>
+          <p:cNvPr id="34" name="PlaceHolder 2"/>
           <p:cNvSpPr>
             <a:spLocks noGrp="1"/>
           </p:cNvSpPr>
@@ -2599,7 +4545,7 @@
         <p:spPr>
           <a:xfrm>
             <a:off x="457200" y="1600200"/>
-            <a:ext cx="8229240" cy="4525560"/>
+            <a:ext cx="8228880" cy="4525200"/>
           </a:xfrm>
           <a:prstGeom prst="rect">
             <a:avLst/>
@@ -2640,11 +4586,11 @@
             </a:r>
             <a:endParaRPr lang="en-US" sz="3200" b="0" u="none" strike="noStrike">
               <a:solidFill>
-                <a:schemeClr val="dk1"/>
-              </a:solidFill>
-              <a:effectLst/>
-              <a:uFillTx/>
-              <a:latin typeface="Calibri"/>
+                <a:srgbClr val="000000"/>
+              </a:solidFill>
+              <a:effectLst/>
+              <a:uFillTx/>
+              <a:latin typeface="Arial"/>
             </a:endParaRPr>
           </a:p>
           <a:p>
@@ -2674,11 +4620,11 @@
             </a:r>
             <a:endParaRPr lang="en-US" sz="2800" b="0" u="none" strike="noStrike">
               <a:solidFill>
-                <a:schemeClr val="dk1"/>
-              </a:solidFill>
-              <a:effectLst/>
-              <a:uFillTx/>
-              <a:latin typeface="Calibri"/>
+                <a:srgbClr val="000000"/>
+              </a:solidFill>
+              <a:effectLst/>
+              <a:uFillTx/>
+              <a:latin typeface="Arial"/>
             </a:endParaRPr>
           </a:p>
           <a:p>
@@ -2708,11 +4654,11 @@
             </a:r>
             <a:endParaRPr lang="en-US" sz="2400" b="0" u="none" strike="noStrike">
               <a:solidFill>
-                <a:schemeClr val="dk1"/>
-              </a:solidFill>
-              <a:effectLst/>
-              <a:uFillTx/>
-              <a:latin typeface="Calibri"/>
+                <a:srgbClr val="000000"/>
+              </a:solidFill>
+              <a:effectLst/>
+              <a:uFillTx/>
+              <a:latin typeface="Arial"/>
             </a:endParaRPr>
           </a:p>
           <a:p>
@@ -2742,11 +4688,11 @@
             </a:r>
             <a:endParaRPr lang="en-US" sz="2000" b="0" u="none" strike="noStrike">
               <a:solidFill>
-                <a:schemeClr val="dk1"/>
-              </a:solidFill>
-              <a:effectLst/>
-              <a:uFillTx/>
-              <a:latin typeface="Calibri"/>
+                <a:srgbClr val="000000"/>
+              </a:solidFill>
+              <a:effectLst/>
+              <a:uFillTx/>
+              <a:latin typeface="Arial"/>
             </a:endParaRPr>
           </a:p>
           <a:p>
@@ -2776,29 +4722,29 @@
             </a:r>
             <a:endParaRPr lang="en-US" sz="2000" b="0" u="none" strike="noStrike">
               <a:solidFill>
-                <a:schemeClr val="dk1"/>
-              </a:solidFill>
-              <a:effectLst/>
-              <a:uFillTx/>
-              <a:latin typeface="Calibri"/>
+                <a:srgbClr val="000000"/>
+              </a:solidFill>
+              <a:effectLst/>
+              <a:uFillTx/>
+              <a:latin typeface="Arial"/>
             </a:endParaRPr>
           </a:p>
         </p:txBody>
       </p:sp>
       <p:sp>
         <p:nvSpPr>
-          <p:cNvPr id="18" name="PlaceHolder 3"/>
+          <p:cNvPr id="35" name="PlaceHolder 3"/>
           <p:cNvSpPr>
             <a:spLocks noGrp="1"/>
           </p:cNvSpPr>
           <p:nvPr>
-            <p:ph type="dt" idx="10"/>
+            <p:ph type="dt" idx="19"/>
           </p:nvPr>
         </p:nvSpPr>
         <p:spPr>
           <a:xfrm>
             <a:off x="457200" y="6356520"/>
-            <a:ext cx="2133360" cy="364680"/>
+            <a:ext cx="2133000" cy="364320"/>
           </a:xfrm>
           <a:prstGeom prst="rect">
             <a:avLst/>
@@ -2818,6 +4764,9 @@
                 <a:spcPct val="100000"/>
               </a:lnSpc>
               <a:buNone/>
+              <a:tabLst>
+                <a:tab algn="l" pos="0"/>
+              </a:tabLst>
               <a:defRPr lang="en-US" sz="1200" b="0" u="none" strike="noStrike">
                 <a:solidFill>
                   <a:schemeClr val="dk1">
@@ -2836,6 +4785,9 @@
                 <a:spcPct val="100000"/>
               </a:lnSpc>
               <a:buNone/>
+              <a:tabLst>
+                <a:tab algn="l" pos="0"/>
+              </a:tabLst>
             </a:pPr>
             <a:r>
               <a:rPr lang="en-US" sz="1200" b="0" u="none" strike="noStrike">
@@ -2863,18 +4815,18 @@
       </p:sp>
       <p:sp>
         <p:nvSpPr>
-          <p:cNvPr id="19" name="PlaceHolder 4"/>
+          <p:cNvPr id="36" name="PlaceHolder 4"/>
           <p:cNvSpPr>
             <a:spLocks noGrp="1"/>
           </p:cNvSpPr>
           <p:nvPr>
-            <p:ph type="ftr" idx="11"/>
+            <p:ph type="ftr" idx="20"/>
           </p:nvPr>
         </p:nvSpPr>
         <p:spPr>
           <a:xfrm>
             <a:off x="3124080" y="6356520"/>
-            <a:ext cx="2895120" cy="364680"/>
+            <a:ext cx="2894760" cy="364320"/>
           </a:xfrm>
           <a:prstGeom prst="rect">
             <a:avLst/>
@@ -2890,7 +4842,13 @@
           </a:bodyPr>
           <a:lstStyle>
             <a:lvl1pPr indent="0" algn="ctr">
+              <a:lnSpc>
+                <a:spcPct val="100000"/>
+              </a:lnSpc>
               <a:buNone/>
+              <a:tabLst>
+                <a:tab algn="l" pos="0"/>
+              </a:tabLst>
               <a:defRPr lang="en-US" sz="1400" b="0" u="none" strike="noStrike">
                 <a:solidFill>
                   <a:srgbClr val="000000"/>
@@ -2903,7 +4861,13 @@
           </a:lstStyle>
           <a:p>
             <a:pPr indent="0" algn="ctr">
+              <a:lnSpc>
+                <a:spcPct val="100000"/>
+              </a:lnSpc>
               <a:buNone/>
+              <a:tabLst>
+                <a:tab algn="l" pos="0"/>
+              </a:tabLst>
             </a:pPr>
             <a:r>
               <a:rPr lang="en-US" sz="1400" b="0" u="none" strike="noStrike">
@@ -2929,18 +4893,18 @@
       </p:sp>
       <p:sp>
         <p:nvSpPr>
-          <p:cNvPr id="20" name="PlaceHolder 5"/>
+          <p:cNvPr id="37" name="PlaceHolder 5"/>
           <p:cNvSpPr>
             <a:spLocks noGrp="1"/>
           </p:cNvSpPr>
           <p:nvPr>
-            <p:ph type="sldNum" idx="12"/>
+            <p:ph type="sldNum" idx="21"/>
           </p:nvPr>
         </p:nvSpPr>
         <p:spPr>
           <a:xfrm>
             <a:off x="6553080" y="6356520"/>
-            <a:ext cx="2133360" cy="364680"/>
+            <a:ext cx="2133000" cy="364320"/>
           </a:xfrm>
           <a:prstGeom prst="rect">
             <a:avLst/>
@@ -2960,6 +4924,9 @@
                 <a:spcPct val="100000"/>
               </a:lnSpc>
               <a:buNone/>
+              <a:tabLst>
+                <a:tab algn="l" pos="0"/>
+              </a:tabLst>
               <a:defRPr lang="en-US" sz="1200" b="0" u="none" strike="noStrike">
                 <a:solidFill>
                   <a:schemeClr val="dk1">
@@ -2978,8 +4945,11 @@
                 <a:spcPct val="100000"/>
               </a:lnSpc>
               <a:buNone/>
-            </a:pPr>
-            <a:fld id="{A339F444-BC42-45DD-B562-C046414297D1}" type="slidenum">
+              <a:tabLst>
+                <a:tab algn="l" pos="0"/>
+              </a:tabLst>
+            </a:pPr>
+            <a:fld id="{A52C5648-64E9-4AD5-9E55-44C6DD3A55CA}" type="slidenum">
               <a:rPr lang="en-US" sz="1200" b="0" u="none" strike="noStrike">
                 <a:solidFill>
                   <a:schemeClr val="dk1">
@@ -3008,7 +4978,7 @@
 </p:sldLayout>
 </file>
 
-<file path=ppt/slideLayouts/slideLayout5.xml><?xml version="1.0" encoding="utf-8"?>
+<file path=ppt/slideLayouts/slideLayout8.xml><?xml version="1.0" encoding="utf-8"?>
 <p:sldLayout xmlns:a="http://schemas.openxmlformats.org/drawingml/2006/main" xmlns:p="http://schemas.openxmlformats.org/presentationml/2006/main" xmlns:r="http://schemas.openxmlformats.org/officeDocument/2006/relationships" xmlns:p14="http://schemas.microsoft.com/office/powerpoint/2010/main" xmlns:p15="http://schemas.microsoft.com/office/powerpoint/2012/main" xmlns:mc="http://schemas.openxmlformats.org/markup-compatibility/2006" type="blank" preserve="1">
   <p:cSld name="Section Header">
     <p:bg>
@@ -3034,7 +5004,7 @@
       </p:grpSpPr>
       <p:sp>
         <p:nvSpPr>
-          <p:cNvPr id="21" name="PlaceHolder 1"/>
+          <p:cNvPr id="38" name="PlaceHolder 1"/>
           <p:cNvSpPr>
             <a:spLocks noGrp="1"/>
           </p:cNvSpPr>
@@ -3045,7 +5015,7 @@
         <p:spPr>
           <a:xfrm>
             <a:off x="722160" y="4406760"/>
-            <a:ext cx="7772040" cy="1361880"/>
+            <a:ext cx="7771680" cy="1361520"/>
           </a:xfrm>
           <a:prstGeom prst="rect">
             <a:avLst/>
@@ -3065,6 +5035,9 @@
                 <a:spcPct val="100000"/>
               </a:lnSpc>
               <a:buNone/>
+              <a:tabLst>
+                <a:tab algn="l" pos="0"/>
+              </a:tabLst>
             </a:pPr>
             <a:r>
               <a:rPr lang="en-US" sz="4000" b="1" u="none" strike="noStrike" cap="all">
@@ -3079,18 +5052,18 @@
             </a:r>
             <a:endParaRPr lang="en-US" sz="4000" b="0" u="none" strike="noStrike">
               <a:solidFill>
-                <a:schemeClr val="dk1"/>
-              </a:solidFill>
-              <a:effectLst/>
-              <a:uFillTx/>
-              <a:latin typeface="Calibri"/>
+                <a:srgbClr val="000000"/>
+              </a:solidFill>
+              <a:effectLst/>
+              <a:uFillTx/>
+              <a:latin typeface="Arial"/>
             </a:endParaRPr>
           </a:p>
         </p:txBody>
       </p:sp>
       <p:sp>
         <p:nvSpPr>
-          <p:cNvPr id="22" name="PlaceHolder 2"/>
+          <p:cNvPr id="39" name="PlaceHolder 2"/>
           <p:cNvSpPr>
             <a:spLocks noGrp="1"/>
           </p:cNvSpPr>
@@ -3101,7 +5074,7 @@
         <p:spPr>
           <a:xfrm>
             <a:off x="722160" y="2906640"/>
-            <a:ext cx="7772040" cy="1499760"/>
+            <a:ext cx="7771680" cy="1499400"/>
           </a:xfrm>
           <a:prstGeom prst="rect">
             <a:avLst/>
@@ -3143,29 +5116,29 @@
             </a:r>
             <a:endParaRPr lang="en-US" sz="2000" b="0" u="none" strike="noStrike">
               <a:solidFill>
-                <a:schemeClr val="dk1"/>
-              </a:solidFill>
-              <a:effectLst/>
-              <a:uFillTx/>
-              <a:latin typeface="Calibri"/>
+                <a:srgbClr val="000000"/>
+              </a:solidFill>
+              <a:effectLst/>
+              <a:uFillTx/>
+              <a:latin typeface="Arial"/>
             </a:endParaRPr>
           </a:p>
         </p:txBody>
       </p:sp>
       <p:sp>
         <p:nvSpPr>
-          <p:cNvPr id="23" name="PlaceHolder 3"/>
+          <p:cNvPr id="40" name="PlaceHolder 3"/>
           <p:cNvSpPr>
             <a:spLocks noGrp="1"/>
           </p:cNvSpPr>
           <p:nvPr>
-            <p:ph type="dt" idx="13"/>
+            <p:ph type="dt" idx="22"/>
           </p:nvPr>
         </p:nvSpPr>
         <p:spPr>
           <a:xfrm>
             <a:off x="457200" y="6356520"/>
-            <a:ext cx="2133360" cy="364680"/>
+            <a:ext cx="2133000" cy="364320"/>
           </a:xfrm>
           <a:prstGeom prst="rect">
             <a:avLst/>
@@ -3185,6 +5158,9 @@
                 <a:spcPct val="100000"/>
               </a:lnSpc>
               <a:buNone/>
+              <a:tabLst>
+                <a:tab algn="l" pos="0"/>
+              </a:tabLst>
               <a:defRPr lang="en-US" sz="1200" b="0" u="none" strike="noStrike">
                 <a:solidFill>
                   <a:schemeClr val="dk1">
@@ -3203,6 +5179,9 @@
                 <a:spcPct val="100000"/>
               </a:lnSpc>
               <a:buNone/>
+              <a:tabLst>
+                <a:tab algn="l" pos="0"/>
+              </a:tabLst>
             </a:pPr>
             <a:r>
               <a:rPr lang="en-US" sz="1200" b="0" u="none" strike="noStrike">
@@ -3230,18 +5209,18 @@
       </p:sp>
       <p:sp>
         <p:nvSpPr>
-          <p:cNvPr id="24" name="PlaceHolder 4"/>
+          <p:cNvPr id="41" name="PlaceHolder 4"/>
           <p:cNvSpPr>
             <a:spLocks noGrp="1"/>
           </p:cNvSpPr>
           <p:nvPr>
-            <p:ph type="ftr" idx="14"/>
+            <p:ph type="ftr" idx="23"/>
           </p:nvPr>
         </p:nvSpPr>
         <p:spPr>
           <a:xfrm>
             <a:off x="3124080" y="6356520"/>
-            <a:ext cx="2895120" cy="364680"/>
+            <a:ext cx="2894760" cy="364320"/>
           </a:xfrm>
           <a:prstGeom prst="rect">
             <a:avLst/>
@@ -3257,7 +5236,13 @@
           </a:bodyPr>
           <a:lstStyle>
             <a:lvl1pPr indent="0" algn="ctr">
+              <a:lnSpc>
+                <a:spcPct val="100000"/>
+              </a:lnSpc>
               <a:buNone/>
+              <a:tabLst>
+                <a:tab algn="l" pos="0"/>
+              </a:tabLst>
               <a:defRPr lang="en-US" sz="1400" b="0" u="none" strike="noStrike">
                 <a:solidFill>
                   <a:srgbClr val="000000"/>
@@ -3270,7 +5255,13 @@
           </a:lstStyle>
           <a:p>
             <a:pPr indent="0" algn="ctr">
+              <a:lnSpc>
+                <a:spcPct val="100000"/>
+              </a:lnSpc>
               <a:buNone/>
+              <a:tabLst>
+                <a:tab algn="l" pos="0"/>
+              </a:tabLst>
             </a:pPr>
             <a:r>
               <a:rPr lang="en-US" sz="1400" b="0" u="none" strike="noStrike">
@@ -3296,18 +5287,18 @@
       </p:sp>
       <p:sp>
         <p:nvSpPr>
-          <p:cNvPr id="25" name="PlaceHolder 5"/>
+          <p:cNvPr id="42" name="PlaceHolder 5"/>
           <p:cNvSpPr>
             <a:spLocks noGrp="1"/>
           </p:cNvSpPr>
           <p:nvPr>
-            <p:ph type="sldNum" idx="15"/>
+            <p:ph type="sldNum" idx="24"/>
           </p:nvPr>
         </p:nvSpPr>
         <p:spPr>
           <a:xfrm>
             <a:off x="6553080" y="6356520"/>
-            <a:ext cx="2133360" cy="364680"/>
+            <a:ext cx="2133000" cy="364320"/>
           </a:xfrm>
           <a:prstGeom prst="rect">
             <a:avLst/>
@@ -3327,6 +5318,9 @@
                 <a:spcPct val="100000"/>
               </a:lnSpc>
               <a:buNone/>
+              <a:tabLst>
+                <a:tab algn="l" pos="0"/>
+              </a:tabLst>
               <a:defRPr lang="en-US" sz="1200" b="0" u="none" strike="noStrike">
                 <a:solidFill>
                   <a:schemeClr val="dk1">
@@ -3345,8 +5339,11 @@
                 <a:spcPct val="100000"/>
               </a:lnSpc>
               <a:buNone/>
-            </a:pPr>
-            <a:fld id="{7E22AF83-30AA-46A7-BEAD-EAFC162D270A}" type="slidenum">
+              <a:tabLst>
+                <a:tab algn="l" pos="0"/>
+              </a:tabLst>
+            </a:pPr>
+            <a:fld id="{61C09CD7-47D2-4669-B901-9514FEA63317}" type="slidenum">
               <a:rPr lang="en-US" sz="1200" b="0" u="none" strike="noStrike">
                 <a:solidFill>
                   <a:schemeClr val="dk1">
@@ -3375,7 +5372,7 @@
 </p:sldLayout>
 </file>
 
-<file path=ppt/slideLayouts/slideLayout6.xml><?xml version="1.0" encoding="utf-8"?>
+<file path=ppt/slideLayouts/slideLayout9.xml><?xml version="1.0" encoding="utf-8"?>
 <p:sldLayout xmlns:a="http://schemas.openxmlformats.org/drawingml/2006/main" xmlns:p="http://schemas.openxmlformats.org/presentationml/2006/main" xmlns:r="http://schemas.openxmlformats.org/officeDocument/2006/relationships" xmlns:p14="http://schemas.microsoft.com/office/powerpoint/2010/main" xmlns:p15="http://schemas.microsoft.com/office/powerpoint/2012/main" xmlns:mc="http://schemas.openxmlformats.org/markup-compatibility/2006" type="twoObj" preserve="1">
   <p:cSld name="Two Content">
     <p:bg>
@@ -3401,7 +5398,7 @@
       </p:grpSpPr>
       <p:sp>
         <p:nvSpPr>
-          <p:cNvPr id="26" name="PlaceHolder 1"/>
+          <p:cNvPr id="43" name="PlaceHolder 1"/>
           <p:cNvSpPr>
             <a:spLocks noGrp="1"/>
           </p:cNvSpPr>
@@ -3412,7 +5409,7 @@
         <p:spPr>
           <a:xfrm>
             <a:off x="457200" y="274680"/>
-            <a:ext cx="8229240" cy="1142640"/>
+            <a:ext cx="8228880" cy="1142280"/>
           </a:xfrm>
           <a:prstGeom prst="rect">
             <a:avLst/>
@@ -3432,6 +5429,9 @@
                 <a:spcPct val="100000"/>
               </a:lnSpc>
               <a:buNone/>
+              <a:tabLst>
+                <a:tab algn="l" pos="0"/>
+              </a:tabLst>
             </a:pPr>
             <a:r>
               <a:rPr lang="en-US" sz="4400" b="0" u="none" strike="noStrike">
@@ -3446,18 +5446,18 @@
             </a:r>
             <a:endParaRPr lang="en-US" sz="4400" b="0" u="none" strike="noStrike">
               <a:solidFill>
-                <a:schemeClr val="dk1"/>
-              </a:solidFill>
-              <a:effectLst/>
-              <a:uFillTx/>
-              <a:latin typeface="Calibri"/>
+                <a:srgbClr val="000000"/>
+              </a:solidFill>
+              <a:effectLst/>
+              <a:uFillTx/>
+              <a:latin typeface="Arial"/>
             </a:endParaRPr>
           </a:p>
         </p:txBody>
       </p:sp>
       <p:sp>
         <p:nvSpPr>
-          <p:cNvPr id="27" name="PlaceHolder 2"/>
+          <p:cNvPr id="44" name="PlaceHolder 2"/>
           <p:cNvSpPr>
             <a:spLocks noGrp="1"/>
           </p:cNvSpPr>
@@ -3468,7 +5468,7 @@
         <p:spPr>
           <a:xfrm>
             <a:off x="457200" y="1600200"/>
-            <a:ext cx="4038120" cy="4525560"/>
+            <a:ext cx="4037760" cy="4525200"/>
           </a:xfrm>
           <a:prstGeom prst="rect">
             <a:avLst/>
@@ -3509,11 +5509,11 @@
             </a:r>
             <a:endParaRPr lang="en-US" sz="2800" b="0" u="none" strike="noStrike">
               <a:solidFill>
-                <a:schemeClr val="dk1"/>
-              </a:solidFill>
-              <a:effectLst/>
-              <a:uFillTx/>
-              <a:latin typeface="Calibri"/>
+                <a:srgbClr val="000000"/>
+              </a:solidFill>
+              <a:effectLst/>
+              <a:uFillTx/>
+              <a:latin typeface="Arial"/>
             </a:endParaRPr>
           </a:p>
           <a:p>
@@ -3543,11 +5543,11 @@
             </a:r>
             <a:endParaRPr lang="en-US" sz="2400" b="0" u="none" strike="noStrike">
               <a:solidFill>
-                <a:schemeClr val="dk1"/>
-              </a:solidFill>
-              <a:effectLst/>
-              <a:uFillTx/>
-              <a:latin typeface="Calibri"/>
+                <a:srgbClr val="000000"/>
+              </a:solidFill>
+              <a:effectLst/>
+              <a:uFillTx/>
+              <a:latin typeface="Arial"/>
             </a:endParaRPr>
           </a:p>
           <a:p>
@@ -3577,11 +5577,11 @@
             </a:r>
             <a:endParaRPr lang="en-US" sz="2000" b="0" u="none" strike="noStrike">
               <a:solidFill>
-                <a:schemeClr val="dk1"/>
-              </a:solidFill>
-              <a:effectLst/>
-              <a:uFillTx/>
-              <a:latin typeface="Calibri"/>
+                <a:srgbClr val="000000"/>
+              </a:solidFill>
+              <a:effectLst/>
+              <a:uFillTx/>
+              <a:latin typeface="Arial"/>
             </a:endParaRPr>
           </a:p>
           <a:p>
@@ -3611,11 +5611,11 @@
             </a:r>
             <a:endParaRPr lang="en-US" sz="1800" b="0" u="none" strike="noStrike">
               <a:solidFill>
-                <a:schemeClr val="dk1"/>
-              </a:solidFill>
-              <a:effectLst/>
-              <a:uFillTx/>
-              <a:latin typeface="Calibri"/>
+                <a:srgbClr val="000000"/>
+              </a:solidFill>
+              <a:effectLst/>
+              <a:uFillTx/>
+              <a:latin typeface="Arial"/>
             </a:endParaRPr>
           </a:p>
           <a:p>
@@ -3645,18 +5645,18 @@
             </a:r>
             <a:endParaRPr lang="en-US" sz="1800" b="0" u="none" strike="noStrike">
               <a:solidFill>
-                <a:schemeClr val="dk1"/>
-              </a:solidFill>
-              <a:effectLst/>
-              <a:uFillTx/>
-              <a:latin typeface="Calibri"/>
+                <a:srgbClr val="000000"/>
+              </a:solidFill>
+              <a:effectLst/>
+              <a:uFillTx/>
+              <a:latin typeface="Arial"/>
             </a:endParaRPr>
           </a:p>
         </p:txBody>
       </p:sp>
       <p:sp>
         <p:nvSpPr>
-          <p:cNvPr id="28" name="PlaceHolder 3"/>
+          <p:cNvPr id="45" name="PlaceHolder 3"/>
           <p:cNvSpPr>
             <a:spLocks noGrp="1"/>
           </p:cNvSpPr>
@@ -3667,7 +5667,7 @@
         <p:spPr>
           <a:xfrm>
             <a:off x="4648320" y="1600200"/>
-            <a:ext cx="4038120" cy="4525560"/>
+            <a:ext cx="4037760" cy="4525200"/>
           </a:xfrm>
           <a:prstGeom prst="rect">
             <a:avLst/>
@@ -3708,11 +5708,11 @@
             </a:r>
             <a:endParaRPr lang="en-US" sz="2800" b="0" u="none" strike="noStrike">
               <a:solidFill>
-                <a:schemeClr val="dk1"/>
-              </a:solidFill>
-              <a:effectLst/>
-              <a:uFillTx/>
-              <a:latin typeface="Calibri"/>
+                <a:srgbClr val="000000"/>
+              </a:solidFill>
+              <a:effectLst/>
+              <a:uFillTx/>
+              <a:latin typeface="Arial"/>
             </a:endParaRPr>
           </a:p>
           <a:p>
@@ -3742,11 +5742,11 @@
             </a:r>
             <a:endParaRPr lang="en-US" sz="2400" b="0" u="none" strike="noStrike">
               <a:solidFill>
-                <a:schemeClr val="dk1"/>
-              </a:solidFill>
-              <a:effectLst/>
-              <a:uFillTx/>
-              <a:latin typeface="Calibri"/>
+                <a:srgbClr val="000000"/>
+              </a:solidFill>
+              <a:effectLst/>
+              <a:uFillTx/>
+              <a:latin typeface="Arial"/>
             </a:endParaRPr>
           </a:p>
           <a:p>
@@ -3776,11 +5776,11 @@
             </a:r>
             <a:endParaRPr lang="en-US" sz="2000" b="0" u="none" strike="noStrike">
               <a:solidFill>
-                <a:schemeClr val="dk1"/>
-              </a:solidFill>
-              <a:effectLst/>
-              <a:uFillTx/>
-              <a:latin typeface="Calibri"/>
+                <a:srgbClr val="000000"/>
+              </a:solidFill>
+              <a:effectLst/>
+              <a:uFillTx/>
+              <a:latin typeface="Arial"/>
             </a:endParaRPr>
           </a:p>
           <a:p>
@@ -3810,11 +5810,11 @@
             </a:r>
             <a:endParaRPr lang="en-US" sz="1800" b="0" u="none" strike="noStrike">
               <a:solidFill>
-                <a:schemeClr val="dk1"/>
-              </a:solidFill>
-              <a:effectLst/>
-              <a:uFillTx/>
-              <a:latin typeface="Calibri"/>
+                <a:srgbClr val="000000"/>
+              </a:solidFill>
+              <a:effectLst/>
+              <a:uFillTx/>
+              <a:latin typeface="Arial"/>
             </a:endParaRPr>
           </a:p>
           <a:p>
@@ -3844,29 +5844,29 @@
             </a:r>
             <a:endParaRPr lang="en-US" sz="1800" b="0" u="none" strike="noStrike">
               <a:solidFill>
-                <a:schemeClr val="dk1"/>
-              </a:solidFill>
-              <a:effectLst/>
-              <a:uFillTx/>
-              <a:latin typeface="Calibri"/>
+                <a:srgbClr val="000000"/>
+              </a:solidFill>
+              <a:effectLst/>
+              <a:uFillTx/>
+              <a:latin typeface="Arial"/>
             </a:endParaRPr>
           </a:p>
         </p:txBody>
       </p:sp>
       <p:sp>
         <p:nvSpPr>
-          <p:cNvPr id="29" name="PlaceHolder 4"/>
+          <p:cNvPr id="46" name="PlaceHolder 4"/>
           <p:cNvSpPr>
             <a:spLocks noGrp="1"/>
           </p:cNvSpPr>
           <p:nvPr>
-            <p:ph type="dt" idx="16"/>
+            <p:ph type="dt" idx="25"/>
           </p:nvPr>
         </p:nvSpPr>
         <p:spPr>
           <a:xfrm>
             <a:off x="457200" y="6356520"/>
-            <a:ext cx="2133360" cy="364680"/>
+            <a:ext cx="2133000" cy="364320"/>
           </a:xfrm>
           <a:prstGeom prst="rect">
             <a:avLst/>
@@ -3886,6 +5886,9 @@
                 <a:spcPct val="100000"/>
               </a:lnSpc>
               <a:buNone/>
+              <a:tabLst>
+                <a:tab algn="l" pos="0"/>
+              </a:tabLst>
               <a:defRPr lang="en-US" sz="1200" b="0" u="none" strike="noStrike">
                 <a:solidFill>
                   <a:schemeClr val="dk1">
@@ -3904,6 +5907,9 @@
                 <a:spcPct val="100000"/>
               </a:lnSpc>
               <a:buNone/>
+              <a:tabLst>
+                <a:tab algn="l" pos="0"/>
+              </a:tabLst>
             </a:pPr>
             <a:r>
               <a:rPr lang="en-US" sz="1200" b="0" u="none" strike="noStrike">
@@ -3931,18 +5937,18 @@
       </p:sp>
       <p:sp>
         <p:nvSpPr>
-          <p:cNvPr id="30" name="PlaceHolder 5"/>
+          <p:cNvPr id="47" name="PlaceHolder 5"/>
           <p:cNvSpPr>
             <a:spLocks noGrp="1"/>
           </p:cNvSpPr>
           <p:nvPr>
-            <p:ph type="ftr" idx="17"/>
+            <p:ph type="ftr" idx="26"/>
           </p:nvPr>
         </p:nvSpPr>
         <p:spPr>
           <a:xfrm>
             <a:off x="3124080" y="6356520"/>
-            <a:ext cx="2895120" cy="364680"/>
+            <a:ext cx="2894760" cy="364320"/>
           </a:xfrm>
           <a:prstGeom prst="rect">
             <a:avLst/>
@@ -3958,7 +5964,13 @@
           </a:bodyPr>
           <a:lstStyle>
             <a:lvl1pPr indent="0" algn="ctr">
+              <a:lnSpc>
+                <a:spcPct val="100000"/>
+              </a:lnSpc>
               <a:buNone/>
+              <a:tabLst>
+                <a:tab algn="l" pos="0"/>
+              </a:tabLst>
               <a:defRPr lang="en-US" sz="1400" b="0" u="none" strike="noStrike">
                 <a:solidFill>
                   <a:srgbClr val="000000"/>
@@ -3971,7 +5983,13 @@
           </a:lstStyle>
           <a:p>
             <a:pPr indent="0" algn="ctr">
+              <a:lnSpc>
+                <a:spcPct val="100000"/>
+              </a:lnSpc>
               <a:buNone/>
+              <a:tabLst>
+                <a:tab algn="l" pos="0"/>
+              </a:tabLst>
             </a:pPr>
             <a:r>
               <a:rPr lang="en-US" sz="1400" b="0" u="none" strike="noStrike">
@@ -3997,18 +6015,18 @@
       </p:sp>
       <p:sp>
         <p:nvSpPr>
-          <p:cNvPr id="31" name="PlaceHolder 6"/>
+          <p:cNvPr id="48" name="PlaceHolder 6"/>
           <p:cNvSpPr>
             <a:spLocks noGrp="1"/>
           </p:cNvSpPr>
           <p:nvPr>
-            <p:ph type="sldNum" idx="18"/>
+            <p:ph type="sldNum" idx="27"/>
           </p:nvPr>
         </p:nvSpPr>
         <p:spPr>
           <a:xfrm>
             <a:off x="6553080" y="6356520"/>
-            <a:ext cx="2133360" cy="364680"/>
+            <a:ext cx="2133000" cy="364320"/>
           </a:xfrm>
           <a:prstGeom prst="rect">
             <a:avLst/>
@@ -4028,6 +6046,9 @@
                 <a:spcPct val="100000"/>
               </a:lnSpc>
               <a:buNone/>
+              <a:tabLst>
+                <a:tab algn="l" pos="0"/>
+              </a:tabLst>
               <a:defRPr lang="en-US" sz="1200" b="0" u="none" strike="noStrike">
                 <a:solidFill>
                   <a:schemeClr val="dk1">
@@ -4045,673 +6066,13 @@
               <a:lnSpc>
                 <a:spcPct val="100000"/>
               </a:lnSpc>
-              <a:buNone/>
-            </a:pPr>
-            <a:fld id="{80864F2B-6337-4029-9CA2-9D4AD94885F0}" type="slidenum">
-              <a:rPr lang="en-US" sz="1200" b="0" u="none" strike="noStrike">
-                <a:solidFill>
-                  <a:schemeClr val="dk1">
-                    <a:tint val="75000"/>
-                  </a:schemeClr>
-                </a:solidFill>
-                <a:effectLst/>
-                <a:uFillTx/>
-                <a:latin typeface="Calibri"/>
-              </a:rPr>
-              <a:t>&lt;number&gt;</a:t>
-            </a:fld>
-            <a:endParaRPr lang="en-US" sz="1200" b="0" u="none" strike="noStrike">
-              <a:solidFill>
-                <a:srgbClr val="000000"/>
-              </a:solidFill>
-              <a:effectLst/>
-              <a:uFillTx/>
-              <a:latin typeface="Times New Roman"/>
-            </a:endParaRPr>
-          </a:p>
-        </p:txBody>
-      </p:sp>
-    </p:spTree>
-  </p:cSld>
-</p:sldLayout>
-</file>
-
-<file path=ppt/slideLayouts/slideLayout7.xml><?xml version="1.0" encoding="utf-8"?>
-<p:sldLayout xmlns:a="http://schemas.openxmlformats.org/drawingml/2006/main" xmlns:p="http://schemas.openxmlformats.org/presentationml/2006/main" xmlns:r="http://schemas.openxmlformats.org/officeDocument/2006/relationships" xmlns:p14="http://schemas.microsoft.com/office/powerpoint/2010/main" xmlns:p15="http://schemas.microsoft.com/office/powerpoint/2012/main" xmlns:mc="http://schemas.openxmlformats.org/markup-compatibility/2006" type="blank" preserve="1">
-  <p:cSld name="Comparison">
-    <p:bg>
-      <p:bgPr>
-        <a:solidFill>
-          <a:srgbClr val="ffffff"/>
-        </a:solidFill>
-      </p:bgPr>
-    </p:bg>
-    <p:spTree>
-      <p:nvGrpSpPr>
-        <p:cNvPr id="1" name=""/>
-        <p:cNvGrpSpPr/>
-        <p:nvPr/>
-      </p:nvGrpSpPr>
-      <p:grpSpPr>
-        <a:xfrm>
-          <a:off x="0" y="0"/>
-          <a:ext cx="0" cy="0"/>
-          <a:chOff x="0" y="0"/>
-          <a:chExt cx="0" cy="0"/>
-        </a:xfrm>
-      </p:grpSpPr>
-      <p:sp>
-        <p:nvSpPr>
-          <p:cNvPr id="32" name="PlaceHolder 1"/>
-          <p:cNvSpPr>
-            <a:spLocks noGrp="1"/>
-          </p:cNvSpPr>
-          <p:nvPr>
-            <p:ph type="title"/>
-          </p:nvPr>
-        </p:nvSpPr>
-        <p:spPr>
-          <a:xfrm>
-            <a:off x="457200" y="274680"/>
-            <a:ext cx="8229240" cy="1142640"/>
-          </a:xfrm>
-          <a:prstGeom prst="rect">
-            <a:avLst/>
-          </a:prstGeom>
-          <a:noFill/>
-          <a:ln w="0">
-            <a:noFill/>
-          </a:ln>
-        </p:spPr>
-        <p:txBody>
-          <a:bodyPr lIns="91440" rIns="91440" tIns="45720" bIns="45720" anchor="ctr">
-            <a:noAutofit/>
-          </a:bodyPr>
-          <a:p>
-            <a:pPr indent="0" algn="ctr" defTabSz="457200">
-              <a:lnSpc>
-                <a:spcPct val="100000"/>
-              </a:lnSpc>
-              <a:buNone/>
-            </a:pPr>
-            <a:r>
-              <a:rPr lang="en-US" sz="4400" b="0" u="none" strike="noStrike">
-                <a:solidFill>
-                  <a:schemeClr val="dk1"/>
-                </a:solidFill>
-                <a:effectLst/>
-                <a:uFillTx/>
-                <a:latin typeface="Calibri"/>
-              </a:rPr>
-              <a:t>Click to edit Master title style</a:t>
-            </a:r>
-            <a:endParaRPr lang="en-US" sz="4400" b="0" u="none" strike="noStrike">
-              <a:solidFill>
-                <a:schemeClr val="dk1"/>
-              </a:solidFill>
-              <a:effectLst/>
-              <a:uFillTx/>
-              <a:latin typeface="Calibri"/>
-            </a:endParaRPr>
-          </a:p>
-        </p:txBody>
-      </p:sp>
-      <p:sp>
-        <p:nvSpPr>
-          <p:cNvPr id="33" name="PlaceHolder 2"/>
-          <p:cNvSpPr>
-            <a:spLocks noGrp="1"/>
-          </p:cNvSpPr>
-          <p:nvPr>
-            <p:ph type="body"/>
-          </p:nvPr>
-        </p:nvSpPr>
-        <p:spPr>
-          <a:xfrm>
-            <a:off x="457200" y="1535040"/>
-            <a:ext cx="4039920" cy="639360"/>
-          </a:xfrm>
-          <a:prstGeom prst="rect">
-            <a:avLst/>
-          </a:prstGeom>
-          <a:noFill/>
-          <a:ln w="0">
-            <a:noFill/>
-          </a:ln>
-        </p:spPr>
-        <p:txBody>
-          <a:bodyPr lIns="91440" rIns="91440" tIns="45720" bIns="45720" anchor="b">
-            <a:noAutofit/>
-          </a:bodyPr>
-          <a:p>
-            <a:pPr indent="0" defTabSz="457200">
-              <a:lnSpc>
-                <a:spcPct val="100000"/>
-              </a:lnSpc>
-              <a:spcBef>
-                <a:spcPts val="479"/>
-              </a:spcBef>
               <a:buNone/>
               <a:tabLst>
                 <a:tab algn="l" pos="0"/>
               </a:tabLst>
             </a:pPr>
-            <a:r>
-              <a:rPr lang="en-US" sz="2400" b="1" u="none" strike="noStrike">
-                <a:solidFill>
-                  <a:schemeClr val="dk1"/>
-                </a:solidFill>
-                <a:effectLst/>
-                <a:uFillTx/>
-                <a:latin typeface="Calibri"/>
-              </a:rPr>
-              <a:t>Click to edit Master text styles</a:t>
-            </a:r>
-            <a:endParaRPr lang="en-US" sz="2400" b="0" u="none" strike="noStrike">
-              <a:solidFill>
-                <a:schemeClr val="dk1"/>
-              </a:solidFill>
-              <a:effectLst/>
-              <a:uFillTx/>
-              <a:latin typeface="Calibri"/>
-            </a:endParaRPr>
-          </a:p>
-        </p:txBody>
-      </p:sp>
-      <p:sp>
-        <p:nvSpPr>
-          <p:cNvPr id="34" name="PlaceHolder 3"/>
-          <p:cNvSpPr>
-            <a:spLocks noGrp="1"/>
-          </p:cNvSpPr>
-          <p:nvPr>
-            <p:ph type="body"/>
-          </p:nvPr>
-        </p:nvSpPr>
-        <p:spPr>
-          <a:xfrm>
-            <a:off x="457200" y="2174760"/>
-            <a:ext cx="4039920" cy="3951000"/>
-          </a:xfrm>
-          <a:prstGeom prst="rect">
-            <a:avLst/>
-          </a:prstGeom>
-          <a:noFill/>
-          <a:ln w="0">
-            <a:noFill/>
-          </a:ln>
-        </p:spPr>
-        <p:txBody>
-          <a:bodyPr lIns="91440" rIns="91440" tIns="45720" bIns="45720" anchor="t">
-            <a:noAutofit/>
-          </a:bodyPr>
-          <a:p>
-            <a:pPr marL="343080" indent="-343080" defTabSz="457200">
-              <a:lnSpc>
-                <a:spcPct val="100000"/>
-              </a:lnSpc>
-              <a:spcBef>
-                <a:spcPts val="479"/>
-              </a:spcBef>
-              <a:buClr>
-                <a:srgbClr val="000000"/>
-              </a:buClr>
-              <a:buFont typeface="Arial"/>
-              <a:buChar char="•"/>
-            </a:pPr>
-            <a:r>
-              <a:rPr lang="en-US" sz="2400" b="0" u="none" strike="noStrike">
-                <a:solidFill>
-                  <a:schemeClr val="dk1"/>
-                </a:solidFill>
-                <a:effectLst/>
-                <a:uFillTx/>
-                <a:latin typeface="Calibri"/>
-              </a:rPr>
-              <a:t>Click to edit Master text styles</a:t>
-            </a:r>
-            <a:endParaRPr lang="en-US" sz="2400" b="0" u="none" strike="noStrike">
-              <a:solidFill>
-                <a:schemeClr val="dk1"/>
-              </a:solidFill>
-              <a:effectLst/>
-              <a:uFillTx/>
-              <a:latin typeface="Calibri"/>
-            </a:endParaRPr>
-          </a:p>
-          <a:p>
-            <a:pPr marL="743040" lvl="1" indent="-285840" defTabSz="457200">
-              <a:lnSpc>
-                <a:spcPct val="100000"/>
-              </a:lnSpc>
-              <a:spcBef>
-                <a:spcPts val="400"/>
-              </a:spcBef>
-              <a:buClr>
-                <a:srgbClr val="000000"/>
-              </a:buClr>
-              <a:buFont typeface="Arial"/>
-              <a:buChar char="–"/>
-            </a:pPr>
-            <a:r>
-              <a:rPr lang="en-US" sz="2000" b="0" u="none" strike="noStrike">
-                <a:solidFill>
-                  <a:schemeClr val="dk1"/>
-                </a:solidFill>
-                <a:effectLst/>
-                <a:uFillTx/>
-                <a:latin typeface="Calibri"/>
-              </a:rPr>
-              <a:t>Second level</a:t>
-            </a:r>
-            <a:endParaRPr lang="en-US" sz="2000" b="0" u="none" strike="noStrike">
-              <a:solidFill>
-                <a:schemeClr val="dk1"/>
-              </a:solidFill>
-              <a:effectLst/>
-              <a:uFillTx/>
-              <a:latin typeface="Calibri"/>
-            </a:endParaRPr>
-          </a:p>
-          <a:p>
-            <a:pPr marL="1143000" lvl="2" indent="-228600" defTabSz="457200">
-              <a:lnSpc>
-                <a:spcPct val="100000"/>
-              </a:lnSpc>
-              <a:spcBef>
-                <a:spcPts val="360"/>
-              </a:spcBef>
-              <a:buClr>
-                <a:srgbClr val="000000"/>
-              </a:buClr>
-              <a:buFont typeface="Arial"/>
-              <a:buChar char="•"/>
-            </a:pPr>
-            <a:r>
-              <a:rPr lang="en-US" sz="1800" b="0" u="none" strike="noStrike">
-                <a:solidFill>
-                  <a:schemeClr val="dk1"/>
-                </a:solidFill>
-                <a:effectLst/>
-                <a:uFillTx/>
-                <a:latin typeface="Calibri"/>
-              </a:rPr>
-              <a:t>Third level</a:t>
-            </a:r>
-            <a:endParaRPr lang="en-US" sz="1800" b="0" u="none" strike="noStrike">
-              <a:solidFill>
-                <a:schemeClr val="dk1"/>
-              </a:solidFill>
-              <a:effectLst/>
-              <a:uFillTx/>
-              <a:latin typeface="Calibri"/>
-            </a:endParaRPr>
-          </a:p>
-          <a:p>
-            <a:pPr marL="1600200" lvl="3" indent="-228600" defTabSz="457200">
-              <a:lnSpc>
-                <a:spcPct val="100000"/>
-              </a:lnSpc>
-              <a:spcBef>
-                <a:spcPts val="320"/>
-              </a:spcBef>
-              <a:buClr>
-                <a:srgbClr val="000000"/>
-              </a:buClr>
-              <a:buFont typeface="Arial"/>
-              <a:buChar char="–"/>
-            </a:pPr>
-            <a:r>
-              <a:rPr lang="en-US" sz="1600" b="0" u="none" strike="noStrike">
-                <a:solidFill>
-                  <a:schemeClr val="dk1"/>
-                </a:solidFill>
-                <a:effectLst/>
-                <a:uFillTx/>
-                <a:latin typeface="Calibri"/>
-              </a:rPr>
-              <a:t>Fourth level</a:t>
-            </a:r>
-            <a:endParaRPr lang="en-US" sz="1600" b="0" u="none" strike="noStrike">
-              <a:solidFill>
-                <a:schemeClr val="dk1"/>
-              </a:solidFill>
-              <a:effectLst/>
-              <a:uFillTx/>
-              <a:latin typeface="Calibri"/>
-            </a:endParaRPr>
-          </a:p>
-          <a:p>
-            <a:pPr marL="2057400" lvl="4" indent="-228600" defTabSz="457200">
-              <a:lnSpc>
-                <a:spcPct val="100000"/>
-              </a:lnSpc>
-              <a:spcBef>
-                <a:spcPts val="320"/>
-              </a:spcBef>
-              <a:buClr>
-                <a:srgbClr val="000000"/>
-              </a:buClr>
-              <a:buFont typeface="Arial"/>
-              <a:buChar char="»"/>
-            </a:pPr>
-            <a:r>
-              <a:rPr lang="en-US" sz="1600" b="0" u="none" strike="noStrike">
-                <a:solidFill>
-                  <a:schemeClr val="dk1"/>
-                </a:solidFill>
-                <a:effectLst/>
-                <a:uFillTx/>
-                <a:latin typeface="Calibri"/>
-              </a:rPr>
-              <a:t>Fifth level</a:t>
-            </a:r>
-            <a:endParaRPr lang="en-US" sz="1600" b="0" u="none" strike="noStrike">
-              <a:solidFill>
-                <a:schemeClr val="dk1"/>
-              </a:solidFill>
-              <a:effectLst/>
-              <a:uFillTx/>
-              <a:latin typeface="Calibri"/>
-            </a:endParaRPr>
-          </a:p>
-        </p:txBody>
-      </p:sp>
-      <p:sp>
-        <p:nvSpPr>
-          <p:cNvPr id="35" name="PlaceHolder 4"/>
-          <p:cNvSpPr>
-            <a:spLocks noGrp="1"/>
-          </p:cNvSpPr>
-          <p:nvPr>
-            <p:ph type="body"/>
-          </p:nvPr>
-        </p:nvSpPr>
-        <p:spPr>
-          <a:xfrm>
-            <a:off x="4645080" y="1535040"/>
-            <a:ext cx="4041360" cy="639360"/>
-          </a:xfrm>
-          <a:prstGeom prst="rect">
-            <a:avLst/>
-          </a:prstGeom>
-          <a:noFill/>
-          <a:ln w="0">
-            <a:noFill/>
-          </a:ln>
-        </p:spPr>
-        <p:txBody>
-          <a:bodyPr lIns="91440" rIns="91440" tIns="45720" bIns="45720" anchor="b">
-            <a:noAutofit/>
-          </a:bodyPr>
-          <a:p>
-            <a:pPr indent="0" defTabSz="457200">
-              <a:lnSpc>
-                <a:spcPct val="100000"/>
-              </a:lnSpc>
-              <a:spcBef>
-                <a:spcPts val="479"/>
-              </a:spcBef>
-              <a:buNone/>
-              <a:tabLst>
-                <a:tab algn="l" pos="0"/>
-              </a:tabLst>
-            </a:pPr>
-            <a:r>
-              <a:rPr lang="en-US" sz="2400" b="1" u="none" strike="noStrike">
-                <a:solidFill>
-                  <a:schemeClr val="dk1"/>
-                </a:solidFill>
-                <a:effectLst/>
-                <a:uFillTx/>
-                <a:latin typeface="Calibri"/>
-              </a:rPr>
-              <a:t>Click to edit Master text styles</a:t>
-            </a:r>
-            <a:endParaRPr lang="en-US" sz="2400" b="0" u="none" strike="noStrike">
-              <a:solidFill>
-                <a:schemeClr val="dk1"/>
-              </a:solidFill>
-              <a:effectLst/>
-              <a:uFillTx/>
-              <a:latin typeface="Calibri"/>
-            </a:endParaRPr>
-          </a:p>
-        </p:txBody>
-      </p:sp>
-      <p:sp>
-        <p:nvSpPr>
-          <p:cNvPr id="36" name="PlaceHolder 5"/>
-          <p:cNvSpPr>
-            <a:spLocks noGrp="1"/>
-          </p:cNvSpPr>
-          <p:nvPr>
-            <p:ph type="body"/>
-          </p:nvPr>
-        </p:nvSpPr>
-        <p:spPr>
-          <a:xfrm>
-            <a:off x="4645080" y="2174760"/>
-            <a:ext cx="4041360" cy="3951000"/>
-          </a:xfrm>
-          <a:prstGeom prst="rect">
-            <a:avLst/>
-          </a:prstGeom>
-          <a:noFill/>
-          <a:ln w="0">
-            <a:noFill/>
-          </a:ln>
-        </p:spPr>
-        <p:txBody>
-          <a:bodyPr lIns="91440" rIns="91440" tIns="45720" bIns="45720" anchor="t">
-            <a:noAutofit/>
-          </a:bodyPr>
-          <a:p>
-            <a:pPr marL="343080" indent="-343080" defTabSz="457200">
-              <a:lnSpc>
-                <a:spcPct val="100000"/>
-              </a:lnSpc>
-              <a:spcBef>
-                <a:spcPts val="479"/>
-              </a:spcBef>
-              <a:buClr>
-                <a:srgbClr val="000000"/>
-              </a:buClr>
-              <a:buFont typeface="Arial"/>
-              <a:buChar char="•"/>
-            </a:pPr>
-            <a:r>
-              <a:rPr lang="en-US" sz="2400" b="0" u="none" strike="noStrike">
-                <a:solidFill>
-                  <a:schemeClr val="dk1"/>
-                </a:solidFill>
-                <a:effectLst/>
-                <a:uFillTx/>
-                <a:latin typeface="Calibri"/>
-              </a:rPr>
-              <a:t>Click to edit Master text styles</a:t>
-            </a:r>
-            <a:endParaRPr lang="en-US" sz="2400" b="0" u="none" strike="noStrike">
-              <a:solidFill>
-                <a:schemeClr val="dk1"/>
-              </a:solidFill>
-              <a:effectLst/>
-              <a:uFillTx/>
-              <a:latin typeface="Calibri"/>
-            </a:endParaRPr>
-          </a:p>
-          <a:p>
-            <a:pPr marL="743040" lvl="1" indent="-285840" defTabSz="457200">
-              <a:lnSpc>
-                <a:spcPct val="100000"/>
-              </a:lnSpc>
-              <a:spcBef>
-                <a:spcPts val="400"/>
-              </a:spcBef>
-              <a:buClr>
-                <a:srgbClr val="000000"/>
-              </a:buClr>
-              <a:buFont typeface="Arial"/>
-              <a:buChar char="–"/>
-            </a:pPr>
-            <a:r>
-              <a:rPr lang="en-US" sz="2000" b="0" u="none" strike="noStrike">
-                <a:solidFill>
-                  <a:schemeClr val="dk1"/>
-                </a:solidFill>
-                <a:effectLst/>
-                <a:uFillTx/>
-                <a:latin typeface="Calibri"/>
-              </a:rPr>
-              <a:t>Second level</a:t>
-            </a:r>
-            <a:endParaRPr lang="en-US" sz="2000" b="0" u="none" strike="noStrike">
-              <a:solidFill>
-                <a:schemeClr val="dk1"/>
-              </a:solidFill>
-              <a:effectLst/>
-              <a:uFillTx/>
-              <a:latin typeface="Calibri"/>
-            </a:endParaRPr>
-          </a:p>
-          <a:p>
-            <a:pPr marL="1143000" lvl="2" indent="-228600" defTabSz="457200">
-              <a:lnSpc>
-                <a:spcPct val="100000"/>
-              </a:lnSpc>
-              <a:spcBef>
-                <a:spcPts val="360"/>
-              </a:spcBef>
-              <a:buClr>
-                <a:srgbClr val="000000"/>
-              </a:buClr>
-              <a:buFont typeface="Arial"/>
-              <a:buChar char="•"/>
-            </a:pPr>
-            <a:r>
-              <a:rPr lang="en-US" sz="1800" b="0" u="none" strike="noStrike">
-                <a:solidFill>
-                  <a:schemeClr val="dk1"/>
-                </a:solidFill>
-                <a:effectLst/>
-                <a:uFillTx/>
-                <a:latin typeface="Calibri"/>
-              </a:rPr>
-              <a:t>Third level</a:t>
-            </a:r>
-            <a:endParaRPr lang="en-US" sz="1800" b="0" u="none" strike="noStrike">
-              <a:solidFill>
-                <a:schemeClr val="dk1"/>
-              </a:solidFill>
-              <a:effectLst/>
-              <a:uFillTx/>
-              <a:latin typeface="Calibri"/>
-            </a:endParaRPr>
-          </a:p>
-          <a:p>
-            <a:pPr marL="1600200" lvl="3" indent="-228600" defTabSz="457200">
-              <a:lnSpc>
-                <a:spcPct val="100000"/>
-              </a:lnSpc>
-              <a:spcBef>
-                <a:spcPts val="320"/>
-              </a:spcBef>
-              <a:buClr>
-                <a:srgbClr val="000000"/>
-              </a:buClr>
-              <a:buFont typeface="Arial"/>
-              <a:buChar char="–"/>
-            </a:pPr>
-            <a:r>
-              <a:rPr lang="en-US" sz="1600" b="0" u="none" strike="noStrike">
-                <a:solidFill>
-                  <a:schemeClr val="dk1"/>
-                </a:solidFill>
-                <a:effectLst/>
-                <a:uFillTx/>
-                <a:latin typeface="Calibri"/>
-              </a:rPr>
-              <a:t>Fourth level</a:t>
-            </a:r>
-            <a:endParaRPr lang="en-US" sz="1600" b="0" u="none" strike="noStrike">
-              <a:solidFill>
-                <a:schemeClr val="dk1"/>
-              </a:solidFill>
-              <a:effectLst/>
-              <a:uFillTx/>
-              <a:latin typeface="Calibri"/>
-            </a:endParaRPr>
-          </a:p>
-          <a:p>
-            <a:pPr marL="2057400" lvl="4" indent="-228600" defTabSz="457200">
-              <a:lnSpc>
-                <a:spcPct val="100000"/>
-              </a:lnSpc>
-              <a:spcBef>
-                <a:spcPts val="320"/>
-              </a:spcBef>
-              <a:buClr>
-                <a:srgbClr val="000000"/>
-              </a:buClr>
-              <a:buFont typeface="Arial"/>
-              <a:buChar char="»"/>
-            </a:pPr>
-            <a:r>
-              <a:rPr lang="en-US" sz="1600" b="0" u="none" strike="noStrike">
-                <a:solidFill>
-                  <a:schemeClr val="dk1"/>
-                </a:solidFill>
-                <a:effectLst/>
-                <a:uFillTx/>
-                <a:latin typeface="Calibri"/>
-              </a:rPr>
-              <a:t>Fifth level</a:t>
-            </a:r>
-            <a:endParaRPr lang="en-US" sz="1600" b="0" u="none" strike="noStrike">
-              <a:solidFill>
-                <a:schemeClr val="dk1"/>
-              </a:solidFill>
-              <a:effectLst/>
-              <a:uFillTx/>
-              <a:latin typeface="Calibri"/>
-            </a:endParaRPr>
-          </a:p>
-        </p:txBody>
-      </p:sp>
-      <p:sp>
-        <p:nvSpPr>
-          <p:cNvPr id="37" name="PlaceHolder 6"/>
-          <p:cNvSpPr>
-            <a:spLocks noGrp="1"/>
-          </p:cNvSpPr>
-          <p:nvPr>
-            <p:ph type="dt" idx="19"/>
-          </p:nvPr>
-        </p:nvSpPr>
-        <p:spPr>
-          <a:xfrm>
-            <a:off x="457200" y="6356520"/>
-            <a:ext cx="2133360" cy="364680"/>
-          </a:xfrm>
-          <a:prstGeom prst="rect">
-            <a:avLst/>
-          </a:prstGeom>
-          <a:noFill/>
-          <a:ln w="0">
-            <a:noFill/>
-          </a:ln>
-        </p:spPr>
-        <p:txBody>
-          <a:bodyPr lIns="91440" rIns="91440" tIns="45720" bIns="45720" anchor="ctr">
-            <a:noAutofit/>
-          </a:bodyPr>
-          <a:lstStyle>
-            <a:lvl1pPr indent="0" defTabSz="457200">
-              <a:lnSpc>
-                <a:spcPct val="100000"/>
-              </a:lnSpc>
-              <a:buNone/>
-              <a:defRPr lang="en-US" sz="1200" b="0" u="none" strike="noStrike">
+            <a:fld id="{E77FEA6C-43E5-4823-B22A-9E6E6B521761}" type="slidenum">
+              <a:rPr lang="en-US" sz="1200" b="0" u="none" strike="noStrike">
                 <a:solidFill>
                   <a:schemeClr val="dk1">
                     <a:tint val="75000"/>
@@ -4720,168 +6081,6 @@
                 <a:effectLst/>
                 <a:uFillTx/>
                 <a:latin typeface="Calibri"/>
-              </a:defRPr>
-            </a:lvl1pPr>
-          </a:lstStyle>
-          <a:p>
-            <a:pPr indent="0" defTabSz="457200">
-              <a:lnSpc>
-                <a:spcPct val="100000"/>
-              </a:lnSpc>
-              <a:buNone/>
-            </a:pPr>
-            <a:r>
-              <a:rPr lang="en-US" sz="1200" b="0" u="none" strike="noStrike">
-                <a:solidFill>
-                  <a:schemeClr val="dk1">
-                    <a:tint val="75000"/>
-                  </a:schemeClr>
-                </a:solidFill>
-                <a:effectLst/>
-                <a:uFillTx/>
-                <a:latin typeface="Calibri"/>
-              </a:rPr>
-              <a:t>&lt;date/time&gt;</a:t>
-            </a:r>
-            <a:endParaRPr lang="en-US" sz="1200" b="0" u="none" strike="noStrike">
-              <a:solidFill>
-                <a:srgbClr val="000000"/>
-              </a:solidFill>
-              <a:effectLst/>
-              <a:uFillTx/>
-              <a:latin typeface="Times New Roman"/>
-            </a:endParaRPr>
-          </a:p>
-        </p:txBody>
-      </p:sp>
-      <p:sp>
-        <p:nvSpPr>
-          <p:cNvPr id="38" name="PlaceHolder 7"/>
-          <p:cNvSpPr>
-            <a:spLocks noGrp="1"/>
-          </p:cNvSpPr>
-          <p:nvPr>
-            <p:ph type="ftr" idx="20"/>
-          </p:nvPr>
-        </p:nvSpPr>
-        <p:spPr>
-          <a:xfrm>
-            <a:off x="3124080" y="6356520"/>
-            <a:ext cx="2895120" cy="364680"/>
-          </a:xfrm>
-          <a:prstGeom prst="rect">
-            <a:avLst/>
-          </a:prstGeom>
-          <a:noFill/>
-          <a:ln w="0">
-            <a:noFill/>
-          </a:ln>
-        </p:spPr>
-        <p:txBody>
-          <a:bodyPr lIns="91440" rIns="91440" tIns="45720" bIns="45720" anchor="ctr">
-            <a:noAutofit/>
-          </a:bodyPr>
-          <a:lstStyle>
-            <a:lvl1pPr indent="0" algn="ctr">
-              <a:buNone/>
-              <a:defRPr lang="en-US" sz="1400" b="0" u="none" strike="noStrike">
-                <a:solidFill>
-                  <a:srgbClr val="000000"/>
-                </a:solidFill>
-                <a:effectLst/>
-                <a:uFillTx/>
-                <a:latin typeface="Times New Roman"/>
-              </a:defRPr>
-            </a:lvl1pPr>
-          </a:lstStyle>
-          <a:p>
-            <a:pPr indent="0" algn="ctr">
-              <a:buNone/>
-            </a:pPr>
-            <a:r>
-              <a:rPr lang="en-US" sz="1400" b="0" u="none" strike="noStrike">
-                <a:solidFill>
-                  <a:srgbClr val="000000"/>
-                </a:solidFill>
-                <a:effectLst/>
-                <a:uFillTx/>
-                <a:latin typeface="Times New Roman"/>
-              </a:rPr>
-              <a:t>&lt;footer&gt;</a:t>
-            </a:r>
-            <a:endParaRPr lang="en-US" sz="1400" b="0" u="none" strike="noStrike">
-              <a:solidFill>
-                <a:srgbClr val="000000"/>
-              </a:solidFill>
-              <a:effectLst/>
-              <a:uFillTx/>
-              <a:latin typeface="Times New Roman"/>
-            </a:endParaRPr>
-          </a:p>
-        </p:txBody>
-      </p:sp>
-      <p:sp>
-        <p:nvSpPr>
-          <p:cNvPr id="39" name="PlaceHolder 8"/>
-          <p:cNvSpPr>
-            <a:spLocks noGrp="1"/>
-          </p:cNvSpPr>
-          <p:nvPr>
-            <p:ph type="sldNum" idx="21"/>
-          </p:nvPr>
-        </p:nvSpPr>
-        <p:spPr>
-          <a:xfrm>
-            <a:off x="6553080" y="6356520"/>
-            <a:ext cx="2133360" cy="364680"/>
-          </a:xfrm>
-          <a:prstGeom prst="rect">
-            <a:avLst/>
-          </a:prstGeom>
-          <a:noFill/>
-          <a:ln w="0">
-            <a:noFill/>
-          </a:ln>
-        </p:spPr>
-        <p:txBody>
-          <a:bodyPr lIns="91440" rIns="91440" tIns="45720" bIns="45720" anchor="ctr">
-            <a:noAutofit/>
-          </a:bodyPr>
-          <a:lstStyle>
-            <a:lvl1pPr indent="0" algn="r" defTabSz="457200">
-              <a:lnSpc>
-                <a:spcPct val="100000"/>
-              </a:lnSpc>
-              <a:buNone/>
-              <a:defRPr lang="en-US" sz="1200" b="0" u="none" strike="noStrike">
-                <a:solidFill>
-                  <a:schemeClr val="dk1">
-                    <a:tint val="75000"/>
-                  </a:schemeClr>
-                </a:solidFill>
-                <a:effectLst/>
-                <a:uFillTx/>
-                <a:latin typeface="Calibri"/>
-              </a:defRPr>
-            </a:lvl1pPr>
-          </a:lstStyle>
-          <a:p>
-            <a:pPr indent="0" algn="r" defTabSz="457200">
-              <a:lnSpc>
-                <a:spcPct val="100000"/>
-              </a:lnSpc>
-              <a:buNone/>
-            </a:pPr>
-            <a:fld id="{361E3444-44D8-495B-AD4E-75AB9B2A01D1}" type="slidenum">
-              <a:rPr lang="en-US" sz="1200" b="0" u="none" strike="noStrike">
-                <a:solidFill>
-                  <a:schemeClr val="dk1">
-                    <a:tint val="75000"/>
-                  </a:schemeClr>
-                </a:solidFill>
-                <a:effectLst/>
-                <a:uFillTx/>
-                <a:latin typeface="Calibri"/>
               </a:rPr>
               <a:t>&lt;number&gt;</a:t>
             </a:fld>
@@ -4892,862 +6091,6 @@
               <a:effectLst/>
               <a:uFillTx/>
               <a:latin typeface="Times New Roman"/>
-            </a:endParaRPr>
-          </a:p>
-        </p:txBody>
-      </p:sp>
-    </p:spTree>
-  </p:cSld>
-</p:sldLayout>
-</file>
-
-<file path=ppt/slideLayouts/slideLayout8.xml><?xml version="1.0" encoding="utf-8"?>
-<p:sldLayout xmlns:a="http://schemas.openxmlformats.org/drawingml/2006/main" xmlns:p="http://schemas.openxmlformats.org/presentationml/2006/main" xmlns:r="http://schemas.openxmlformats.org/officeDocument/2006/relationships" xmlns:p14="http://schemas.microsoft.com/office/powerpoint/2010/main" xmlns:p15="http://schemas.microsoft.com/office/powerpoint/2012/main" xmlns:mc="http://schemas.openxmlformats.org/markup-compatibility/2006" type="titleOnly" preserve="1">
-  <p:cSld name="Title Only">
-    <p:bg>
-      <p:bgPr>
-        <a:solidFill>
-          <a:srgbClr val="ffffff"/>
-        </a:solidFill>
-      </p:bgPr>
-    </p:bg>
-    <p:spTree>
-      <p:nvGrpSpPr>
-        <p:cNvPr id="1" name=""/>
-        <p:cNvGrpSpPr/>
-        <p:nvPr/>
-      </p:nvGrpSpPr>
-      <p:grpSpPr>
-        <a:xfrm>
-          <a:off x="0" y="0"/>
-          <a:ext cx="0" cy="0"/>
-          <a:chOff x="0" y="0"/>
-          <a:chExt cx="0" cy="0"/>
-        </a:xfrm>
-      </p:grpSpPr>
-      <p:sp>
-        <p:nvSpPr>
-          <p:cNvPr id="40" name="PlaceHolder 1"/>
-          <p:cNvSpPr>
-            <a:spLocks noGrp="1"/>
-          </p:cNvSpPr>
-          <p:nvPr>
-            <p:ph type="title"/>
-          </p:nvPr>
-        </p:nvSpPr>
-        <p:spPr>
-          <a:xfrm>
-            <a:off x="457200" y="274680"/>
-            <a:ext cx="8229240" cy="1142640"/>
-          </a:xfrm>
-          <a:prstGeom prst="rect">
-            <a:avLst/>
-          </a:prstGeom>
-          <a:noFill/>
-          <a:ln w="0">
-            <a:noFill/>
-          </a:ln>
-        </p:spPr>
-        <p:txBody>
-          <a:bodyPr lIns="91440" rIns="91440" tIns="45720" bIns="45720" anchor="ctr">
-            <a:noAutofit/>
-          </a:bodyPr>
-          <a:p>
-            <a:pPr indent="0" algn="ctr" defTabSz="457200">
-              <a:lnSpc>
-                <a:spcPct val="100000"/>
-              </a:lnSpc>
-              <a:buNone/>
-            </a:pPr>
-            <a:r>
-              <a:rPr lang="en-US" sz="4400" b="0" u="none" strike="noStrike">
-                <a:solidFill>
-                  <a:schemeClr val="dk1"/>
-                </a:solidFill>
-                <a:effectLst/>
-                <a:uFillTx/>
-                <a:latin typeface="Calibri"/>
-              </a:rPr>
-              <a:t>Click to edit Master title style</a:t>
-            </a:r>
-            <a:endParaRPr lang="en-US" sz="4400" b="0" u="none" strike="noStrike">
-              <a:solidFill>
-                <a:schemeClr val="dk1"/>
-              </a:solidFill>
-              <a:effectLst/>
-              <a:uFillTx/>
-              <a:latin typeface="Calibri"/>
-            </a:endParaRPr>
-          </a:p>
-        </p:txBody>
-      </p:sp>
-      <p:sp>
-        <p:nvSpPr>
-          <p:cNvPr id="41" name="PlaceHolder 2"/>
-          <p:cNvSpPr>
-            <a:spLocks noGrp="1"/>
-          </p:cNvSpPr>
-          <p:nvPr>
-            <p:ph type="dt" idx="22"/>
-          </p:nvPr>
-        </p:nvSpPr>
-        <p:spPr>
-          <a:xfrm>
-            <a:off x="457200" y="6356520"/>
-            <a:ext cx="2133360" cy="364680"/>
-          </a:xfrm>
-          <a:prstGeom prst="rect">
-            <a:avLst/>
-          </a:prstGeom>
-          <a:noFill/>
-          <a:ln w="0">
-            <a:noFill/>
-          </a:ln>
-        </p:spPr>
-        <p:txBody>
-          <a:bodyPr lIns="91440" rIns="91440" tIns="45720" bIns="45720" anchor="ctr">
-            <a:noAutofit/>
-          </a:bodyPr>
-          <a:lstStyle>
-            <a:lvl1pPr indent="0" defTabSz="457200">
-              <a:lnSpc>
-                <a:spcPct val="100000"/>
-              </a:lnSpc>
-              <a:buNone/>
-              <a:defRPr lang="en-US" sz="1200" b="0" u="none" strike="noStrike">
-                <a:solidFill>
-                  <a:schemeClr val="dk1">
-                    <a:tint val="75000"/>
-                  </a:schemeClr>
-                </a:solidFill>
-                <a:effectLst/>
-                <a:uFillTx/>
-                <a:latin typeface="Calibri"/>
-              </a:defRPr>
-            </a:lvl1pPr>
-          </a:lstStyle>
-          <a:p>
-            <a:pPr indent="0" defTabSz="457200">
-              <a:lnSpc>
-                <a:spcPct val="100000"/>
-              </a:lnSpc>
-              <a:buNone/>
-            </a:pPr>
-            <a:r>
-              <a:rPr lang="en-US" sz="1200" b="0" u="none" strike="noStrike">
-                <a:solidFill>
-                  <a:schemeClr val="dk1">
-                    <a:tint val="75000"/>
-                  </a:schemeClr>
-                </a:solidFill>
-                <a:effectLst/>
-                <a:uFillTx/>
-                <a:latin typeface="Calibri"/>
-              </a:rPr>
-              <a:t>&lt;date/time&gt;</a:t>
-            </a:r>
-            <a:endParaRPr lang="en-US" sz="1200" b="0" u="none" strike="noStrike">
-              <a:solidFill>
-                <a:srgbClr val="000000"/>
-              </a:solidFill>
-              <a:effectLst/>
-              <a:uFillTx/>
-              <a:latin typeface="Times New Roman"/>
-            </a:endParaRPr>
-          </a:p>
-        </p:txBody>
-      </p:sp>
-      <p:sp>
-        <p:nvSpPr>
-          <p:cNvPr id="42" name="PlaceHolder 3"/>
-          <p:cNvSpPr>
-            <a:spLocks noGrp="1"/>
-          </p:cNvSpPr>
-          <p:nvPr>
-            <p:ph type="ftr" idx="23"/>
-          </p:nvPr>
-        </p:nvSpPr>
-        <p:spPr>
-          <a:xfrm>
-            <a:off x="3124080" y="6356520"/>
-            <a:ext cx="2895120" cy="364680"/>
-          </a:xfrm>
-          <a:prstGeom prst="rect">
-            <a:avLst/>
-          </a:prstGeom>
-          <a:noFill/>
-          <a:ln w="0">
-            <a:noFill/>
-          </a:ln>
-        </p:spPr>
-        <p:txBody>
-          <a:bodyPr lIns="91440" rIns="91440" tIns="45720" bIns="45720" anchor="ctr">
-            <a:noAutofit/>
-          </a:bodyPr>
-          <a:lstStyle>
-            <a:lvl1pPr indent="0" algn="ctr">
-              <a:buNone/>
-              <a:defRPr lang="en-US" sz="1400" b="0" u="none" strike="noStrike">
-                <a:solidFill>
-                  <a:srgbClr val="000000"/>
-                </a:solidFill>
-                <a:effectLst/>
-                <a:uFillTx/>
-                <a:latin typeface="Times New Roman"/>
-              </a:defRPr>
-            </a:lvl1pPr>
-          </a:lstStyle>
-          <a:p>
-            <a:pPr indent="0" algn="ctr">
-              <a:buNone/>
-            </a:pPr>
-            <a:r>
-              <a:rPr lang="en-US" sz="1400" b="0" u="none" strike="noStrike">
-                <a:solidFill>
-                  <a:srgbClr val="000000"/>
-                </a:solidFill>
-                <a:effectLst/>
-                <a:uFillTx/>
-                <a:latin typeface="Times New Roman"/>
-              </a:rPr>
-              <a:t>&lt;footer&gt;</a:t>
-            </a:r>
-            <a:endParaRPr lang="en-US" sz="1400" b="0" u="none" strike="noStrike">
-              <a:solidFill>
-                <a:srgbClr val="000000"/>
-              </a:solidFill>
-              <a:effectLst/>
-              <a:uFillTx/>
-              <a:latin typeface="Times New Roman"/>
-            </a:endParaRPr>
-          </a:p>
-        </p:txBody>
-      </p:sp>
-      <p:sp>
-        <p:nvSpPr>
-          <p:cNvPr id="43" name="PlaceHolder 4"/>
-          <p:cNvSpPr>
-            <a:spLocks noGrp="1"/>
-          </p:cNvSpPr>
-          <p:nvPr>
-            <p:ph type="sldNum" idx="24"/>
-          </p:nvPr>
-        </p:nvSpPr>
-        <p:spPr>
-          <a:xfrm>
-            <a:off x="6553080" y="6356520"/>
-            <a:ext cx="2133360" cy="364680"/>
-          </a:xfrm>
-          <a:prstGeom prst="rect">
-            <a:avLst/>
-          </a:prstGeom>
-          <a:noFill/>
-          <a:ln w="0">
-            <a:noFill/>
-          </a:ln>
-        </p:spPr>
-        <p:txBody>
-          <a:bodyPr lIns="91440" rIns="91440" tIns="45720" bIns="45720" anchor="ctr">
-            <a:noAutofit/>
-          </a:bodyPr>
-          <a:lstStyle>
-            <a:lvl1pPr indent="0" algn="r" defTabSz="457200">
-              <a:lnSpc>
-                <a:spcPct val="100000"/>
-              </a:lnSpc>
-              <a:buNone/>
-              <a:defRPr lang="en-US" sz="1200" b="0" u="none" strike="noStrike">
-                <a:solidFill>
-                  <a:schemeClr val="dk1">
-                    <a:tint val="75000"/>
-                  </a:schemeClr>
-                </a:solidFill>
-                <a:effectLst/>
-                <a:uFillTx/>
-                <a:latin typeface="Calibri"/>
-              </a:defRPr>
-            </a:lvl1pPr>
-          </a:lstStyle>
-          <a:p>
-            <a:pPr indent="0" algn="r" defTabSz="457200">
-              <a:lnSpc>
-                <a:spcPct val="100000"/>
-              </a:lnSpc>
-              <a:buNone/>
-            </a:pPr>
-            <a:fld id="{B48B3858-7AD9-4CAA-BA23-7D5AE9EF9E18}" type="slidenum">
-              <a:rPr lang="en-US" sz="1200" b="0" u="none" strike="noStrike">
-                <a:solidFill>
-                  <a:schemeClr val="dk1">
-                    <a:tint val="75000"/>
-                  </a:schemeClr>
-                </a:solidFill>
-                <a:effectLst/>
-                <a:uFillTx/>
-                <a:latin typeface="Calibri"/>
-              </a:rPr>
-              <a:t>&lt;number&gt;</a:t>
-            </a:fld>
-            <a:endParaRPr lang="en-US" sz="1200" b="0" u="none" strike="noStrike">
-              <a:solidFill>
-                <a:srgbClr val="000000"/>
-              </a:solidFill>
-              <a:effectLst/>
-              <a:uFillTx/>
-              <a:latin typeface="Times New Roman"/>
-            </a:endParaRPr>
-          </a:p>
-        </p:txBody>
-      </p:sp>
-    </p:spTree>
-  </p:cSld>
-</p:sldLayout>
-</file>
-
-<file path=ppt/slideLayouts/slideLayout9.xml><?xml version="1.0" encoding="utf-8"?>
-<p:sldLayout xmlns:a="http://schemas.openxmlformats.org/drawingml/2006/main" xmlns:p="http://schemas.openxmlformats.org/presentationml/2006/main" xmlns:r="http://schemas.openxmlformats.org/officeDocument/2006/relationships" xmlns:p14="http://schemas.microsoft.com/office/powerpoint/2010/main" xmlns:p15="http://schemas.microsoft.com/office/powerpoint/2012/main" xmlns:mc="http://schemas.openxmlformats.org/markup-compatibility/2006" type="blank" preserve="1">
-  <p:cSld name="Blank">
-    <p:bg>
-      <p:bgPr>
-        <a:solidFill>
-          <a:srgbClr val="ffffff"/>
-        </a:solidFill>
-      </p:bgPr>
-    </p:bg>
-    <p:spTree>
-      <p:nvGrpSpPr>
-        <p:cNvPr id="1" name=""/>
-        <p:cNvGrpSpPr/>
-        <p:nvPr/>
-      </p:nvGrpSpPr>
-      <p:grpSpPr>
-        <a:xfrm>
-          <a:off x="0" y="0"/>
-          <a:ext cx="0" cy="0"/>
-          <a:chOff x="0" y="0"/>
-          <a:chExt cx="0" cy="0"/>
-        </a:xfrm>
-      </p:grpSpPr>
-      <p:sp>
-        <p:nvSpPr>
-          <p:cNvPr id="44" name="PlaceHolder 1"/>
-          <p:cNvSpPr>
-            <a:spLocks noGrp="1"/>
-          </p:cNvSpPr>
-          <p:nvPr>
-            <p:ph type="dt" idx="25"/>
-          </p:nvPr>
-        </p:nvSpPr>
-        <p:spPr>
-          <a:xfrm>
-            <a:off x="457200" y="6356520"/>
-            <a:ext cx="2133360" cy="364680"/>
-          </a:xfrm>
-          <a:prstGeom prst="rect">
-            <a:avLst/>
-          </a:prstGeom>
-          <a:noFill/>
-          <a:ln w="0">
-            <a:noFill/>
-          </a:ln>
-        </p:spPr>
-        <p:txBody>
-          <a:bodyPr lIns="91440" rIns="91440" tIns="45720" bIns="45720" anchor="ctr">
-            <a:noAutofit/>
-          </a:bodyPr>
-          <a:lstStyle>
-            <a:lvl1pPr indent="0" defTabSz="457200">
-              <a:lnSpc>
-                <a:spcPct val="100000"/>
-              </a:lnSpc>
-              <a:buNone/>
-              <a:defRPr lang="en-US" sz="1200" b="0" u="none" strike="noStrike">
-                <a:solidFill>
-                  <a:schemeClr val="dk1">
-                    <a:tint val="75000"/>
-                  </a:schemeClr>
-                </a:solidFill>
-                <a:effectLst/>
-                <a:uFillTx/>
-                <a:latin typeface="Calibri"/>
-              </a:defRPr>
-            </a:lvl1pPr>
-          </a:lstStyle>
-          <a:p>
-            <a:pPr indent="0" defTabSz="457200">
-              <a:lnSpc>
-                <a:spcPct val="100000"/>
-              </a:lnSpc>
-              <a:buNone/>
-            </a:pPr>
-            <a:r>
-              <a:rPr lang="en-US" sz="1200" b="0" u="none" strike="noStrike">
-                <a:solidFill>
-                  <a:schemeClr val="dk1">
-                    <a:tint val="75000"/>
-                  </a:schemeClr>
-                </a:solidFill>
-                <a:effectLst/>
-                <a:uFillTx/>
-                <a:latin typeface="Calibri"/>
-              </a:rPr>
-              <a:t>&lt;date/time&gt;</a:t>
-            </a:r>
-            <a:endParaRPr lang="en-US" sz="1200" b="0" u="none" strike="noStrike">
-              <a:solidFill>
-                <a:srgbClr val="000000"/>
-              </a:solidFill>
-              <a:effectLst/>
-              <a:uFillTx/>
-              <a:latin typeface="Times New Roman"/>
-            </a:endParaRPr>
-          </a:p>
-        </p:txBody>
-      </p:sp>
-      <p:sp>
-        <p:nvSpPr>
-          <p:cNvPr id="45" name="PlaceHolder 2"/>
-          <p:cNvSpPr>
-            <a:spLocks noGrp="1"/>
-          </p:cNvSpPr>
-          <p:nvPr>
-            <p:ph type="ftr" idx="26"/>
-          </p:nvPr>
-        </p:nvSpPr>
-        <p:spPr>
-          <a:xfrm>
-            <a:off x="3124080" y="6356520"/>
-            <a:ext cx="2895120" cy="364680"/>
-          </a:xfrm>
-          <a:prstGeom prst="rect">
-            <a:avLst/>
-          </a:prstGeom>
-          <a:noFill/>
-          <a:ln w="0">
-            <a:noFill/>
-          </a:ln>
-        </p:spPr>
-        <p:txBody>
-          <a:bodyPr lIns="91440" rIns="91440" tIns="45720" bIns="45720" anchor="ctr">
-            <a:noAutofit/>
-          </a:bodyPr>
-          <a:lstStyle>
-            <a:lvl1pPr indent="0" algn="ctr">
-              <a:buNone/>
-              <a:defRPr lang="en-US" sz="1400" b="0" u="none" strike="noStrike">
-                <a:solidFill>
-                  <a:srgbClr val="000000"/>
-                </a:solidFill>
-                <a:effectLst/>
-                <a:uFillTx/>
-                <a:latin typeface="Times New Roman"/>
-              </a:defRPr>
-            </a:lvl1pPr>
-          </a:lstStyle>
-          <a:p>
-            <a:pPr indent="0" algn="ctr">
-              <a:buNone/>
-            </a:pPr>
-            <a:r>
-              <a:rPr lang="en-US" sz="1400" b="0" u="none" strike="noStrike">
-                <a:solidFill>
-                  <a:srgbClr val="000000"/>
-                </a:solidFill>
-                <a:effectLst/>
-                <a:uFillTx/>
-                <a:latin typeface="Times New Roman"/>
-              </a:rPr>
-              <a:t>&lt;footer&gt;</a:t>
-            </a:r>
-            <a:endParaRPr lang="en-US" sz="1400" b="0" u="none" strike="noStrike">
-              <a:solidFill>
-                <a:srgbClr val="000000"/>
-              </a:solidFill>
-              <a:effectLst/>
-              <a:uFillTx/>
-              <a:latin typeface="Times New Roman"/>
-            </a:endParaRPr>
-          </a:p>
-        </p:txBody>
-      </p:sp>
-      <p:sp>
-        <p:nvSpPr>
-          <p:cNvPr id="46" name="PlaceHolder 3"/>
-          <p:cNvSpPr>
-            <a:spLocks noGrp="1"/>
-          </p:cNvSpPr>
-          <p:nvPr>
-            <p:ph type="sldNum" idx="27"/>
-          </p:nvPr>
-        </p:nvSpPr>
-        <p:spPr>
-          <a:xfrm>
-            <a:off x="6553080" y="6356520"/>
-            <a:ext cx="2133360" cy="364680"/>
-          </a:xfrm>
-          <a:prstGeom prst="rect">
-            <a:avLst/>
-          </a:prstGeom>
-          <a:noFill/>
-          <a:ln w="0">
-            <a:noFill/>
-          </a:ln>
-        </p:spPr>
-        <p:txBody>
-          <a:bodyPr lIns="91440" rIns="91440" tIns="45720" bIns="45720" anchor="ctr">
-            <a:noAutofit/>
-          </a:bodyPr>
-          <a:lstStyle>
-            <a:lvl1pPr indent="0" algn="r" defTabSz="457200">
-              <a:lnSpc>
-                <a:spcPct val="100000"/>
-              </a:lnSpc>
-              <a:buNone/>
-              <a:defRPr lang="en-US" sz="1200" b="0" u="none" strike="noStrike">
-                <a:solidFill>
-                  <a:schemeClr val="dk1">
-                    <a:tint val="75000"/>
-                  </a:schemeClr>
-                </a:solidFill>
-                <a:effectLst/>
-                <a:uFillTx/>
-                <a:latin typeface="Calibri"/>
-              </a:defRPr>
-            </a:lvl1pPr>
-          </a:lstStyle>
-          <a:p>
-            <a:pPr indent="0" algn="r" defTabSz="457200">
-              <a:lnSpc>
-                <a:spcPct val="100000"/>
-              </a:lnSpc>
-              <a:buNone/>
-            </a:pPr>
-            <a:fld id="{00AF7331-4C97-412F-B09A-915A6BDE764D}" type="slidenum">
-              <a:rPr lang="en-US" sz="1200" b="0" u="none" strike="noStrike">
-                <a:solidFill>
-                  <a:schemeClr val="dk1">
-                    <a:tint val="75000"/>
-                  </a:schemeClr>
-                </a:solidFill>
-                <a:effectLst/>
-                <a:uFillTx/>
-                <a:latin typeface="Calibri"/>
-              </a:rPr>
-              <a:t>&lt;number&gt;</a:t>
-            </a:fld>
-            <a:endParaRPr lang="en-US" sz="1200" b="0" u="none" strike="noStrike">
-              <a:solidFill>
-                <a:srgbClr val="000000"/>
-              </a:solidFill>
-              <a:effectLst/>
-              <a:uFillTx/>
-              <a:latin typeface="Times New Roman"/>
-            </a:endParaRPr>
-          </a:p>
-        </p:txBody>
-      </p:sp>
-      <p:sp>
-        <p:nvSpPr>
-          <p:cNvPr id="47" name="PlaceHolder 4"/>
-          <p:cNvSpPr>
-            <a:spLocks noGrp="1"/>
-          </p:cNvSpPr>
-          <p:nvPr>
-            <p:ph type="title"/>
-          </p:nvPr>
-        </p:nvSpPr>
-        <p:spPr>
-          <a:xfrm>
-            <a:off x="609480" y="273600"/>
-            <a:ext cx="10972080" cy="1144800"/>
-          </a:xfrm>
-          <a:prstGeom prst="rect">
-            <a:avLst/>
-          </a:prstGeom>
-          <a:noFill/>
-          <a:ln w="0">
-            <a:noFill/>
-          </a:ln>
-        </p:spPr>
-        <p:txBody>
-          <a:bodyPr lIns="0" rIns="0" tIns="0" bIns="0" anchor="ctr">
-            <a:noAutofit/>
-          </a:bodyPr>
-          <a:p>
-            <a:pPr indent="0">
-              <a:buNone/>
-            </a:pPr>
-            <a:r>
-              <a:rPr lang="en-US" sz="1800" b="0" u="none" strike="noStrike">
-                <a:solidFill>
-                  <a:schemeClr val="dk1"/>
-                </a:solidFill>
-                <a:effectLst/>
-                <a:uFillTx/>
-                <a:latin typeface="Calibri"/>
-              </a:rPr>
-              <a:t>Click to edit the title text format</a:t>
-            </a:r>
-            <a:endParaRPr lang="en-US" sz="1800" b="0" u="none" strike="noStrike">
-              <a:solidFill>
-                <a:schemeClr val="dk1"/>
-              </a:solidFill>
-              <a:effectLst/>
-              <a:uFillTx/>
-              <a:latin typeface="Calibri"/>
-            </a:endParaRPr>
-          </a:p>
-        </p:txBody>
-      </p:sp>
-      <p:sp>
-        <p:nvSpPr>
-          <p:cNvPr id="48" name="PlaceHolder 5"/>
-          <p:cNvSpPr>
-            <a:spLocks noGrp="1"/>
-          </p:cNvSpPr>
-          <p:nvPr>
-            <p:ph type="body"/>
-          </p:nvPr>
-        </p:nvSpPr>
-        <p:spPr>
-          <a:xfrm>
-            <a:off x="609480" y="1604520"/>
-            <a:ext cx="10972080" cy="3977280"/>
-          </a:xfrm>
-          <a:prstGeom prst="rect">
-            <a:avLst/>
-          </a:prstGeom>
-          <a:noFill/>
-          <a:ln w="0">
-            <a:noFill/>
-          </a:ln>
-        </p:spPr>
-        <p:txBody>
-          <a:bodyPr lIns="0" rIns="0" tIns="0" bIns="0" anchor="t">
-            <a:normAutofit/>
-          </a:bodyPr>
-          <a:p>
-            <a:pPr marL="432000" indent="-324000">
-              <a:spcBef>
-                <a:spcPts val="1417"/>
-              </a:spcBef>
-              <a:buClr>
-                <a:srgbClr val="000000"/>
-              </a:buClr>
-              <a:buSzPct val="45000"/>
-              <a:buFont typeface="Wingdings" charset="2"/>
-              <a:buChar char=""/>
-            </a:pPr>
-            <a:r>
-              <a:rPr lang="en-US" sz="3200" b="0" u="none" strike="noStrike">
-                <a:solidFill>
-                  <a:schemeClr val="dk1"/>
-                </a:solidFill>
-                <a:effectLst/>
-                <a:uFillTx/>
-                <a:latin typeface="Calibri"/>
-              </a:rPr>
-              <a:t>Click to edit the outline text format</a:t>
-            </a:r>
-            <a:endParaRPr lang="en-US" sz="3200" b="0" u="none" strike="noStrike">
-              <a:solidFill>
-                <a:schemeClr val="dk1"/>
-              </a:solidFill>
-              <a:effectLst/>
-              <a:uFillTx/>
-              <a:latin typeface="Calibri"/>
-            </a:endParaRPr>
-          </a:p>
-          <a:p>
-            <a:pPr marL="864000" lvl="1" indent="-324000">
-              <a:spcBef>
-                <a:spcPts val="1134"/>
-              </a:spcBef>
-              <a:buClr>
-                <a:srgbClr val="000000"/>
-              </a:buClr>
-              <a:buSzPct val="75000"/>
-              <a:buFont typeface="Symbol" charset="2"/>
-              <a:buChar char=""/>
-            </a:pPr>
-            <a:r>
-              <a:rPr lang="en-US" sz="2400" b="0" u="none" strike="noStrike">
-                <a:solidFill>
-                  <a:schemeClr val="dk1"/>
-                </a:solidFill>
-                <a:effectLst/>
-                <a:uFillTx/>
-                <a:latin typeface="Calibri"/>
-              </a:rPr>
-              <a:t>Second Outline Level</a:t>
-            </a:r>
-            <a:endParaRPr lang="en-US" sz="2400" b="0" u="none" strike="noStrike">
-              <a:solidFill>
-                <a:schemeClr val="dk1"/>
-              </a:solidFill>
-              <a:effectLst/>
-              <a:uFillTx/>
-              <a:latin typeface="Calibri"/>
-            </a:endParaRPr>
-          </a:p>
-          <a:p>
-            <a:pPr marL="1296000" lvl="2" indent="-288000">
-              <a:spcBef>
-                <a:spcPts val="850"/>
-              </a:spcBef>
-              <a:buClr>
-                <a:srgbClr val="000000"/>
-              </a:buClr>
-              <a:buSzPct val="45000"/>
-              <a:buFont typeface="Wingdings" charset="2"/>
-              <a:buChar char=""/>
-            </a:pPr>
-            <a:r>
-              <a:rPr lang="en-US" sz="2000" b="0" u="none" strike="noStrike">
-                <a:solidFill>
-                  <a:schemeClr val="dk1"/>
-                </a:solidFill>
-                <a:effectLst/>
-                <a:uFillTx/>
-                <a:latin typeface="Calibri"/>
-              </a:rPr>
-              <a:t>Third Outline Level</a:t>
-            </a:r>
-            <a:endParaRPr lang="en-US" sz="2000" b="0" u="none" strike="noStrike">
-              <a:solidFill>
-                <a:schemeClr val="dk1"/>
-              </a:solidFill>
-              <a:effectLst/>
-              <a:uFillTx/>
-              <a:latin typeface="Calibri"/>
-            </a:endParaRPr>
-          </a:p>
-          <a:p>
-            <a:pPr marL="1728000" lvl="3" indent="-216000">
-              <a:spcBef>
-                <a:spcPts val="567"/>
-              </a:spcBef>
-              <a:buClr>
-                <a:srgbClr val="000000"/>
-              </a:buClr>
-              <a:buSzPct val="75000"/>
-              <a:buFont typeface="Symbol" charset="2"/>
-              <a:buChar char=""/>
-            </a:pPr>
-            <a:r>
-              <a:rPr lang="en-US" sz="2000" b="0" u="none" strike="noStrike">
-                <a:solidFill>
-                  <a:schemeClr val="dk1"/>
-                </a:solidFill>
-                <a:effectLst/>
-                <a:uFillTx/>
-                <a:latin typeface="Calibri"/>
-              </a:rPr>
-              <a:t>Fourth Outline Level</a:t>
-            </a:r>
-            <a:endParaRPr lang="en-US" sz="2000" b="0" u="none" strike="noStrike">
-              <a:solidFill>
-                <a:schemeClr val="dk1"/>
-              </a:solidFill>
-              <a:effectLst/>
-              <a:uFillTx/>
-              <a:latin typeface="Calibri"/>
-            </a:endParaRPr>
-          </a:p>
-          <a:p>
-            <a:pPr marL="2160000" lvl="4" indent="-216000">
-              <a:spcBef>
-                <a:spcPts val="283"/>
-              </a:spcBef>
-              <a:buClr>
-                <a:srgbClr val="000000"/>
-              </a:buClr>
-              <a:buSzPct val="45000"/>
-              <a:buFont typeface="Wingdings" charset="2"/>
-              <a:buChar char=""/>
-            </a:pPr>
-            <a:r>
-              <a:rPr lang="en-US" sz="2000" b="0" u="none" strike="noStrike">
-                <a:solidFill>
-                  <a:schemeClr val="dk1"/>
-                </a:solidFill>
-                <a:effectLst/>
-                <a:uFillTx/>
-                <a:latin typeface="Calibri"/>
-              </a:rPr>
-              <a:t>Fifth Outline Level</a:t>
-            </a:r>
-            <a:endParaRPr lang="en-US" sz="2000" b="0" u="none" strike="noStrike">
-              <a:solidFill>
-                <a:schemeClr val="dk1"/>
-              </a:solidFill>
-              <a:effectLst/>
-              <a:uFillTx/>
-              <a:latin typeface="Calibri"/>
-            </a:endParaRPr>
-          </a:p>
-          <a:p>
-            <a:pPr marL="2592000" lvl="5" indent="-216000">
-              <a:spcBef>
-                <a:spcPts val="283"/>
-              </a:spcBef>
-              <a:buClr>
-                <a:srgbClr val="000000"/>
-              </a:buClr>
-              <a:buSzPct val="45000"/>
-              <a:buFont typeface="Wingdings" charset="2"/>
-              <a:buChar char=""/>
-            </a:pPr>
-            <a:r>
-              <a:rPr lang="en-US" sz="2000" b="0" u="none" strike="noStrike">
-                <a:solidFill>
-                  <a:schemeClr val="dk1"/>
-                </a:solidFill>
-                <a:effectLst/>
-                <a:uFillTx/>
-                <a:latin typeface="Calibri"/>
-              </a:rPr>
-              <a:t>Sixth Outline Level</a:t>
-            </a:r>
-            <a:endParaRPr lang="en-US" sz="2000" b="0" u="none" strike="noStrike">
-              <a:solidFill>
-                <a:schemeClr val="dk1"/>
-              </a:solidFill>
-              <a:effectLst/>
-              <a:uFillTx/>
-              <a:latin typeface="Calibri"/>
-            </a:endParaRPr>
-          </a:p>
-          <a:p>
-            <a:pPr marL="3024000" lvl="6" indent="-216000">
-              <a:spcBef>
-                <a:spcPts val="283"/>
-              </a:spcBef>
-              <a:buClr>
-                <a:srgbClr val="000000"/>
-              </a:buClr>
-              <a:buSzPct val="45000"/>
-              <a:buFont typeface="Wingdings" charset="2"/>
-              <a:buChar char=""/>
-            </a:pPr>
-            <a:r>
-              <a:rPr lang="en-US" sz="2000" b="0" u="none" strike="noStrike">
-                <a:solidFill>
-                  <a:schemeClr val="dk1"/>
-                </a:solidFill>
-                <a:effectLst/>
-                <a:uFillTx/>
-                <a:latin typeface="Calibri"/>
-              </a:rPr>
-              <a:t>Seventh Outline Level</a:t>
-            </a:r>
-            <a:endParaRPr lang="en-US" sz="2000" b="0" u="none" strike="noStrike">
-              <a:solidFill>
-                <a:schemeClr val="dk1"/>
-              </a:solidFill>
-              <a:effectLst/>
-              <a:uFillTx/>
-              <a:latin typeface="Calibri"/>
             </a:endParaRPr>
           </a:p>
         </p:txBody>
@@ -5826,7 +6169,7 @@
         <p:spPr>
           <a:xfrm>
             <a:off x="822960" y="1828800"/>
-            <a:ext cx="10515240" cy="2377080"/>
+            <a:ext cx="10514880" cy="2376720"/>
           </a:xfrm>
           <a:prstGeom prst="rect">
             <a:avLst/>
@@ -5915,7 +6258,7 @@
         <p:spPr>
           <a:xfrm>
             <a:off x="822960" y="4572000"/>
-            <a:ext cx="10515240" cy="1462680"/>
+            <a:ext cx="10514880" cy="1040040"/>
           </a:xfrm>
           <a:prstGeom prst="rect">
             <a:avLst/>
@@ -6070,7 +6413,7 @@
         <p:spPr>
           <a:xfrm>
             <a:off x="640080" y="411480"/>
-            <a:ext cx="10972440" cy="1005480"/>
+            <a:ext cx="10972080" cy="1005120"/>
           </a:xfrm>
           <a:prstGeom prst="rect">
             <a:avLst/>
@@ -6130,7 +6473,7 @@
         <p:spPr>
           <a:xfrm>
             <a:off x="685800" y="1554480"/>
-            <a:ext cx="10972440" cy="1994400"/>
+            <a:ext cx="10972080" cy="1993680"/>
           </a:xfrm>
           <a:prstGeom prst="rect">
             <a:avLst/>
@@ -6314,7 +6657,7 @@
         <p:spPr>
           <a:xfrm>
             <a:off x="640080" y="411480"/>
-            <a:ext cx="10972440" cy="1005480"/>
+            <a:ext cx="10972080" cy="1005120"/>
           </a:xfrm>
           <a:prstGeom prst="rect">
             <a:avLst/>
@@ -6374,7 +6717,7 @@
         <p:spPr>
           <a:xfrm>
             <a:off x="685800" y="1554480"/>
-            <a:ext cx="10972440" cy="4845960"/>
+            <a:ext cx="10972080" cy="4845600"/>
           </a:xfrm>
           <a:prstGeom prst="rect">
             <a:avLst/>
@@ -6558,7 +6901,7 @@
         <p:spPr>
           <a:xfrm>
             <a:off x="640080" y="411480"/>
-            <a:ext cx="10972440" cy="1005480"/>
+            <a:ext cx="10972080" cy="1005120"/>
           </a:xfrm>
           <a:prstGeom prst="rect">
             <a:avLst/>
@@ -6618,7 +6961,7 @@
         <p:spPr>
           <a:xfrm>
             <a:off x="685800" y="1554480"/>
-            <a:ext cx="10972440" cy="1704960"/>
+            <a:ext cx="10972080" cy="1704240"/>
           </a:xfrm>
           <a:prstGeom prst="rect">
             <a:avLst/>
@@ -6802,7 +7145,7 @@
         <p:spPr>
           <a:xfrm>
             <a:off x="640080" y="411480"/>
-            <a:ext cx="10972440" cy="1005480"/>
+            <a:ext cx="10972080" cy="1005120"/>
           </a:xfrm>
           <a:prstGeom prst="rect">
             <a:avLst/>
@@ -6862,7 +7205,7 @@
         <p:spPr>
           <a:xfrm>
             <a:off x="685800" y="1554480"/>
-            <a:ext cx="10972440" cy="1704960"/>
+            <a:ext cx="10972080" cy="1704240"/>
           </a:xfrm>
           <a:prstGeom prst="rect">
             <a:avLst/>
@@ -6958,7 +7301,7 @@
                 <a:uFillTx/>
                 <a:latin typeface="Calibri"/>
               </a:rPr>
-              <a:t>•  The runs differ with flock sizes and leader counts vary from run to run.</a:t>
+              <a:t>•  The runs differ with flock sizes and leader counts varying from run to run.</a:t>
             </a:r>
             <a:endParaRPr lang="en-US" sz="1900" b="0" u="none" strike="noStrike">
               <a:solidFill>
@@ -7046,6 +7389,250 @@
         <p:spPr>
           <a:xfrm>
             <a:off x="640080" y="411480"/>
+            <a:ext cx="10972080" cy="1005120"/>
+          </a:xfrm>
+          <a:prstGeom prst="rect">
+            <a:avLst/>
+          </a:prstGeom>
+          <a:noFill/>
+          <a:ln w="0">
+            <a:noFill/>
+          </a:ln>
+        </p:spPr>
+        <p:style>
+          <a:lnRef idx="0"/>
+          <a:fillRef idx="0"/>
+          <a:effectRef idx="0"/>
+          <a:fontRef idx="minor"/>
+        </p:style>
+        <p:txBody>
+          <a:bodyPr lIns="90000" rIns="90000" tIns="45000" bIns="45000" anchor="t">
+            <a:spAutoFit/>
+          </a:bodyPr>
+          <a:p>
+            <a:pPr defTabSz="457200">
+              <a:lnSpc>
+                <a:spcPct val="100000"/>
+              </a:lnSpc>
+              <a:spcAft>
+                <a:spcPts val="799"/>
+              </a:spcAft>
+            </a:pPr>
+            <a:r>
+              <a:rPr lang="en-US" sz="3000" b="1" u="none" strike="noStrike">
+                <a:solidFill>
+                  <a:srgbClr val="e03a3c"/>
+                </a:solidFill>
+                <a:effectLst/>
+                <a:uFillTx/>
+                <a:latin typeface="Calibri"/>
+              </a:rPr>
+              <a:t>Results and next steps</a:t>
+            </a:r>
+            <a:endParaRPr lang="en-US" sz="3000" b="0" u="none" strike="noStrike">
+              <a:solidFill>
+                <a:srgbClr val="ffffff"/>
+              </a:solidFill>
+              <a:effectLst/>
+              <a:uFillTx/>
+              <a:latin typeface="Arial"/>
+            </a:endParaRPr>
+          </a:p>
+        </p:txBody>
+      </p:sp>
+      <p:sp>
+        <p:nvSpPr>
+          <p:cNvPr id="72" name="TextBox 2"/>
+          <p:cNvSpPr/>
+          <p:nvPr/>
+        </p:nvSpPr>
+        <p:spPr>
+          <a:xfrm>
+            <a:off x="685800" y="1554480"/>
+            <a:ext cx="10972080" cy="1704240"/>
+          </a:xfrm>
+          <a:prstGeom prst="rect">
+            <a:avLst/>
+          </a:prstGeom>
+          <a:noFill/>
+          <a:ln w="0">
+            <a:noFill/>
+          </a:ln>
+        </p:spPr>
+        <p:style>
+          <a:lnRef idx="0"/>
+          <a:fillRef idx="0"/>
+          <a:effectRef idx="0"/>
+          <a:fontRef idx="minor"/>
+        </p:style>
+        <p:txBody>
+          <a:bodyPr lIns="90000" rIns="90000" tIns="45000" bIns="45000" anchor="t">
+            <a:spAutoFit/>
+          </a:bodyPr>
+          <a:p>
+            <a:pPr defTabSz="457200">
+              <a:lnSpc>
+                <a:spcPct val="100000"/>
+              </a:lnSpc>
+              <a:spcAft>
+                <a:spcPts val="1199"/>
+              </a:spcAft>
+            </a:pPr>
+            <a:r>
+              <a:rPr lang="en-US" sz="1900" b="0" u="none" strike="noStrike">
+                <a:solidFill>
+                  <a:srgbClr val="ececec"/>
+                </a:solidFill>
+                <a:effectLst/>
+                <a:uFillTx/>
+                <a:latin typeface="Calibri"/>
+              </a:rPr>
+              <a:t>•  We now have a reproducible generator that turns the simulation into parameter diverse training data.</a:t>
+            </a:r>
+            <a:endParaRPr lang="en-US" sz="1900" b="0" u="none" strike="noStrike">
+              <a:solidFill>
+                <a:srgbClr val="ffffff"/>
+              </a:solidFill>
+              <a:effectLst/>
+              <a:uFillTx/>
+              <a:latin typeface="Arial"/>
+            </a:endParaRPr>
+          </a:p>
+          <a:p>
+            <a:pPr defTabSz="457200">
+              <a:lnSpc>
+                <a:spcPct val="100000"/>
+              </a:lnSpc>
+              <a:spcAft>
+                <a:spcPts val="1199"/>
+              </a:spcAft>
+            </a:pPr>
+            <a:r>
+              <a:rPr lang="en-US" sz="1900" b="0" u="none" strike="noStrike">
+                <a:solidFill>
+                  <a:srgbClr val="ececec"/>
+                </a:solidFill>
+                <a:effectLst/>
+                <a:uFillTx/>
+                <a:latin typeface="Calibri"/>
+              </a:rPr>
+              <a:t>•  Each run is saved in both a readable and a compact form, tied to its parameters.</a:t>
+            </a:r>
+            <a:endParaRPr lang="en-US" sz="1900" b="0" u="none" strike="noStrike">
+              <a:solidFill>
+                <a:srgbClr val="ffffff"/>
+              </a:solidFill>
+              <a:effectLst/>
+              <a:uFillTx/>
+              <a:latin typeface="Arial"/>
+            </a:endParaRPr>
+          </a:p>
+          <a:p>
+            <a:pPr defTabSz="457200">
+              <a:lnSpc>
+                <a:spcPct val="100000"/>
+              </a:lnSpc>
+              <a:spcAft>
+                <a:spcPts val="1199"/>
+              </a:spcAft>
+            </a:pPr>
+            <a:r>
+              <a:rPr lang="en-US" sz="1900" b="0" u="none" strike="noStrike">
+                <a:solidFill>
+                  <a:srgbClr val="ececec"/>
+                </a:solidFill>
+                <a:effectLst/>
+                <a:uFillTx/>
+                <a:latin typeface="Calibri"/>
+              </a:rPr>
+              <a:t>•  This dataset is the raw material the Graph Neural Network will learn from.</a:t>
+            </a:r>
+            <a:endParaRPr lang="en-US" sz="1900" b="0" u="none" strike="noStrike">
+              <a:solidFill>
+                <a:srgbClr val="ffffff"/>
+              </a:solidFill>
+              <a:effectLst/>
+              <a:uFillTx/>
+              <a:latin typeface="Arial"/>
+            </a:endParaRPr>
+          </a:p>
+          <a:p>
+            <a:pPr defTabSz="457200">
+              <a:lnSpc>
+                <a:spcPct val="100000"/>
+              </a:lnSpc>
+              <a:spcAft>
+                <a:spcPts val="1199"/>
+              </a:spcAft>
+            </a:pPr>
+            <a:r>
+              <a:rPr lang="en-US" sz="1900" b="0" u="none" strike="noStrike">
+                <a:solidFill>
+                  <a:srgbClr val="ececec"/>
+                </a:solidFill>
+                <a:effectLst/>
+                <a:uFillTx/>
+                <a:latin typeface="Calibri"/>
+              </a:rPr>
+              <a:t>•  Next? Run the sweep at scale on the cluster, then train a first GNN on the collected trajectories.</a:t>
+            </a:r>
+            <a:endParaRPr lang="en-US" sz="1900" b="0" u="none" strike="noStrike">
+              <a:solidFill>
+                <a:srgbClr val="ffffff"/>
+              </a:solidFill>
+              <a:effectLst/>
+              <a:uFillTx/>
+              <a:latin typeface="Arial"/>
+            </a:endParaRPr>
+          </a:p>
+        </p:txBody>
+      </p:sp>
+    </p:spTree>
+  </p:cSld>
+  <mc:AlternateContent>
+    <mc:Choice Requires="p14">
+      <p:transition spd="slow" p14:dur="2000"/>
+    </mc:Choice>
+    <mc:Fallback>
+      <p:transition spd="slow"/>
+    </mc:Fallback>
+  </mc:AlternateContent>
+</p:sld>
+</file>
+
+<file path=ppt/slides/slide7.xml><?xml version="1.0" encoding="utf-8"?>
+<p:sld xmlns:a="http://schemas.openxmlformats.org/drawingml/2006/main" xmlns:p="http://schemas.openxmlformats.org/presentationml/2006/main" xmlns:r="http://schemas.openxmlformats.org/officeDocument/2006/relationships" xmlns:p14="http://schemas.microsoft.com/office/powerpoint/2010/main" xmlns:p15="http://schemas.microsoft.com/office/powerpoint/2012/main" xmlns:mc="http://schemas.openxmlformats.org/markup-compatibility/2006">
+  <p:cSld>
+    <p:bg>
+      <p:bgPr>
+        <a:solidFill>
+          <a:srgbClr val="1e1e26"/>
+        </a:solidFill>
+      </p:bgPr>
+    </p:bg>
+    <p:spTree>
+      <p:nvGrpSpPr>
+        <p:cNvPr id="1" name=""/>
+        <p:cNvGrpSpPr/>
+        <p:nvPr/>
+      </p:nvGrpSpPr>
+      <p:grpSpPr>
+        <a:xfrm>
+          <a:off x="0" y="0"/>
+          <a:ext cx="0" cy="0"/>
+          <a:chOff x="0" y="0"/>
+          <a:chExt cx="0" cy="0"/>
+        </a:xfrm>
+      </p:grpSpPr>
+      <p:sp>
+        <p:nvSpPr>
+          <p:cNvPr id="73" name="TextBox 1"/>
+          <p:cNvSpPr/>
+          <p:nvPr/>
+        </p:nvSpPr>
+        <p:spPr>
+          <a:xfrm>
+            <a:off x="640080" y="411480"/>
             <a:ext cx="10972440" cy="1005480"/>
           </a:xfrm>
           <a:prstGeom prst="rect">
@@ -7067,7 +7654,7 @@
             <a:spAutoFit/>
           </a:bodyPr>
           <a:p>
-            <a:pPr defTabSz="457200">
+            <a:pPr>
               <a:lnSpc>
                 <a:spcPct val="100000"/>
               </a:lnSpc>
@@ -7084,7 +7671,7 @@
                 <a:uFillTx/>
                 <a:latin typeface="Calibri"/>
               </a:rPr>
-              <a:t>Results and next steps</a:t>
+              <a:t>Open questions for you on storing the graphs</a:t>
             </a:r>
             <a:endParaRPr lang="en-US" sz="3000" b="0" u="none" strike="noStrike">
               <a:solidFill>
@@ -7099,14 +7686,14 @@
       </p:sp>
       <p:sp>
         <p:nvSpPr>
-          <p:cNvPr id="72" name="TextBox 2"/>
+          <p:cNvPr id="74" name="TextBox 2"/>
           <p:cNvSpPr/>
           <p:nvPr/>
         </p:nvSpPr>
         <p:spPr>
           <a:xfrm>
-            <a:off x="685800" y="1554480"/>
-            <a:ext cx="10972440" cy="1704960"/>
+            <a:off x="685800" y="1463040"/>
+            <a:ext cx="10972440" cy="4571640"/>
           </a:xfrm>
           <a:prstGeom prst="rect">
             <a:avLst/>
@@ -7127,16 +7714,16 @@
             <a:spAutoFit/>
           </a:bodyPr>
           <a:p>
-            <a:pPr defTabSz="457200">
+            <a:pPr>
               <a:lnSpc>
                 <a:spcPct val="100000"/>
               </a:lnSpc>
               <a:spcAft>
-                <a:spcPts val="1199"/>
+                <a:spcPts val="1001"/>
               </a:spcAft>
             </a:pPr>
             <a:r>
-              <a:rPr lang="en-US" sz="1900" b="0" u="none" strike="noStrike">
+              <a:rPr lang="en-US" sz="1800" b="0" u="none" strike="noStrike">
                 <a:solidFill>
                   <a:srgbClr val="ececec"/>
                 </a:solidFill>
@@ -7144,9 +7731,9 @@
                 <a:uFillTx/>
                 <a:latin typeface="Calibri"/>
               </a:rPr>
-              <a:t>•  We now have a reproducible generator that turns the simulation into parameter diverse training data.</a:t>
-            </a:r>
-            <a:endParaRPr lang="en-US" sz="1900" b="0" u="none" strike="noStrike">
+              <a:t>•  Three rule radii means three neighbor graphs. Store all three, or one graph with edge types? *</a:t>
+            </a:r>
+            <a:endParaRPr lang="en-US" sz="1800" b="0" u="none" strike="noStrike">
               <a:solidFill>
                 <a:srgbClr val="ffffff"/>
               </a:solidFill>
@@ -7156,16 +7743,16 @@
             </a:endParaRPr>
           </a:p>
           <a:p>
-            <a:pPr defTabSz="457200">
+            <a:pPr>
               <a:lnSpc>
                 <a:spcPct val="100000"/>
               </a:lnSpc>
               <a:spcAft>
-                <a:spcPts val="1199"/>
+                <a:spcPts val="1001"/>
               </a:spcAft>
             </a:pPr>
             <a:r>
-              <a:rPr lang="en-US" sz="1900" b="0" u="none" strike="noStrike">
+              <a:rPr lang="en-US" sz="1800" b="0" u="none" strike="noStrike">
                 <a:solidFill>
                   <a:srgbClr val="ececec"/>
                 </a:solidFill>
@@ -7173,9 +7760,9 @@
                 <a:uFillTx/>
                 <a:latin typeface="Calibri"/>
               </a:rPr>
-              <a:t>•  Each run is saved in both a readable and a compact form, tied to its parameters.</a:t>
-            </a:r>
-            <a:endParaRPr lang="en-US" sz="1900" b="0" u="none" strike="noStrike">
+              <a:t>•  Connectivity only, or edges carrying distance and relative velocity? *</a:t>
+            </a:r>
+            <a:endParaRPr lang="en-US" sz="1800" b="0" u="none" strike="noStrike">
               <a:solidFill>
                 <a:srgbClr val="ffffff"/>
               </a:solidFill>
@@ -7185,16 +7772,16 @@
             </a:endParaRPr>
           </a:p>
           <a:p>
-            <a:pPr defTabSz="457200">
+            <a:pPr>
               <a:lnSpc>
                 <a:spcPct val="100000"/>
               </a:lnSpc>
               <a:spcAft>
-                <a:spcPts val="1199"/>
+                <a:spcPts val="1001"/>
               </a:spcAft>
             </a:pPr>
             <a:r>
-              <a:rPr lang="en-US" sz="1900" b="0" u="none" strike="noStrike">
+              <a:rPr lang="en-US" sz="1800" b="0" u="none" strike="noStrike">
                 <a:solidFill>
                   <a:srgbClr val="ececec"/>
                 </a:solidFill>
@@ -7202,9 +7789,9 @@
                 <a:uFillTx/>
                 <a:latin typeface="Calibri"/>
               </a:rPr>
-              <a:t>•  This dataset is the raw material the Graph Neural Network will learn from.</a:t>
-            </a:r>
-            <a:endParaRPr lang="en-US" sz="1900" b="0" u="none" strike="noStrike">
+              <a:t>•  Is the graph an input to the model, or the thing the model predicts? *</a:t>
+            </a:r>
+            <a:endParaRPr lang="en-US" sz="1800" b="0" u="none" strike="noStrike">
               <a:solidFill>
                 <a:srgbClr val="ffffff"/>
               </a:solidFill>
@@ -7214,16 +7801,16 @@
             </a:endParaRPr>
           </a:p>
           <a:p>
-            <a:pPr defTabSz="457200">
+            <a:pPr>
               <a:lnSpc>
                 <a:spcPct val="100000"/>
               </a:lnSpc>
               <a:spcAft>
-                <a:spcPts val="1199"/>
+                <a:spcPts val="1001"/>
               </a:spcAft>
             </a:pPr>
             <a:r>
-              <a:rPr lang="en-US" sz="1900" b="0" u="none" strike="noStrike">
+              <a:rPr lang="en-US" sz="1800" b="0" u="none" strike="noStrike">
                 <a:solidFill>
                   <a:srgbClr val="ececec"/>
                 </a:solidFill>
@@ -7231,9 +7818,214 @@
                 <a:uFillTx/>
                 <a:latin typeface="Calibri"/>
               </a:rPr>
-              <a:t>•  Next? Run the sweep at scale on the cluster, then train a first GNN on the collected trajectories.</a:t>
-            </a:r>
-            <a:endParaRPr lang="en-US" sz="1900" b="0" u="none" strike="noStrike">
+              <a:t>•  Does Angel have a binary format we should match, or do we define one? *</a:t>
+            </a:r>
+            <a:endParaRPr lang="en-US" sz="1800" b="0" u="none" strike="noStrike">
+              <a:solidFill>
+                <a:srgbClr val="ffffff"/>
+              </a:solidFill>
+              <a:effectLst/>
+              <a:uFillTx/>
+              <a:latin typeface="Arial"/>
+            </a:endParaRPr>
+          </a:p>
+          <a:p>
+            <a:pPr>
+              <a:lnSpc>
+                <a:spcPct val="100000"/>
+              </a:lnSpc>
+              <a:spcAft>
+                <a:spcPts val="1001"/>
+              </a:spcAft>
+            </a:pPr>
+            <a:r>
+              <a:rPr lang="en-US" sz="1800" b="0" u="none" strike="noStrike">
+                <a:solidFill>
+                  <a:srgbClr val="ececec"/>
+                </a:solidFill>
+                <a:effectLst/>
+                <a:uFillTx/>
+                <a:latin typeface="Calibri"/>
+              </a:rPr>
+              <a:t>•  Scale the sweep in 2D now, or hold until the simulation is 3D?</a:t>
+            </a:r>
+            <a:endParaRPr lang="en-US" sz="1800" b="0" u="none" strike="noStrike">
+              <a:solidFill>
+                <a:srgbClr val="ffffff"/>
+              </a:solidFill>
+              <a:effectLst/>
+              <a:uFillTx/>
+              <a:latin typeface="Arial"/>
+            </a:endParaRPr>
+          </a:p>
+          <a:p>
+            <a:pPr>
+              <a:lnSpc>
+                <a:spcPct val="100000"/>
+              </a:lnSpc>
+              <a:spcAft>
+                <a:spcPts val="1001"/>
+              </a:spcAft>
+            </a:pPr>
+            <a:r>
+              <a:rPr lang="en-US" sz="1800" b="0" u="none" strike="noStrike">
+                <a:solidFill>
+                  <a:srgbClr val="ececec"/>
+                </a:solidFill>
+                <a:effectLst/>
+                <a:uFillTx/>
+                <a:latin typeface="Calibri"/>
+              </a:rPr>
+              <a:t>•  Save the graph every frame, or subsample?</a:t>
+            </a:r>
+            <a:endParaRPr lang="en-US" sz="1800" b="0" u="none" strike="noStrike">
+              <a:solidFill>
+                <a:srgbClr val="ffffff"/>
+              </a:solidFill>
+              <a:effectLst/>
+              <a:uFillTx/>
+              <a:latin typeface="Arial"/>
+            </a:endParaRPr>
+          </a:p>
+          <a:p>
+            <a:pPr>
+              <a:lnSpc>
+                <a:spcPct val="100000"/>
+              </a:lnSpc>
+              <a:spcAft>
+                <a:spcPts val="1001"/>
+              </a:spcAft>
+            </a:pPr>
+            <a:r>
+              <a:rPr lang="en-US" sz="1800" b="0" u="none" strike="noStrike">
+                <a:solidFill>
+                  <a:srgbClr val="ececec"/>
+                </a:solidFill>
+                <a:effectLst/>
+                <a:uFillTx/>
+                <a:latin typeface="Calibri"/>
+              </a:rPr>
+              <a:t>•  Keep a CSV for every run, or only a few readable samples?</a:t>
+            </a:r>
+            <a:endParaRPr lang="en-US" sz="1800" b="0" u="none" strike="noStrike">
+              <a:solidFill>
+                <a:srgbClr val="ffffff"/>
+              </a:solidFill>
+              <a:effectLst/>
+              <a:uFillTx/>
+              <a:latin typeface="Arial"/>
+            </a:endParaRPr>
+          </a:p>
+          <a:p>
+            <a:pPr>
+              <a:lnSpc>
+                <a:spcPct val="100000"/>
+              </a:lnSpc>
+              <a:spcAft>
+                <a:spcPts val="1001"/>
+              </a:spcAft>
+            </a:pPr>
+            <a:r>
+              <a:rPr lang="en-US" sz="1800" b="0" u="none" strike="noStrike">
+                <a:solidFill>
+                  <a:srgbClr val="ececec"/>
+                </a:solidFill>
+                <a:effectLst/>
+                <a:uFillTx/>
+                <a:latin typeface="Calibri"/>
+              </a:rPr>
+              <a:t>•  Are the predator and obstacles nodes in the graph?</a:t>
+            </a:r>
+            <a:endParaRPr lang="en-US" sz="1800" b="0" u="none" strike="noStrike">
+              <a:solidFill>
+                <a:srgbClr val="ffffff"/>
+              </a:solidFill>
+              <a:effectLst/>
+              <a:uFillTx/>
+              <a:latin typeface="Arial"/>
+            </a:endParaRPr>
+          </a:p>
+          <a:p>
+            <a:pPr>
+              <a:lnSpc>
+                <a:spcPct val="100000"/>
+              </a:lnSpc>
+              <a:spcAft>
+                <a:spcPts val="1001"/>
+              </a:spcAft>
+            </a:pPr>
+            <a:r>
+              <a:rPr lang="en-US" sz="1800" b="0" u="none" strike="noStrike">
+                <a:solidFill>
+                  <a:srgbClr val="ececec"/>
+                </a:solidFill>
+                <a:effectLst/>
+                <a:uFillTx/>
+                <a:latin typeface="Calibri"/>
+              </a:rPr>
+              <a:t>•  Keep flock size varying from run to run?</a:t>
+            </a:r>
+            <a:endParaRPr lang="en-US" sz="1800" b="0" u="none" strike="noStrike">
+              <a:solidFill>
+                <a:srgbClr val="ffffff"/>
+              </a:solidFill>
+              <a:effectLst/>
+              <a:uFillTx/>
+              <a:latin typeface="Arial"/>
+            </a:endParaRPr>
+          </a:p>
+        </p:txBody>
+      </p:sp>
+      <p:sp>
+        <p:nvSpPr>
+          <p:cNvPr id="75" name="TextBox 3"/>
+          <p:cNvSpPr/>
+          <p:nvPr/>
+        </p:nvSpPr>
+        <p:spPr>
+          <a:xfrm>
+            <a:off x="685800" y="5989320"/>
+            <a:ext cx="10972440" cy="303840"/>
+          </a:xfrm>
+          <a:prstGeom prst="rect">
+            <a:avLst/>
+          </a:prstGeom>
+          <a:noFill/>
+          <a:ln w="0">
+            <a:noFill/>
+          </a:ln>
+        </p:spPr>
+        <p:style>
+          <a:lnRef idx="0"/>
+          <a:fillRef idx="0"/>
+          <a:effectRef idx="0"/>
+          <a:fontRef idx="minor"/>
+        </p:style>
+        <p:txBody>
+          <a:bodyPr lIns="90000" rIns="90000" tIns="45000" bIns="45000" anchor="t">
+            <a:spAutoFit/>
+          </a:bodyPr>
+          <a:p>
+            <a:pPr>
+              <a:lnSpc>
+                <a:spcPct val="100000"/>
+              </a:lnSpc>
+              <a:spcAft>
+                <a:spcPts val="799"/>
+              </a:spcAft>
+            </a:pPr>
+            <a:r>
+              <a:rPr lang="en-US" sz="1400" b="0" u="none" strike="noStrike">
+                <a:solidFill>
+                  <a:srgbClr val="b2b2be"/>
+                </a:solidFill>
+                <a:effectLst/>
+                <a:uFillTx/>
+                <a:latin typeface="Calibri"/>
+              </a:rPr>
+              <a:t>*  Blocking. We need your answer on these before we can write anything</a:t>
+            </a:r>
+            <a:endParaRPr lang="en-US" sz="1400" b="0" u="none" strike="noStrike">
               <a:solidFill>
                 <a:srgbClr val="ffffff"/>
               </a:solidFill>
